--- a/slides/presentation.pptx
+++ b/slides/presentation.pptx
@@ -4409,7 +4409,7 @@
                 </a:solidFill>
                 <a:latin typeface="Calibri"/>
               </a:rPr>
-              <a:t>Reza Zamani  ·  [partner]</a:t>
+              <a:t>Reza Zamani  ·  Paraj</a:t>
             </a:r>
           </a:p>
         </p:txBody>

--- a/slides/presentation.pptx
+++ b/slides/presentation.pptx
@@ -8070,7 +8070,7 @@
                 </a:solidFill>
                 <a:latin typeface="Calibri"/>
               </a:rPr>
-              <a:t>crowded months out of 328</a:t>
+              <a:t>crowded months out of 247 with a crowding signal</a:t>
             </a:r>
           </a:p>
         </p:txBody>

--- a/slides/presentation.pptx
+++ b/slides/presentation.pptx
@@ -5841,7 +5841,7 @@
                 </a:solidFill>
                 <a:latin typeface="Cambria"/>
               </a:rPr>
-              <a:t>Crypto carry: weak in-sample, strong since 2024</a:t>
+              <a:t>Crypto carry: weak, then strong since 2024</a:t>
             </a:r>
           </a:p>
         </p:txBody>
@@ -9143,10 +9143,10 @@
                 <a:tableStyleId>{5C22544A-7EE6-4342-B048-85BDC9FD1C3A}</a:tableStyleId>
               </a:tblPr>
               <a:tblGrid>
-                <a:gridCol w="1325880"/>
+                <a:gridCol w="1188720"/>
                 <a:gridCol w="731520"/>
-                <a:gridCol w="777240"/>
-                <a:gridCol w="822960"/>
+                <a:gridCol w="731520"/>
+                <a:gridCol w="1005840"/>
               </a:tblGrid>
               <a:tr h="329184">
                 <a:tc>
@@ -13757,7 +13757,7 @@
                     <a:bodyPr/>
                     <a:lstStyle/>
                     <a:p>
-                      <a:pPr algn="r"/>
+                      <a:pPr algn="l"/>
                       <a:r>
                         <a:rPr sz="1300" b="1">
                           <a:solidFill>
@@ -13780,7 +13780,7 @@
                     <a:bodyPr/>
                     <a:lstStyle/>
                     <a:p>
-                      <a:pPr algn="r"/>
+                      <a:pPr algn="l"/>
                       <a:r>
                         <a:rPr sz="1300" b="1">
                           <a:solidFill>
@@ -13803,7 +13803,7 @@
                     <a:bodyPr/>
                     <a:lstStyle/>
                     <a:p>
-                      <a:pPr algn="r"/>
+                      <a:pPr algn="l"/>
                       <a:r>
                         <a:rPr sz="1300" b="1">
                           <a:solidFill>
@@ -13851,7 +13851,7 @@
                     <a:bodyPr/>
                     <a:lstStyle/>
                     <a:p>
-                      <a:pPr algn="r"/>
+                      <a:pPr algn="l"/>
                       <a:r>
                         <a:rPr sz="1300" b="0">
                           <a:solidFill>
@@ -13874,7 +13874,7 @@
                     <a:bodyPr/>
                     <a:lstStyle/>
                     <a:p>
-                      <a:pPr algn="r"/>
+                      <a:pPr algn="l"/>
                       <a:r>
                         <a:rPr sz="1300" b="0">
                           <a:solidFill>
@@ -13897,7 +13897,7 @@
                     <a:bodyPr/>
                     <a:lstStyle/>
                     <a:p>
-                      <a:pPr algn="r"/>
+                      <a:pPr algn="l"/>
                       <a:r>
                         <a:rPr sz="1300" b="0">
                           <a:solidFill>
@@ -13945,7 +13945,7 @@
                     <a:bodyPr/>
                     <a:lstStyle/>
                     <a:p>
-                      <a:pPr algn="r"/>
+                      <a:pPr algn="l"/>
                       <a:r>
                         <a:rPr sz="1300" b="0">
                           <a:solidFill>
@@ -13968,7 +13968,7 @@
                     <a:bodyPr/>
                     <a:lstStyle/>
                     <a:p>
-                      <a:pPr algn="r"/>
+                      <a:pPr algn="l"/>
                       <a:r>
                         <a:rPr sz="1300" b="0">
                           <a:solidFill>
@@ -13991,7 +13991,7 @@
                     <a:bodyPr/>
                     <a:lstStyle/>
                     <a:p>
-                      <a:pPr algn="r"/>
+                      <a:pPr algn="l"/>
                       <a:r>
                         <a:rPr sz="1300" b="0">
                           <a:solidFill>
@@ -14039,7 +14039,7 @@
                     <a:bodyPr/>
                     <a:lstStyle/>
                     <a:p>
-                      <a:pPr algn="r"/>
+                      <a:pPr algn="l"/>
                       <a:r>
                         <a:rPr sz="1300" b="0">
                           <a:solidFill>
@@ -14062,7 +14062,7 @@
                     <a:bodyPr/>
                     <a:lstStyle/>
                     <a:p>
-                      <a:pPr algn="r"/>
+                      <a:pPr algn="l"/>
                       <a:r>
                         <a:rPr sz="1300" b="0">
                           <a:solidFill>
@@ -14085,7 +14085,7 @@
                     <a:bodyPr/>
                     <a:lstStyle/>
                     <a:p>
-                      <a:pPr algn="r"/>
+                      <a:pPr algn="l"/>
                       <a:r>
                         <a:rPr sz="1300" b="0">
                           <a:solidFill>
@@ -14133,7 +14133,7 @@
                     <a:bodyPr/>
                     <a:lstStyle/>
                     <a:p>
-                      <a:pPr algn="r"/>
+                      <a:pPr algn="l"/>
                       <a:r>
                         <a:rPr sz="1300" b="0">
                           <a:solidFill>
@@ -14156,7 +14156,7 @@
                     <a:bodyPr/>
                     <a:lstStyle/>
                     <a:p>
-                      <a:pPr algn="r"/>
+                      <a:pPr algn="l"/>
                       <a:r>
                         <a:rPr sz="1300" b="0">
                           <a:solidFill>
@@ -14179,7 +14179,7 @@
                     <a:bodyPr/>
                     <a:lstStyle/>
                     <a:p>
-                      <a:pPr algn="r"/>
+                      <a:pPr algn="l"/>
                       <a:r>
                         <a:rPr sz="1300" b="0">
                           <a:solidFill>
@@ -14227,7 +14227,7 @@
                     <a:bodyPr/>
                     <a:lstStyle/>
                     <a:p>
-                      <a:pPr algn="r"/>
+                      <a:pPr algn="l"/>
                       <a:r>
                         <a:rPr sz="1300" b="0">
                           <a:solidFill>
@@ -14250,7 +14250,7 @@
                     <a:bodyPr/>
                     <a:lstStyle/>
                     <a:p>
-                      <a:pPr algn="r"/>
+                      <a:pPr algn="l"/>
                       <a:r>
                         <a:rPr sz="1300" b="0">
                           <a:solidFill>
@@ -14273,7 +14273,7 @@
                     <a:bodyPr/>
                     <a:lstStyle/>
                     <a:p>
-                      <a:pPr algn="r"/>
+                      <a:pPr algn="l"/>
                       <a:r>
                         <a:rPr sz="1300" b="0">
                           <a:solidFill>

--- a/slides/presentation.pptx
+++ b/slides/presentation.pptx
@@ -517,7 +517,7 @@
           <a:lstStyle/>
           <a:p>
             <a:r>
-              <a:t>Reza opens. One sentence: we test whether carry trades crash when they are crowded, in G10 FX and in crypto.</a:t>
+              <a:t>Opening, one sentence: we test whether carry trades crash when they are crowded, in G10 FX and in crypto.</a:t>
             </a:r>
           </a:p>
         </p:txBody>
@@ -1077,7 +1077,7 @@
           <a:lstStyle/>
           <a:p>
             <a:r>
-              <a:t>Walk through the nine steps in one breath and say who presents which part.</a:t>
+              <a:t>Walk through the nine steps in one breath.</a:t>
             </a:r>
           </a:p>
         </p:txBody>
@@ -4889,7 +4889,7 @@
         <p:spPr>
           <a:xfrm>
             <a:off x="548640" y="411480"/>
-            <a:ext cx="9692640" cy="731520"/>
+            <a:ext cx="11064240" cy="731520"/>
           </a:xfrm>
           <a:prstGeom prst="rect">
             <a:avLst/>
@@ -4960,27 +4960,24 @@
       </p:sp>
       <p:sp>
         <p:nvSpPr>
-          <p:cNvPr id="4" name="Rounded Rectangle 3"/>
+          <p:cNvPr id="4" name="Oval 3"/>
           <p:cNvSpPr/>
           <p:nvPr/>
         </p:nvSpPr>
         <p:spPr>
           <a:xfrm>
-            <a:off x="10271455" y="457200"/>
-            <a:ext cx="1371600" cy="384048"/>
-          </a:xfrm>
-          <a:prstGeom prst="roundRect">
-            <a:avLst>
-              <a:gd name="adj" fmla="val 8000"/>
-            </a:avLst>
+            <a:off x="548640" y="1874519"/>
+            <a:ext cx="502920" cy="502920"/>
+          </a:xfrm>
+          <a:prstGeom prst="ellipse">
+            <a:avLst/>
           </a:prstGeom>
           <a:solidFill>
-            <a:srgbClr val="E39B17"/>
+            <a:srgbClr val="14213D"/>
           </a:solidFill>
           <a:ln>
             <a:noFill/>
           </a:ln>
-          <a:effectLst/>
         </p:spPr>
         <p:style>
           <a:lnRef idx="1">
@@ -4997,31 +4994,109 @@
           </a:fontRef>
         </p:style>
         <p:txBody>
-          <a:bodyPr rtlCol="0" anchor="ctr" lIns="0" rIns="0"/>
+          <a:bodyPr rtlCol="0" anchor="ctr"/>
           <a:lstStyle/>
           <a:p>
             <a:pPr algn="ctr"/>
             <a:r>
-              <a:rPr sz="1200" b="1">
+              <a:rPr sz="1600" b="1">
+                <a:solidFill>
+                  <a:srgbClr val="FFFFFF"/>
+                </a:solidFill>
+                <a:latin typeface="Calibri"/>
+              </a:rPr>
+              <a:t>1</a:t>
+            </a:r>
+          </a:p>
+        </p:txBody>
+      </p:sp>
+      <p:sp>
+        <p:nvSpPr>
+          <p:cNvPr id="5" name="TextBox 4"/>
+          <p:cNvSpPr txBox="1"/>
+          <p:nvPr/>
+        </p:nvSpPr>
+        <p:spPr>
+          <a:xfrm>
+            <a:off x="1280160" y="1856231"/>
+            <a:ext cx="5852160" cy="365760"/>
+          </a:xfrm>
+          <a:prstGeom prst="rect">
+            <a:avLst/>
+          </a:prstGeom>
+          <a:noFill/>
+        </p:spPr>
+        <p:txBody>
+          <a:bodyPr wrap="square" anchor="t" lIns="0" rIns="0" tIns="0" bIns="0">
+            <a:spAutoFit/>
+          </a:bodyPr>
+          <a:lstStyle/>
+          <a:p>
+            <a:pPr algn="l">
+              <a:spcAft>
+                <a:spcPts val="600"/>
+              </a:spcAft>
+            </a:pPr>
+            <a:r>
+              <a:rPr sz="1700" b="1" i="0">
                 <a:solidFill>
                   <a:srgbClr val="14213D"/>
                 </a:solidFill>
                 <a:latin typeface="Calibri"/>
               </a:rPr>
-              <a:t>Paraj</a:t>
-            </a:r>
-          </a:p>
-        </p:txBody>
-      </p:sp>
-      <p:sp>
-        <p:nvSpPr>
-          <p:cNvPr id="5" name="Oval 4"/>
+              <a:t>Signal</a:t>
+            </a:r>
+          </a:p>
+        </p:txBody>
+      </p:sp>
+      <p:sp>
+        <p:nvSpPr>
+          <p:cNvPr id="6" name="TextBox 5"/>
+          <p:cNvSpPr txBox="1"/>
+          <p:nvPr/>
+        </p:nvSpPr>
+        <p:spPr>
+          <a:xfrm>
+            <a:off x="1280160" y="2221991"/>
+            <a:ext cx="5852160" cy="731519"/>
+          </a:xfrm>
+          <a:prstGeom prst="rect">
+            <a:avLst/>
+          </a:prstGeom>
+          <a:noFill/>
+        </p:spPr>
+        <p:txBody>
+          <a:bodyPr wrap="square" anchor="t" lIns="0" rIns="0" tIns="0" bIns="0">
+            <a:spAutoFit/>
+          </a:bodyPr>
+          <a:lstStyle/>
+          <a:p>
+            <a:pPr algn="l">
+              <a:spcAft>
+                <a:spcPts val="600"/>
+              </a:spcAft>
+            </a:pPr>
+            <a:r>
+              <a:rPr sz="1400" b="0" i="0">
+                <a:solidFill>
+                  <a:srgbClr val="1B1F27"/>
+                </a:solidFill>
+                <a:latin typeface="Calibri"/>
+              </a:rPr>
+              <a:t>Trailing 7-day average funding rate, data up to the day before.</a:t>
+            </a:r>
+          </a:p>
+        </p:txBody>
+      </p:sp>
+      <p:sp>
+        <p:nvSpPr>
+          <p:cNvPr id="7" name="Oval 6"/>
           <p:cNvSpPr/>
           <p:nvPr/>
         </p:nvSpPr>
         <p:spPr>
           <a:xfrm>
-            <a:off x="548640" y="1874519"/>
+            <a:off x="548640" y="2971800"/>
             <a:ext cx="502920" cy="502920"/>
           </a:xfrm>
           <a:prstGeom prst="ellipse">
@@ -5060,20 +5135,20 @@
                 </a:solidFill>
                 <a:latin typeface="Calibri"/>
               </a:rPr>
-              <a:t>1</a:t>
-            </a:r>
-          </a:p>
-        </p:txBody>
-      </p:sp>
-      <p:sp>
-        <p:nvSpPr>
-          <p:cNvPr id="6" name="TextBox 5"/>
+              <a:t>2</a:t>
+            </a:r>
+          </a:p>
+        </p:txBody>
+      </p:sp>
+      <p:sp>
+        <p:nvSpPr>
+          <p:cNvPr id="8" name="TextBox 7"/>
           <p:cNvSpPr txBox="1"/>
           <p:nvPr/>
         </p:nvSpPr>
         <p:spPr>
           <a:xfrm>
-            <a:off x="1280160" y="1856231"/>
+            <a:off x="1280160" y="2953512"/>
             <a:ext cx="5852160" cy="365760"/>
           </a:xfrm>
           <a:prstGeom prst="rect">
@@ -5099,20 +5174,20 @@
                 </a:solidFill>
                 <a:latin typeface="Calibri"/>
               </a:rPr>
-              <a:t>Signal</a:t>
-            </a:r>
-          </a:p>
-        </p:txBody>
-      </p:sp>
-      <p:sp>
-        <p:nvSpPr>
-          <p:cNvPr id="7" name="TextBox 6"/>
+              <a:t>Portfolio</a:t>
+            </a:r>
+          </a:p>
+        </p:txBody>
+      </p:sp>
+      <p:sp>
+        <p:nvSpPr>
+          <p:cNvPr id="9" name="TextBox 8"/>
           <p:cNvSpPr txBox="1"/>
           <p:nvPr/>
         </p:nvSpPr>
         <p:spPr>
           <a:xfrm>
-            <a:off x="1280160" y="2221991"/>
+            <a:off x="1280160" y="3319272"/>
             <a:ext cx="5852160" cy="731519"/>
           </a:xfrm>
           <a:prstGeom prst="rect">
@@ -5138,20 +5213,20 @@
                 </a:solidFill>
                 <a:latin typeface="Calibri"/>
               </a:rPr>
-              <a:t>Trailing 7-day average funding rate, data up to the day before.</a:t>
-            </a:r>
-          </a:p>
-        </p:txBody>
-      </p:sp>
-      <p:sp>
-        <p:nvSpPr>
-          <p:cNvPr id="8" name="Oval 7"/>
+              <a:t>Each Sunday: short the top third, long the bottom third by funding. Equal weights, dollar-neutral, 5 bp costs.</a:t>
+            </a:r>
+          </a:p>
+        </p:txBody>
+      </p:sp>
+      <p:sp>
+        <p:nvSpPr>
+          <p:cNvPr id="10" name="Oval 9"/>
           <p:cNvSpPr/>
           <p:nvPr/>
         </p:nvSpPr>
         <p:spPr>
           <a:xfrm>
-            <a:off x="548640" y="2971800"/>
+            <a:off x="548640" y="4069079"/>
             <a:ext cx="502920" cy="502920"/>
           </a:xfrm>
           <a:prstGeom prst="ellipse">
@@ -5190,20 +5265,20 @@
                 </a:solidFill>
                 <a:latin typeface="Calibri"/>
               </a:rPr>
-              <a:t>2</a:t>
-            </a:r>
-          </a:p>
-        </p:txBody>
-      </p:sp>
-      <p:sp>
-        <p:nvSpPr>
-          <p:cNvPr id="9" name="TextBox 8"/>
+              <a:t>3</a:t>
+            </a:r>
+          </a:p>
+        </p:txBody>
+      </p:sp>
+      <p:sp>
+        <p:nvSpPr>
+          <p:cNvPr id="11" name="TextBox 10"/>
           <p:cNvSpPr txBox="1"/>
           <p:nvPr/>
         </p:nvSpPr>
         <p:spPr>
           <a:xfrm>
-            <a:off x="1280160" y="2953512"/>
+            <a:off x="1280160" y="4050791"/>
             <a:ext cx="5852160" cy="365760"/>
           </a:xfrm>
           <a:prstGeom prst="rect">
@@ -5229,20 +5304,20 @@
                 </a:solidFill>
                 <a:latin typeface="Calibri"/>
               </a:rPr>
-              <a:t>Portfolio</a:t>
-            </a:r>
-          </a:p>
-        </p:txBody>
-      </p:sp>
-      <p:sp>
-        <p:nvSpPr>
-          <p:cNvPr id="10" name="TextBox 9"/>
+              <a:t>P&amp;L</a:t>
+            </a:r>
+          </a:p>
+        </p:txBody>
+      </p:sp>
+      <p:sp>
+        <p:nvSpPr>
+          <p:cNvPr id="12" name="TextBox 11"/>
           <p:cNvSpPr txBox="1"/>
           <p:nvPr/>
         </p:nvSpPr>
         <p:spPr>
           <a:xfrm>
-            <a:off x="1280160" y="3319272"/>
+            <a:off x="1280160" y="4416551"/>
             <a:ext cx="5852160" cy="731519"/>
           </a:xfrm>
           <a:prstGeom prst="rect">
@@ -5268,20 +5343,20 @@
                 </a:solidFill>
                 <a:latin typeface="Calibri"/>
               </a:rPr>
-              <a:t>Each Sunday: short the top third, long the bottom third by funding. Equal weights, dollar-neutral, 5 bp costs.</a:t>
-            </a:r>
-          </a:p>
-        </p:txBody>
-      </p:sp>
-      <p:sp>
-        <p:nvSpPr>
-          <p:cNvPr id="11" name="Oval 10"/>
+              <a:t>Side × price return − side × funding paid. A short receives positive funding.</a:t>
+            </a:r>
+          </a:p>
+        </p:txBody>
+      </p:sp>
+      <p:sp>
+        <p:nvSpPr>
+          <p:cNvPr id="13" name="Oval 12"/>
           <p:cNvSpPr/>
           <p:nvPr/>
         </p:nvSpPr>
         <p:spPr>
           <a:xfrm>
-            <a:off x="548640" y="4069079"/>
+            <a:off x="548640" y="5166359"/>
             <a:ext cx="502920" cy="502920"/>
           </a:xfrm>
           <a:prstGeom prst="ellipse">
@@ -5320,20 +5395,20 @@
                 </a:solidFill>
                 <a:latin typeface="Calibri"/>
               </a:rPr>
-              <a:t>3</a:t>
-            </a:r>
-          </a:p>
-        </p:txBody>
-      </p:sp>
-      <p:sp>
-        <p:nvSpPr>
-          <p:cNvPr id="12" name="TextBox 11"/>
+              <a:t>4</a:t>
+            </a:r>
+          </a:p>
+        </p:txBody>
+      </p:sp>
+      <p:sp>
+        <p:nvSpPr>
+          <p:cNvPr id="14" name="TextBox 13"/>
           <p:cNvSpPr txBox="1"/>
           <p:nvPr/>
         </p:nvSpPr>
         <p:spPr>
           <a:xfrm>
-            <a:off x="1280160" y="4050791"/>
+            <a:off x="1280160" y="5148072"/>
             <a:ext cx="5852160" cy="365760"/>
           </a:xfrm>
           <a:prstGeom prst="rect">
@@ -5359,20 +5434,20 @@
                 </a:solidFill>
                 <a:latin typeface="Calibri"/>
               </a:rPr>
-              <a:t>P&amp;L</a:t>
-            </a:r>
-          </a:p>
-        </p:txBody>
-      </p:sp>
-      <p:sp>
-        <p:nvSpPr>
-          <p:cNvPr id="13" name="TextBox 12"/>
+              <a:t>No survivorship bias</a:t>
+            </a:r>
+          </a:p>
+        </p:txBody>
+      </p:sp>
+      <p:sp>
+        <p:nvSpPr>
+          <p:cNvPr id="15" name="TextBox 14"/>
           <p:cNvSpPr txBox="1"/>
           <p:nvPr/>
         </p:nvSpPr>
         <p:spPr>
           <a:xfrm>
-            <a:off x="1280160" y="4416551"/>
+            <a:off x="1280160" y="5513831"/>
             <a:ext cx="5852160" cy="731519"/>
           </a:xfrm>
           <a:prstGeom prst="rect">
@@ -5398,31 +5473,34 @@
                 </a:solidFill>
                 <a:latin typeface="Calibri"/>
               </a:rPr>
-              <a:t>Side × price return − side × funding paid. A short receives positive funding.</a:t>
-            </a:r>
-          </a:p>
-        </p:txBody>
-      </p:sp>
-      <p:sp>
-        <p:nvSpPr>
-          <p:cNvPr id="14" name="Oval 13"/>
+              <a:t>LUNA and FTT included; a coin trades only on days with a price and volume &gt; 0.</a:t>
+            </a:r>
+          </a:p>
+        </p:txBody>
+      </p:sp>
+      <p:sp>
+        <p:nvSpPr>
+          <p:cNvPr id="16" name="Rounded Rectangle 15"/>
           <p:cNvSpPr/>
           <p:nvPr/>
         </p:nvSpPr>
         <p:spPr>
           <a:xfrm>
-            <a:off x="548640" y="5166359"/>
-            <a:ext cx="502920" cy="502920"/>
-          </a:xfrm>
-          <a:prstGeom prst="ellipse">
-            <a:avLst/>
+            <a:off x="7863840" y="1874519"/>
+            <a:ext cx="3749039" cy="1417320"/>
+          </a:xfrm>
+          <a:prstGeom prst="roundRect">
+            <a:avLst>
+              <a:gd name="adj" fmla="val 8000"/>
+            </a:avLst>
           </a:prstGeom>
           <a:solidFill>
-            <a:srgbClr val="14213D"/>
+            <a:srgbClr val="EEF1F6"/>
           </a:solidFill>
           <a:ln>
             <a:noFill/>
           </a:ln>
+          <a:effectLst/>
         </p:spPr>
         <p:style>
           <a:lnRef idx="1">
@@ -5443,28 +5521,19 @@
           <a:lstStyle/>
           <a:p>
             <a:pPr algn="ctr"/>
-            <a:r>
-              <a:rPr sz="1600" b="1">
-                <a:solidFill>
-                  <a:srgbClr val="FFFFFF"/>
-                </a:solidFill>
-                <a:latin typeface="Calibri"/>
-              </a:rPr>
-              <a:t>4</a:t>
-            </a:r>
-          </a:p>
-        </p:txBody>
-      </p:sp>
-      <p:sp>
-        <p:nvSpPr>
-          <p:cNvPr id="15" name="TextBox 14"/>
+          </a:p>
+        </p:txBody>
+      </p:sp>
+      <p:sp>
+        <p:nvSpPr>
+          <p:cNvPr id="17" name="TextBox 16"/>
           <p:cNvSpPr txBox="1"/>
           <p:nvPr/>
         </p:nvSpPr>
         <p:spPr>
           <a:xfrm>
-            <a:off x="1280160" y="5148072"/>
-            <a:ext cx="5852160" cy="365760"/>
+            <a:off x="8092440" y="2039112"/>
+            <a:ext cx="3291839" cy="685800"/>
           </a:xfrm>
           <a:prstGeom prst="rect">
             <a:avLst/>
@@ -5483,27 +5552,27 @@
               </a:spcAft>
             </a:pPr>
             <a:r>
-              <a:rPr sz="1700" b="1" i="0">
+              <a:rPr sz="3400" b="1" i="0">
                 <a:solidFill>
                   <a:srgbClr val="14213D"/>
                 </a:solidFill>
-                <a:latin typeface="Calibri"/>
-              </a:rPr>
-              <a:t>No survivorship bias</a:t>
-            </a:r>
-          </a:p>
-        </p:txBody>
-      </p:sp>
-      <p:sp>
-        <p:nvSpPr>
-          <p:cNvPr id="16" name="TextBox 15"/>
+                <a:latin typeface="Cambria"/>
+              </a:rPr>
+              <a:t>≈ 12–15%</a:t>
+            </a:r>
+          </a:p>
+        </p:txBody>
+      </p:sp>
+      <p:sp>
+        <p:nvSpPr>
+          <p:cNvPr id="18" name="TextBox 17"/>
           <p:cNvSpPr txBox="1"/>
           <p:nvPr/>
         </p:nvSpPr>
         <p:spPr>
           <a:xfrm>
-            <a:off x="1280160" y="5513831"/>
-            <a:ext cx="5852160" cy="731519"/>
+            <a:off x="8092440" y="2715768"/>
+            <a:ext cx="3291839" cy="502920"/>
           </a:xfrm>
           <a:prstGeom prst="rect">
             <a:avLst/>
@@ -5522,26 +5591,26 @@
               </a:spcAft>
             </a:pPr>
             <a:r>
-              <a:rPr sz="1400" b="0" i="0">
-                <a:solidFill>
-                  <a:srgbClr val="1B1F27"/>
+              <a:rPr sz="1200" b="0" i="0">
+                <a:solidFill>
+                  <a:srgbClr val="5C677D"/>
                 </a:solidFill>
                 <a:latin typeface="Calibri"/>
               </a:rPr>
-              <a:t>LUNA and FTT included; a coin trades only on days with a price and volume &gt; 0.</a:t>
-            </a:r>
-          </a:p>
-        </p:txBody>
-      </p:sp>
-      <p:sp>
-        <p:nvSpPr>
-          <p:cNvPr id="17" name="Rounded Rectangle 16"/>
+              <a:t>Average annual funding on BTC, ETH, XRP, LTC, LINK: the crypto 'interest rate'</a:t>
+            </a:r>
+          </a:p>
+        </p:txBody>
+      </p:sp>
+      <p:sp>
+        <p:nvSpPr>
+          <p:cNvPr id="19" name="Rounded Rectangle 18"/>
           <p:cNvSpPr/>
           <p:nvPr/>
         </p:nvSpPr>
         <p:spPr>
           <a:xfrm>
-            <a:off x="7863840" y="1874519"/>
+            <a:off x="7863840" y="3520440"/>
             <a:ext cx="3749039" cy="1417320"/>
           </a:xfrm>
           <a:prstGeom prst="roundRect">
@@ -5581,13 +5650,13 @@
       </p:sp>
       <p:sp>
         <p:nvSpPr>
-          <p:cNvPr id="18" name="TextBox 17"/>
+          <p:cNvPr id="20" name="TextBox 19"/>
           <p:cNvSpPr txBox="1"/>
           <p:nvPr/>
         </p:nvSpPr>
         <p:spPr>
           <a:xfrm>
-            <a:off x="8092440" y="2039112"/>
+            <a:off x="8092440" y="3685032"/>
             <a:ext cx="3291839" cy="685800"/>
           </a:xfrm>
           <a:prstGeom prst="rect">
@@ -5613,138 +5682,14 @@
                 </a:solidFill>
                 <a:latin typeface="Cambria"/>
               </a:rPr>
-              <a:t>≈ 12–15%</a:t>
-            </a:r>
-          </a:p>
-        </p:txBody>
-      </p:sp>
-      <p:sp>
-        <p:nvSpPr>
-          <p:cNvPr id="19" name="TextBox 18"/>
-          <p:cNvSpPr txBox="1"/>
-          <p:nvPr/>
-        </p:nvSpPr>
-        <p:spPr>
-          <a:xfrm>
-            <a:off x="8092440" y="2715768"/>
-            <a:ext cx="3291839" cy="502920"/>
-          </a:xfrm>
-          <a:prstGeom prst="rect">
-            <a:avLst/>
-          </a:prstGeom>
-          <a:noFill/>
-        </p:spPr>
-        <p:txBody>
-          <a:bodyPr wrap="square" anchor="t" lIns="0" rIns="0" tIns="0" bIns="0">
-            <a:spAutoFit/>
-          </a:bodyPr>
-          <a:lstStyle/>
-          <a:p>
-            <a:pPr algn="l">
-              <a:spcAft>
-                <a:spcPts val="600"/>
-              </a:spcAft>
-            </a:pPr>
-            <a:r>
-              <a:rPr sz="1200" b="0" i="0">
-                <a:solidFill>
-                  <a:srgbClr val="5C677D"/>
-                </a:solidFill>
-                <a:latin typeface="Calibri"/>
-              </a:rPr>
-              <a:t>Average annual funding on BTC, ETH, XRP, LTC, LINK: the crypto 'interest rate'</a:t>
-            </a:r>
-          </a:p>
-        </p:txBody>
-      </p:sp>
-      <p:sp>
-        <p:nvSpPr>
-          <p:cNvPr id="20" name="Rounded Rectangle 19"/>
-          <p:cNvSpPr/>
-          <p:nvPr/>
-        </p:nvSpPr>
-        <p:spPr>
-          <a:xfrm>
-            <a:off x="7863840" y="3520440"/>
-            <a:ext cx="3749039" cy="1417320"/>
-          </a:xfrm>
-          <a:prstGeom prst="roundRect">
-            <a:avLst>
-              <a:gd name="adj" fmla="val 8000"/>
-            </a:avLst>
-          </a:prstGeom>
-          <a:solidFill>
-            <a:srgbClr val="EEF1F6"/>
-          </a:solidFill>
-          <a:ln>
-            <a:noFill/>
-          </a:ln>
-          <a:effectLst/>
-        </p:spPr>
-        <p:style>
-          <a:lnRef idx="1">
-            <a:schemeClr val="accent1"/>
-          </a:lnRef>
-          <a:fillRef idx="3">
-            <a:schemeClr val="accent1"/>
-          </a:fillRef>
-          <a:effectRef idx="2">
-            <a:schemeClr val="accent1"/>
-          </a:effectRef>
-          <a:fontRef idx="minor">
-            <a:schemeClr val="lt1"/>
-          </a:fontRef>
-        </p:style>
-        <p:txBody>
-          <a:bodyPr rtlCol="0" anchor="ctr"/>
-          <a:lstStyle/>
-          <a:p>
-            <a:pPr algn="ctr"/>
+              <a:t>2022-11-14</a:t>
+            </a:r>
           </a:p>
         </p:txBody>
       </p:sp>
       <p:sp>
         <p:nvSpPr>
           <p:cNvPr id="21" name="TextBox 20"/>
-          <p:cNvSpPr txBox="1"/>
-          <p:nvPr/>
-        </p:nvSpPr>
-        <p:spPr>
-          <a:xfrm>
-            <a:off x="8092440" y="3685032"/>
-            <a:ext cx="3291839" cy="685800"/>
-          </a:xfrm>
-          <a:prstGeom prst="rect">
-            <a:avLst/>
-          </a:prstGeom>
-          <a:noFill/>
-        </p:spPr>
-        <p:txBody>
-          <a:bodyPr wrap="square" anchor="t" lIns="0" rIns="0" tIns="0" bIns="0">
-            <a:spAutoFit/>
-          </a:bodyPr>
-          <a:lstStyle/>
-          <a:p>
-            <a:pPr algn="l">
-              <a:spcAft>
-                <a:spcPts val="600"/>
-              </a:spcAft>
-            </a:pPr>
-            <a:r>
-              <a:rPr sz="3400" b="1" i="0">
-                <a:solidFill>
-                  <a:srgbClr val="14213D"/>
-                </a:solidFill>
-                <a:latin typeface="Cambria"/>
-              </a:rPr>
-              <a:t>2022-11-14</a:t>
-            </a:r>
-          </a:p>
-        </p:txBody>
-      </p:sp>
-      <p:sp>
-        <p:nvSpPr>
-          <p:cNvPr id="22" name="TextBox 21"/>
           <p:cNvSpPr txBox="1"/>
           <p:nvPr/>
         </p:nvSpPr>
@@ -5816,7 +5761,7 @@
         <p:spPr>
           <a:xfrm>
             <a:off x="548640" y="411480"/>
-            <a:ext cx="9692640" cy="731520"/>
+            <a:ext cx="11064240" cy="731520"/>
           </a:xfrm>
           <a:prstGeom prst="rect">
             <a:avLst/>
@@ -5841,21 +5786,45 @@
                 </a:solidFill>
                 <a:latin typeface="Cambria"/>
               </a:rPr>
-              <a:t>Crypto carry: weak, then strong since 2024</a:t>
-            </a:r>
-          </a:p>
-        </p:txBody>
-      </p:sp>
-      <p:sp>
-        <p:nvSpPr>
-          <p:cNvPr id="3" name="Rounded Rectangle 2"/>
+              <a:t>Crypto carry: weak in-sample, strong since 2024</a:t>
+            </a:r>
+          </a:p>
+        </p:txBody>
+      </p:sp>
+      <p:pic>
+        <p:nvPicPr>
+          <p:cNvPr id="3" name="Picture 2" descr="c_cum.png"/>
+          <p:cNvPicPr>
+            <a:picLocks noChangeAspect="1"/>
+          </p:cNvPicPr>
+          <p:nvPr/>
+        </p:nvPicPr>
+        <p:blipFill>
+          <a:blip r:embed="rId2"/>
+          <a:stretch>
+            <a:fillRect/>
+          </a:stretch>
+        </p:blipFill>
+        <p:spPr>
+          <a:xfrm>
+            <a:off x="457200" y="1325880"/>
+            <a:ext cx="7223760" cy="3876164"/>
+          </a:xfrm>
+          <a:prstGeom prst="rect">
+            <a:avLst/>
+          </a:prstGeom>
+        </p:spPr>
+      </p:pic>
+      <p:sp>
+        <p:nvSpPr>
+          <p:cNvPr id="4" name="Rounded Rectangle 3"/>
           <p:cNvSpPr/>
           <p:nvPr/>
         </p:nvSpPr>
         <p:spPr>
           <a:xfrm>
-            <a:off x="10271455" y="457200"/>
-            <a:ext cx="1371600" cy="384048"/>
+            <a:off x="8001000" y="1417320"/>
+            <a:ext cx="3657600" cy="1417320"/>
           </a:xfrm>
           <a:prstGeom prst="roundRect">
             <a:avLst>
@@ -5863,7 +5832,7 @@
             </a:avLst>
           </a:prstGeom>
           <a:solidFill>
-            <a:srgbClr val="E39B17"/>
+            <a:srgbClr val="EEF1F6"/>
           </a:solidFill>
           <a:ln>
             <a:noFill/>
@@ -5885,55 +5854,100 @@
           </a:fontRef>
         </p:style>
         <p:txBody>
-          <a:bodyPr rtlCol="0" anchor="ctr" lIns="0" rIns="0"/>
+          <a:bodyPr rtlCol="0" anchor="ctr"/>
           <a:lstStyle/>
           <a:p>
             <a:pPr algn="ctr"/>
-            <a:r>
-              <a:rPr sz="1200" b="1">
+          </a:p>
+        </p:txBody>
+      </p:sp>
+      <p:sp>
+        <p:nvSpPr>
+          <p:cNvPr id="5" name="TextBox 4"/>
+          <p:cNvSpPr txBox="1"/>
+          <p:nvPr/>
+        </p:nvSpPr>
+        <p:spPr>
+          <a:xfrm>
+            <a:off x="8229600" y="1581912"/>
+            <a:ext cx="3200400" cy="685800"/>
+          </a:xfrm>
+          <a:prstGeom prst="rect">
+            <a:avLst/>
+          </a:prstGeom>
+          <a:noFill/>
+        </p:spPr>
+        <p:txBody>
+          <a:bodyPr wrap="square" anchor="t" lIns="0" rIns="0" tIns="0" bIns="0">
+            <a:spAutoFit/>
+          </a:bodyPr>
+          <a:lstStyle/>
+          <a:p>
+            <a:pPr algn="l">
+              <a:spcAft>
+                <a:spcPts val="600"/>
+              </a:spcAft>
+            </a:pPr>
+            <a:r>
+              <a:rPr sz="3400" b="1" i="0">
                 <a:solidFill>
                   <a:srgbClr val="14213D"/>
                 </a:solidFill>
+                <a:latin typeface="Cambria"/>
+              </a:rPr>
+              <a:t>0.14</a:t>
+            </a:r>
+          </a:p>
+        </p:txBody>
+      </p:sp>
+      <p:sp>
+        <p:nvSpPr>
+          <p:cNvPr id="6" name="TextBox 5"/>
+          <p:cNvSpPr txBox="1"/>
+          <p:nvPr/>
+        </p:nvSpPr>
+        <p:spPr>
+          <a:xfrm>
+            <a:off x="8229600" y="2258568"/>
+            <a:ext cx="3200400" cy="502920"/>
+          </a:xfrm>
+          <a:prstGeom prst="rect">
+            <a:avLst/>
+          </a:prstGeom>
+          <a:noFill/>
+        </p:spPr>
+        <p:txBody>
+          <a:bodyPr wrap="square" anchor="t" lIns="0" rIns="0" tIns="0" bIns="0">
+            <a:spAutoFit/>
+          </a:bodyPr>
+          <a:lstStyle/>
+          <a:p>
+            <a:pPr algn="l">
+              <a:spcAft>
+                <a:spcPts val="600"/>
+              </a:spcAft>
+            </a:pPr>
+            <a:r>
+              <a:rPr sz="1200" b="0" i="0">
+                <a:solidFill>
+                  <a:srgbClr val="5C677D"/>
+                </a:solidFill>
                 <a:latin typeface="Calibri"/>
               </a:rPr>
-              <a:t>Paraj</a:t>
-            </a:r>
-          </a:p>
-        </p:txBody>
-      </p:sp>
-      <p:pic>
-        <p:nvPicPr>
-          <p:cNvPr id="4" name="Picture 3" descr="c_cum.png"/>
-          <p:cNvPicPr>
-            <a:picLocks noChangeAspect="1"/>
-          </p:cNvPicPr>
-          <p:nvPr/>
-        </p:nvPicPr>
-        <p:blipFill>
-          <a:blip r:embed="rId2"/>
-          <a:stretch>
-            <a:fillRect/>
-          </a:stretch>
-        </p:blipFill>
-        <p:spPr>
-          <a:xfrm>
-            <a:off x="457200" y="1325880"/>
-            <a:ext cx="7223760" cy="3876164"/>
-          </a:xfrm>
-          <a:prstGeom prst="rect">
-            <a:avLst/>
-          </a:prstGeom>
-        </p:spPr>
-      </p:pic>
-      <p:sp>
-        <p:nvSpPr>
-          <p:cNvPr id="5" name="Rounded Rectangle 4"/>
+              <a:t>Full-sample net Sharpe (4.1% a year, 30% vol)</a:t>
+            </a:r>
+          </a:p>
+        </p:txBody>
+      </p:sp>
+      <p:sp>
+        <p:nvSpPr>
+          <p:cNvPr id="7" name="Rounded Rectangle 6"/>
           <p:cNvSpPr/>
           <p:nvPr/>
         </p:nvSpPr>
         <p:spPr>
           <a:xfrm>
-            <a:off x="8001000" y="1417320"/>
+            <a:off x="8001000" y="3017520"/>
             <a:ext cx="3657600" cy="1417320"/>
           </a:xfrm>
           <a:prstGeom prst="roundRect">
@@ -5973,13 +5987,13 @@
       </p:sp>
       <p:sp>
         <p:nvSpPr>
-          <p:cNvPr id="6" name="TextBox 5"/>
+          <p:cNvPr id="8" name="TextBox 7"/>
           <p:cNvSpPr txBox="1"/>
           <p:nvPr/>
         </p:nvSpPr>
         <p:spPr>
           <a:xfrm>
-            <a:off x="8229600" y="1581912"/>
+            <a:off x="8229600" y="3182112"/>
             <a:ext cx="3200400" cy="685800"/>
           </a:xfrm>
           <a:prstGeom prst="rect">
@@ -6005,20 +6019,20 @@
                 </a:solidFill>
                 <a:latin typeface="Cambria"/>
               </a:rPr>
-              <a:t>0.14</a:t>
-            </a:r>
-          </a:p>
-        </p:txBody>
-      </p:sp>
-      <p:sp>
-        <p:nvSpPr>
-          <p:cNvPr id="7" name="TextBox 6"/>
+              <a:t>0.81</a:t>
+            </a:r>
+          </a:p>
+        </p:txBody>
+      </p:sp>
+      <p:sp>
+        <p:nvSpPr>
+          <p:cNvPr id="9" name="TextBox 8"/>
           <p:cNvSpPr txBox="1"/>
           <p:nvPr/>
         </p:nvSpPr>
         <p:spPr>
           <a:xfrm>
-            <a:off x="8229600" y="2258568"/>
+            <a:off x="8229600" y="3858768"/>
             <a:ext cx="3200400" cy="502920"/>
           </a:xfrm>
           <a:prstGeom prst="rect">
@@ -6044,20 +6058,20 @@
                 </a:solidFill>
                 <a:latin typeface="Calibri"/>
               </a:rPr>
-              <a:t>Full-sample net Sharpe (4.1% a year, 30% vol)</a:t>
-            </a:r>
-          </a:p>
-        </p:txBody>
-      </p:sp>
-      <p:sp>
-        <p:nvSpPr>
-          <p:cNvPr id="8" name="Rounded Rectangle 7"/>
+              <a:t>Out-of-sample net Sharpe, 2024–2026</a:t>
+            </a:r>
+          </a:p>
+        </p:txBody>
+      </p:sp>
+      <p:sp>
+        <p:nvSpPr>
+          <p:cNvPr id="10" name="Rounded Rectangle 9"/>
           <p:cNvSpPr/>
           <p:nvPr/>
         </p:nvSpPr>
         <p:spPr>
           <a:xfrm>
-            <a:off x="8001000" y="3017520"/>
+            <a:off x="8001000" y="4617720"/>
             <a:ext cx="3657600" cy="1417320"/>
           </a:xfrm>
           <a:prstGeom prst="roundRect">
@@ -6097,13 +6111,13 @@
       </p:sp>
       <p:sp>
         <p:nvSpPr>
-          <p:cNvPr id="9" name="TextBox 8"/>
+          <p:cNvPr id="11" name="TextBox 10"/>
           <p:cNvSpPr txBox="1"/>
           <p:nvPr/>
         </p:nvSpPr>
         <p:spPr>
           <a:xfrm>
-            <a:off x="8229600" y="3182112"/>
+            <a:off x="8229600" y="4782312"/>
             <a:ext cx="3200400" cy="685800"/>
           </a:xfrm>
           <a:prstGeom prst="rect">
@@ -6125,142 +6139,18 @@
             <a:r>
               <a:rPr sz="3400" b="1" i="0">
                 <a:solidFill>
-                  <a:srgbClr val="14213D"/>
+                  <a:srgbClr val="B83227"/>
                 </a:solidFill>
                 <a:latin typeface="Cambria"/>
               </a:rPr>
-              <a:t>0.81</a:t>
-            </a:r>
-          </a:p>
-        </p:txBody>
-      </p:sp>
-      <p:sp>
-        <p:nvSpPr>
-          <p:cNvPr id="10" name="TextBox 9"/>
-          <p:cNvSpPr txBox="1"/>
-          <p:nvPr/>
-        </p:nvSpPr>
-        <p:spPr>
-          <a:xfrm>
-            <a:off x="8229600" y="3858768"/>
-            <a:ext cx="3200400" cy="502920"/>
-          </a:xfrm>
-          <a:prstGeom prst="rect">
-            <a:avLst/>
-          </a:prstGeom>
-          <a:noFill/>
-        </p:spPr>
-        <p:txBody>
-          <a:bodyPr wrap="square" anchor="t" lIns="0" rIns="0" tIns="0" bIns="0">
-            <a:spAutoFit/>
-          </a:bodyPr>
-          <a:lstStyle/>
-          <a:p>
-            <a:pPr algn="l">
-              <a:spcAft>
-                <a:spcPts val="600"/>
-              </a:spcAft>
-            </a:pPr>
-            <a:r>
-              <a:rPr sz="1200" b="0" i="0">
-                <a:solidFill>
-                  <a:srgbClr val="5C677D"/>
-                </a:solidFill>
-                <a:latin typeface="Calibri"/>
-              </a:rPr>
-              <a:t>Out-of-sample net Sharpe, 2024–2026</a:t>
-            </a:r>
-          </a:p>
-        </p:txBody>
-      </p:sp>
-      <p:sp>
-        <p:nvSpPr>
-          <p:cNvPr id="11" name="Rounded Rectangle 10"/>
-          <p:cNvSpPr/>
-          <p:nvPr/>
-        </p:nvSpPr>
-        <p:spPr>
-          <a:xfrm>
-            <a:off x="8001000" y="4617720"/>
-            <a:ext cx="3657600" cy="1417320"/>
-          </a:xfrm>
-          <a:prstGeom prst="roundRect">
-            <a:avLst>
-              <a:gd name="adj" fmla="val 8000"/>
-            </a:avLst>
-          </a:prstGeom>
-          <a:solidFill>
-            <a:srgbClr val="EEF1F6"/>
-          </a:solidFill>
-          <a:ln>
-            <a:noFill/>
-          </a:ln>
-          <a:effectLst/>
-        </p:spPr>
-        <p:style>
-          <a:lnRef idx="1">
-            <a:schemeClr val="accent1"/>
-          </a:lnRef>
-          <a:fillRef idx="3">
-            <a:schemeClr val="accent1"/>
-          </a:fillRef>
-          <a:effectRef idx="2">
-            <a:schemeClr val="accent1"/>
-          </a:effectRef>
-          <a:fontRef idx="minor">
-            <a:schemeClr val="lt1"/>
-          </a:fontRef>
-        </p:style>
-        <p:txBody>
-          <a:bodyPr rtlCol="0" anchor="ctr"/>
-          <a:lstStyle/>
-          <a:p>
-            <a:pPr algn="ctr"/>
+              <a:t>-27%</a:t>
+            </a:r>
           </a:p>
         </p:txBody>
       </p:sp>
       <p:sp>
         <p:nvSpPr>
           <p:cNvPr id="12" name="TextBox 11"/>
-          <p:cNvSpPr txBox="1"/>
-          <p:nvPr/>
-        </p:nvSpPr>
-        <p:spPr>
-          <a:xfrm>
-            <a:off x="8229600" y="4782312"/>
-            <a:ext cx="3200400" cy="685800"/>
-          </a:xfrm>
-          <a:prstGeom prst="rect">
-            <a:avLst/>
-          </a:prstGeom>
-          <a:noFill/>
-        </p:spPr>
-        <p:txBody>
-          <a:bodyPr wrap="square" anchor="t" lIns="0" rIns="0" tIns="0" bIns="0">
-            <a:spAutoFit/>
-          </a:bodyPr>
-          <a:lstStyle/>
-          <a:p>
-            <a:pPr algn="l">
-              <a:spcAft>
-                <a:spcPts val="600"/>
-              </a:spcAft>
-            </a:pPr>
-            <a:r>
-              <a:rPr sz="3400" b="1" i="0">
-                <a:solidFill>
-                  <a:srgbClr val="B83227"/>
-                </a:solidFill>
-                <a:latin typeface="Cambria"/>
-              </a:rPr>
-              <a:t>-27%</a:t>
-            </a:r>
-          </a:p>
-        </p:txBody>
-      </p:sp>
-      <p:sp>
-        <p:nvSpPr>
-          <p:cNvPr id="13" name="TextBox 12"/>
           <p:cNvSpPr txBox="1"/>
           <p:nvPr/>
         </p:nvSpPr>
@@ -6332,7 +6222,7 @@
         <p:spPr>
           <a:xfrm>
             <a:off x="548640" y="411480"/>
-            <a:ext cx="9692640" cy="731520"/>
+            <a:ext cx="11064240" cy="731520"/>
           </a:xfrm>
           <a:prstGeom prst="rect">
             <a:avLst/>
@@ -6401,64 +6291,9 @@
           </a:p>
         </p:txBody>
       </p:sp>
-      <p:sp>
-        <p:nvSpPr>
-          <p:cNvPr id="4" name="Rounded Rectangle 3"/>
-          <p:cNvSpPr/>
-          <p:nvPr/>
-        </p:nvSpPr>
-        <p:spPr>
-          <a:xfrm>
-            <a:off x="10271455" y="457200"/>
-            <a:ext cx="1371600" cy="384048"/>
-          </a:xfrm>
-          <a:prstGeom prst="roundRect">
-            <a:avLst>
-              <a:gd name="adj" fmla="val 8000"/>
-            </a:avLst>
-          </a:prstGeom>
-          <a:solidFill>
-            <a:srgbClr val="E39B17"/>
-          </a:solidFill>
-          <a:ln>
-            <a:noFill/>
-          </a:ln>
-          <a:effectLst/>
-        </p:spPr>
-        <p:style>
-          <a:lnRef idx="1">
-            <a:schemeClr val="accent1"/>
-          </a:lnRef>
-          <a:fillRef idx="3">
-            <a:schemeClr val="accent1"/>
-          </a:fillRef>
-          <a:effectRef idx="2">
-            <a:schemeClr val="accent1"/>
-          </a:effectRef>
-          <a:fontRef idx="minor">
-            <a:schemeClr val="lt1"/>
-          </a:fontRef>
-        </p:style>
-        <p:txBody>
-          <a:bodyPr rtlCol="0" anchor="ctr" lIns="0" rIns="0"/>
-          <a:lstStyle/>
-          <a:p>
-            <a:pPr algn="ctr"/>
-            <a:r>
-              <a:rPr sz="1200" b="1">
-                <a:solidFill>
-                  <a:srgbClr val="14213D"/>
-                </a:solidFill>
-                <a:latin typeface="Calibri"/>
-              </a:rPr>
-              <a:t>Paraj</a:t>
-            </a:r>
-          </a:p>
-        </p:txBody>
-      </p:sp>
       <p:pic>
         <p:nvPicPr>
-          <p:cNvPr id="5" name="Picture 4" descr="c_decomp.png"/>
+          <p:cNvPr id="4" name="Picture 3" descr="c_decomp.png"/>
           <p:cNvPicPr>
             <a:picLocks noChangeAspect="1"/>
           </p:cNvPicPr>
@@ -6482,7 +6317,7 @@
       </p:pic>
       <p:graphicFrame>
         <p:nvGraphicFramePr>
-          <p:cNvPr id="6" name="Table 5"/>
+          <p:cNvPr id="5" name="Table 4"/>
           <p:cNvGraphicFramePr>
             <a:graphicFrameLocks noGrp="1"/>
           </p:cNvGraphicFramePr>
@@ -6886,7 +6721,7 @@
       </p:graphicFrame>
       <p:graphicFrame>
         <p:nvGraphicFramePr>
-          <p:cNvPr id="7" name="Table 6"/>
+          <p:cNvPr id="6" name="Table 5"/>
           <p:cNvGraphicFramePr>
             <a:graphicFrameLocks noGrp="1"/>
           </p:cNvGraphicFramePr>
@@ -7443,7 +7278,7 @@
         <p:spPr>
           <a:xfrm>
             <a:off x="548640" y="411480"/>
-            <a:ext cx="9692640" cy="731520"/>
+            <a:ext cx="11064240" cy="731520"/>
           </a:xfrm>
           <a:prstGeom prst="rect">
             <a:avLst/>
@@ -7520,8 +7355,8 @@
         </p:nvSpPr>
         <p:spPr>
           <a:xfrm>
-            <a:off x="10271455" y="457200"/>
-            <a:ext cx="1371600" cy="384048"/>
+            <a:off x="548640" y="1783080"/>
+            <a:ext cx="2743200" cy="1417320"/>
           </a:xfrm>
           <a:prstGeom prst="roundRect">
             <a:avLst>
@@ -7529,7 +7364,7 @@
             </a:avLst>
           </a:prstGeom>
           <a:solidFill>
-            <a:srgbClr val="E39B17"/>
+            <a:srgbClr val="EEF1F6"/>
           </a:solidFill>
           <a:ln>
             <a:noFill/>
@@ -7551,31 +7386,100 @@
           </a:fontRef>
         </p:style>
         <p:txBody>
-          <a:bodyPr rtlCol="0" anchor="ctr" lIns="0" rIns="0"/>
+          <a:bodyPr rtlCol="0" anchor="ctr"/>
           <a:lstStyle/>
           <a:p>
             <a:pPr algn="ctr"/>
-            <a:r>
-              <a:rPr sz="1200" b="1">
-                <a:solidFill>
-                  <a:srgbClr val="14213D"/>
+          </a:p>
+        </p:txBody>
+      </p:sp>
+      <p:sp>
+        <p:nvSpPr>
+          <p:cNvPr id="5" name="TextBox 4"/>
+          <p:cNvSpPr txBox="1"/>
+          <p:nvPr/>
+        </p:nvSpPr>
+        <p:spPr>
+          <a:xfrm>
+            <a:off x="777240" y="1947672"/>
+            <a:ext cx="2286000" cy="685800"/>
+          </a:xfrm>
+          <a:prstGeom prst="rect">
+            <a:avLst/>
+          </a:prstGeom>
+          <a:noFill/>
+        </p:spPr>
+        <p:txBody>
+          <a:bodyPr wrap="square" anchor="t" lIns="0" rIns="0" tIns="0" bIns="0">
+            <a:spAutoFit/>
+          </a:bodyPr>
+          <a:lstStyle/>
+          <a:p>
+            <a:pPr algn="l">
+              <a:spcAft>
+                <a:spcPts val="600"/>
+              </a:spcAft>
+            </a:pPr>
+            <a:r>
+              <a:rPr sz="3400" b="1" i="0">
+                <a:solidFill>
+                  <a:srgbClr val="B83227"/>
+                </a:solidFill>
+                <a:latin typeface="Cambria"/>
+              </a:rPr>
+              <a:t>-1.55</a:t>
+            </a:r>
+          </a:p>
+        </p:txBody>
+      </p:sp>
+      <p:sp>
+        <p:nvSpPr>
+          <p:cNvPr id="6" name="TextBox 5"/>
+          <p:cNvSpPr txBox="1"/>
+          <p:nvPr/>
+        </p:nvSpPr>
+        <p:spPr>
+          <a:xfrm>
+            <a:off x="777240" y="2624328"/>
+            <a:ext cx="2286000" cy="502920"/>
+          </a:xfrm>
+          <a:prstGeom prst="rect">
+            <a:avLst/>
+          </a:prstGeom>
+          <a:noFill/>
+        </p:spPr>
+        <p:txBody>
+          <a:bodyPr wrap="square" anchor="t" lIns="0" rIns="0" tIns="0" bIns="0">
+            <a:spAutoFit/>
+          </a:bodyPr>
+          <a:lstStyle/>
+          <a:p>
+            <a:pPr algn="l">
+              <a:spcAft>
+                <a:spcPts val="600"/>
+              </a:spcAft>
+            </a:pPr>
+            <a:r>
+              <a:rPr sz="1200" b="0" i="0">
+                <a:solidFill>
+                  <a:srgbClr val="5C677D"/>
                 </a:solidFill>
                 <a:latin typeface="Calibri"/>
               </a:rPr>
-              <a:t>Reza</a:t>
-            </a:r>
-          </a:p>
-        </p:txBody>
-      </p:sp>
-      <p:sp>
-        <p:nvSpPr>
-          <p:cNvPr id="5" name="Rounded Rectangle 4"/>
+              <a:t>Beta to equity-volatility changes (t = -3.7)</a:t>
+            </a:r>
+          </a:p>
+        </p:txBody>
+      </p:sp>
+      <p:sp>
+        <p:nvSpPr>
+          <p:cNvPr id="7" name="Rounded Rectangle 6"/>
           <p:cNvSpPr/>
           <p:nvPr/>
         </p:nvSpPr>
         <p:spPr>
           <a:xfrm>
-            <a:off x="548640" y="1783080"/>
+            <a:off x="3520440" y="1783080"/>
             <a:ext cx="2743200" cy="1417320"/>
           </a:xfrm>
           <a:prstGeom prst="roundRect">
@@ -7615,13 +7519,13 @@
       </p:sp>
       <p:sp>
         <p:nvSpPr>
-          <p:cNvPr id="6" name="TextBox 5"/>
+          <p:cNvPr id="8" name="TextBox 7"/>
           <p:cNvSpPr txBox="1"/>
           <p:nvPr/>
         </p:nvSpPr>
         <p:spPr>
           <a:xfrm>
-            <a:off x="777240" y="1947672"/>
+            <a:off x="3749039" y="1947672"/>
             <a:ext cx="2286000" cy="685800"/>
           </a:xfrm>
           <a:prstGeom prst="rect">
@@ -7643,24 +7547,24 @@
             <a:r>
               <a:rPr sz="3400" b="1" i="0">
                 <a:solidFill>
-                  <a:srgbClr val="B83227"/>
+                  <a:srgbClr val="14213D"/>
                 </a:solidFill>
                 <a:latin typeface="Cambria"/>
               </a:rPr>
-              <a:t>-1.55</a:t>
-            </a:r>
-          </a:p>
-        </p:txBody>
-      </p:sp>
-      <p:sp>
-        <p:nvSpPr>
-          <p:cNvPr id="7" name="TextBox 6"/>
+              <a:t>0.35</a:t>
+            </a:r>
+          </a:p>
+        </p:txBody>
+      </p:sp>
+      <p:sp>
+        <p:nvSpPr>
+          <p:cNvPr id="9" name="TextBox 8"/>
           <p:cNvSpPr txBox="1"/>
           <p:nvPr/>
         </p:nvSpPr>
         <p:spPr>
           <a:xfrm>
-            <a:off x="777240" y="2624328"/>
+            <a:off x="3749039" y="2624328"/>
             <a:ext cx="2286000" cy="502920"/>
           </a:xfrm>
           <a:prstGeom prst="rect">
@@ -7686,20 +7590,20 @@
                 </a:solidFill>
                 <a:latin typeface="Calibri"/>
               </a:rPr>
-              <a:t>Beta to equity-volatility changes (t = -3.7)</a:t>
-            </a:r>
-          </a:p>
-        </p:txBody>
-      </p:sp>
-      <p:sp>
-        <p:nvSpPr>
-          <p:cNvPr id="8" name="Rounded Rectangle 7"/>
+              <a:t>Beta to the dollar factor (t = 4.1)</a:t>
+            </a:r>
+          </a:p>
+        </p:txBody>
+      </p:sp>
+      <p:sp>
+        <p:nvSpPr>
+          <p:cNvPr id="10" name="Rounded Rectangle 9"/>
           <p:cNvSpPr/>
           <p:nvPr/>
         </p:nvSpPr>
         <p:spPr>
           <a:xfrm>
-            <a:off x="3520440" y="1783080"/>
+            <a:off x="548640" y="3429000"/>
             <a:ext cx="2743200" cy="1417320"/>
           </a:xfrm>
           <a:prstGeom prst="roundRect">
@@ -7739,13 +7643,13 @@
       </p:sp>
       <p:sp>
         <p:nvSpPr>
-          <p:cNvPr id="9" name="TextBox 8"/>
+          <p:cNvPr id="11" name="TextBox 10"/>
           <p:cNvSpPr txBox="1"/>
           <p:nvPr/>
         </p:nvSpPr>
         <p:spPr>
           <a:xfrm>
-            <a:off x="3749039" y="1947672"/>
+            <a:off x="777240" y="3593592"/>
             <a:ext cx="2286000" cy="685800"/>
           </a:xfrm>
           <a:prstGeom prst="rect">
@@ -7771,20 +7675,20 @@
                 </a:solidFill>
                 <a:latin typeface="Cambria"/>
               </a:rPr>
-              <a:t>0.35</a:t>
-            </a:r>
-          </a:p>
-        </p:txBody>
-      </p:sp>
-      <p:sp>
-        <p:nvSpPr>
-          <p:cNvPr id="10" name="TextBox 9"/>
+              <a:t>0.25%</a:t>
+            </a:r>
+          </a:p>
+        </p:txBody>
+      </p:sp>
+      <p:sp>
+        <p:nvSpPr>
+          <p:cNvPr id="12" name="TextBox 11"/>
           <p:cNvSpPr txBox="1"/>
           <p:nvPr/>
         </p:nvSpPr>
         <p:spPr>
           <a:xfrm>
-            <a:off x="3749039" y="2624328"/>
+            <a:off x="777240" y="4270248"/>
             <a:ext cx="2286000" cy="502920"/>
           </a:xfrm>
           <a:prstGeom prst="rect">
@@ -7810,20 +7714,20 @@
                 </a:solidFill>
                 <a:latin typeface="Calibri"/>
               </a:rPr>
-              <a:t>Beta to the dollar factor (t = 4.1)</a:t>
-            </a:r>
-          </a:p>
-        </p:txBody>
-      </p:sp>
-      <p:sp>
-        <p:nvSpPr>
-          <p:cNvPr id="11" name="Rounded Rectangle 10"/>
+              <a:t>Monthly alpha (t = 1.7): not significant</a:t>
+            </a:r>
+          </a:p>
+        </p:txBody>
+      </p:sp>
+      <p:sp>
+        <p:nvSpPr>
+          <p:cNvPr id="13" name="Rounded Rectangle 12"/>
           <p:cNvSpPr/>
           <p:nvPr/>
         </p:nvSpPr>
         <p:spPr>
           <a:xfrm>
-            <a:off x="548640" y="3429000"/>
+            <a:off x="3520440" y="3429000"/>
             <a:ext cx="2743200" cy="1417320"/>
           </a:xfrm>
           <a:prstGeom prst="roundRect">
@@ -7863,13 +7767,13 @@
       </p:sp>
       <p:sp>
         <p:nvSpPr>
-          <p:cNvPr id="12" name="TextBox 11"/>
+          <p:cNvPr id="14" name="TextBox 13"/>
           <p:cNvSpPr txBox="1"/>
           <p:nvPr/>
         </p:nvSpPr>
         <p:spPr>
           <a:xfrm>
-            <a:off x="777240" y="3593592"/>
+            <a:off x="3749039" y="3593592"/>
             <a:ext cx="2286000" cy="685800"/>
           </a:xfrm>
           <a:prstGeom prst="rect">
@@ -7895,20 +7799,20 @@
                 </a:solidFill>
                 <a:latin typeface="Cambria"/>
               </a:rPr>
-              <a:t>0.25%</a:t>
-            </a:r>
-          </a:p>
-        </p:txBody>
-      </p:sp>
-      <p:sp>
-        <p:nvSpPr>
-          <p:cNvPr id="13" name="TextBox 12"/>
+              <a:t>0.18</a:t>
+            </a:r>
+          </a:p>
+        </p:txBody>
+      </p:sp>
+      <p:sp>
+        <p:nvSpPr>
+          <p:cNvPr id="15" name="TextBox 14"/>
           <p:cNvSpPr txBox="1"/>
           <p:nvPr/>
         </p:nvSpPr>
         <p:spPr>
           <a:xfrm>
-            <a:off x="777240" y="4270248"/>
+            <a:off x="3749039" y="4270248"/>
             <a:ext cx="2286000" cy="502920"/>
           </a:xfrm>
           <a:prstGeom prst="rect">
@@ -7934,67 +7838,21 @@
                 </a:solidFill>
                 <a:latin typeface="Calibri"/>
               </a:rPr>
-              <a:t>Monthly alpha (t = 1.7): not significant</a:t>
-            </a:r>
-          </a:p>
-        </p:txBody>
-      </p:sp>
-      <p:sp>
-        <p:nvSpPr>
-          <p:cNvPr id="14" name="Rounded Rectangle 13"/>
-          <p:cNvSpPr/>
-          <p:nvPr/>
-        </p:nvSpPr>
-        <p:spPr>
-          <a:xfrm>
-            <a:off x="3520440" y="3429000"/>
-            <a:ext cx="2743200" cy="1417320"/>
-          </a:xfrm>
-          <a:prstGeom prst="roundRect">
-            <a:avLst>
-              <a:gd name="adj" fmla="val 8000"/>
-            </a:avLst>
-          </a:prstGeom>
-          <a:solidFill>
-            <a:srgbClr val="EEF1F6"/>
-          </a:solidFill>
-          <a:ln>
-            <a:noFill/>
-          </a:ln>
-          <a:effectLst/>
-        </p:spPr>
-        <p:style>
-          <a:lnRef idx="1">
-            <a:schemeClr val="accent1"/>
-          </a:lnRef>
-          <a:fillRef idx="3">
-            <a:schemeClr val="accent1"/>
-          </a:fillRef>
-          <a:effectRef idx="2">
-            <a:schemeClr val="accent1"/>
-          </a:effectRef>
-          <a:fontRef idx="minor">
-            <a:schemeClr val="lt1"/>
-          </a:fontRef>
-        </p:style>
-        <p:txBody>
-          <a:bodyPr rtlCol="0" anchor="ctr"/>
-          <a:lstStyle/>
-          <a:p>
-            <a:pPr algn="ctr"/>
-          </a:p>
-        </p:txBody>
-      </p:sp>
-      <p:sp>
-        <p:nvSpPr>
-          <p:cNvPr id="15" name="TextBox 14"/>
+              <a:t>R² of the two-factor model</a:t>
+            </a:r>
+          </a:p>
+        </p:txBody>
+      </p:sp>
+      <p:sp>
+        <p:nvSpPr>
+          <p:cNvPr id="16" name="TextBox 15"/>
           <p:cNvSpPr txBox="1"/>
           <p:nvPr/>
         </p:nvSpPr>
         <p:spPr>
           <a:xfrm>
-            <a:off x="3749039" y="3593592"/>
-            <a:ext cx="2286000" cy="685800"/>
+            <a:off x="548640" y="5166360"/>
+            <a:ext cx="5760720" cy="1097280"/>
           </a:xfrm>
           <a:prstGeom prst="rect">
             <a:avLst/>
@@ -8013,27 +7871,27 @@
               </a:spcAft>
             </a:pPr>
             <a:r>
-              <a:rPr sz="3400" b="1" i="0">
-                <a:solidFill>
-                  <a:srgbClr val="14213D"/>
-                </a:solidFill>
-                <a:latin typeface="Cambria"/>
-              </a:rPr>
-              <a:t>0.18</a:t>
-            </a:r>
-          </a:p>
-        </p:txBody>
-      </p:sp>
-      <p:sp>
-        <p:nvSpPr>
-          <p:cNvPr id="16" name="TextBox 15"/>
+              <a:rPr sz="1400" b="0" i="0">
+                <a:solidFill>
+                  <a:srgbClr val="5C677D"/>
+                </a:solidFill>
+                <a:latin typeface="Calibri"/>
+              </a:rPr>
+              <a:t>Worst months: Oct 2008, Aug 2007, May 2000, Jan 2009, and the Jan 2015 Swiss franc de-peg.</a:t>
+            </a:r>
+          </a:p>
+        </p:txBody>
+      </p:sp>
+      <p:sp>
+        <p:nvSpPr>
+          <p:cNvPr id="17" name="TextBox 16"/>
           <p:cNvSpPr txBox="1"/>
           <p:nvPr/>
         </p:nvSpPr>
         <p:spPr>
           <a:xfrm>
-            <a:off x="3749039" y="4270248"/>
-            <a:ext cx="2286000" cy="502920"/>
+            <a:off x="6766560" y="1783080"/>
+            <a:ext cx="4846320" cy="365760"/>
           </a:xfrm>
           <a:prstGeom prst="rect">
             <a:avLst/>
@@ -8052,84 +7910,6 @@
               </a:spcAft>
             </a:pPr>
             <a:r>
-              <a:rPr sz="1200" b="0" i="0">
-                <a:solidFill>
-                  <a:srgbClr val="5C677D"/>
-                </a:solidFill>
-                <a:latin typeface="Calibri"/>
-              </a:rPr>
-              <a:t>R² of the two-factor model</a:t>
-            </a:r>
-          </a:p>
-        </p:txBody>
-      </p:sp>
-      <p:sp>
-        <p:nvSpPr>
-          <p:cNvPr id="17" name="TextBox 16"/>
-          <p:cNvSpPr txBox="1"/>
-          <p:nvPr/>
-        </p:nvSpPr>
-        <p:spPr>
-          <a:xfrm>
-            <a:off x="548640" y="5166360"/>
-            <a:ext cx="5760720" cy="1097280"/>
-          </a:xfrm>
-          <a:prstGeom prst="rect">
-            <a:avLst/>
-          </a:prstGeom>
-          <a:noFill/>
-        </p:spPr>
-        <p:txBody>
-          <a:bodyPr wrap="square" anchor="t" lIns="0" rIns="0" tIns="0" bIns="0">
-            <a:spAutoFit/>
-          </a:bodyPr>
-          <a:lstStyle/>
-          <a:p>
-            <a:pPr algn="l">
-              <a:spcAft>
-                <a:spcPts val="600"/>
-              </a:spcAft>
-            </a:pPr>
-            <a:r>
-              <a:rPr sz="1400" b="0" i="0">
-                <a:solidFill>
-                  <a:srgbClr val="5C677D"/>
-                </a:solidFill>
-                <a:latin typeface="Calibri"/>
-              </a:rPr>
-              <a:t>Worst months: Oct 2008, Aug 2007, May 2000, Jan 2009, and the Jan 2015 Swiss franc de-peg.</a:t>
-            </a:r>
-          </a:p>
-        </p:txBody>
-      </p:sp>
-      <p:sp>
-        <p:nvSpPr>
-          <p:cNvPr id="18" name="TextBox 17"/>
-          <p:cNvSpPr txBox="1"/>
-          <p:nvPr/>
-        </p:nvSpPr>
-        <p:spPr>
-          <a:xfrm>
-            <a:off x="6766560" y="1783080"/>
-            <a:ext cx="4846320" cy="365760"/>
-          </a:xfrm>
-          <a:prstGeom prst="rect">
-            <a:avLst/>
-          </a:prstGeom>
-          <a:noFill/>
-        </p:spPr>
-        <p:txBody>
-          <a:bodyPr wrap="square" anchor="t" lIns="0" rIns="0" tIns="0" bIns="0">
-            <a:spAutoFit/>
-          </a:bodyPr>
-          <a:lstStyle/>
-          <a:p>
-            <a:pPr algn="l">
-              <a:spcAft>
-                <a:spcPts val="600"/>
-              </a:spcAft>
-            </a:pPr>
-            <a:r>
               <a:rPr sz="1600" b="1" i="0">
                 <a:solidFill>
                   <a:srgbClr val="14213D"/>
@@ -8143,7 +7923,7 @@
       </p:sp>
       <p:pic>
         <p:nvPicPr>
-          <p:cNvPr id="19" name="Picture 18" descr="a_2008.png"/>
+          <p:cNvPr id="18" name="Picture 17" descr="a_2008.png"/>
           <p:cNvPicPr>
             <a:picLocks noChangeAspect="1"/>
           </p:cNvPicPr>
@@ -8200,7 +7980,7 @@
         <p:spPr>
           <a:xfrm>
             <a:off x="548640" y="411480"/>
-            <a:ext cx="9692640" cy="731520"/>
+            <a:ext cx="11064240" cy="731520"/>
           </a:xfrm>
           <a:prstGeom prst="rect">
             <a:avLst/>
@@ -8269,64 +8049,9 @@
           </a:p>
         </p:txBody>
       </p:sp>
-      <p:sp>
-        <p:nvSpPr>
-          <p:cNvPr id="4" name="Rounded Rectangle 3"/>
-          <p:cNvSpPr/>
-          <p:nvPr/>
-        </p:nvSpPr>
-        <p:spPr>
-          <a:xfrm>
-            <a:off x="10271455" y="457200"/>
-            <a:ext cx="1371600" cy="384048"/>
-          </a:xfrm>
-          <a:prstGeom prst="roundRect">
-            <a:avLst>
-              <a:gd name="adj" fmla="val 8000"/>
-            </a:avLst>
-          </a:prstGeom>
-          <a:solidFill>
-            <a:srgbClr val="E39B17"/>
-          </a:solidFill>
-          <a:ln>
-            <a:noFill/>
-          </a:ln>
-          <a:effectLst/>
-        </p:spPr>
-        <p:style>
-          <a:lnRef idx="1">
-            <a:schemeClr val="accent1"/>
-          </a:lnRef>
-          <a:fillRef idx="3">
-            <a:schemeClr val="accent1"/>
-          </a:fillRef>
-          <a:effectRef idx="2">
-            <a:schemeClr val="accent1"/>
-          </a:effectRef>
-          <a:fontRef idx="minor">
-            <a:schemeClr val="lt1"/>
-          </a:fontRef>
-        </p:style>
-        <p:txBody>
-          <a:bodyPr rtlCol="0" anchor="ctr" lIns="0" rIns="0"/>
-          <a:lstStyle/>
-          <a:p>
-            <a:pPr algn="ctr"/>
-            <a:r>
-              <a:rPr sz="1200" b="1">
-                <a:solidFill>
-                  <a:srgbClr val="14213D"/>
-                </a:solidFill>
-                <a:latin typeface="Calibri"/>
-              </a:rPr>
-              <a:t>Paraj</a:t>
-            </a:r>
-          </a:p>
-        </p:txBody>
-      </p:sp>
       <p:pic>
         <p:nvPicPr>
-          <p:cNvPr id="5" name="Picture 4" descr="c_contrib.png"/>
+          <p:cNvPr id="4" name="Picture 3" descr="c_contrib.png"/>
           <p:cNvPicPr>
             <a:picLocks noChangeAspect="1"/>
           </p:cNvPicPr>
@@ -8350,7 +8075,7 @@
       </p:pic>
       <p:graphicFrame>
         <p:nvGraphicFramePr>
-          <p:cNvPr id="6" name="Table 5"/>
+          <p:cNvPr id="5" name="Table 4"/>
           <p:cNvGraphicFramePr>
             <a:graphicFrameLocks noGrp="1"/>
           </p:cNvGraphicFramePr>
@@ -8732,7 +8457,7 @@
       </p:graphicFrame>
       <p:sp>
         <p:nvSpPr>
-          <p:cNvPr id="7" name="TextBox 6"/>
+          <p:cNvPr id="6" name="TextBox 5"/>
           <p:cNvSpPr txBox="1"/>
           <p:nvPr/>
         </p:nvSpPr>
@@ -8852,7 +8577,7 @@
         <p:spPr>
           <a:xfrm>
             <a:off x="548640" y="411480"/>
-            <a:ext cx="9692640" cy="731520"/>
+            <a:ext cx="11064240" cy="731520"/>
           </a:xfrm>
           <a:prstGeom prst="rect">
             <a:avLst/>
@@ -8921,16 +8646,40 @@
           </a:p>
         </p:txBody>
       </p:sp>
-      <p:sp>
-        <p:nvSpPr>
-          <p:cNvPr id="4" name="Rounded Rectangle 3"/>
+      <p:pic>
+        <p:nvPicPr>
+          <p:cNvPr id="4" name="Picture 3" descr="comb.png"/>
+          <p:cNvPicPr>
+            <a:picLocks noChangeAspect="1"/>
+          </p:cNvPicPr>
+          <p:nvPr/>
+        </p:nvPicPr>
+        <p:blipFill>
+          <a:blip r:embed="rId2"/>
+          <a:stretch>
+            <a:fillRect/>
+          </a:stretch>
+        </p:blipFill>
+        <p:spPr>
+          <a:xfrm>
+            <a:off x="457200" y="1691640"/>
+            <a:ext cx="7132320" cy="3922776"/>
+          </a:xfrm>
+          <a:prstGeom prst="rect">
+            <a:avLst/>
+          </a:prstGeom>
+        </p:spPr>
+      </p:pic>
+      <p:sp>
+        <p:nvSpPr>
+          <p:cNvPr id="5" name="Rounded Rectangle 4"/>
           <p:cNvSpPr/>
           <p:nvPr/>
         </p:nvSpPr>
         <p:spPr>
           <a:xfrm>
-            <a:off x="10271455" y="457200"/>
-            <a:ext cx="1371600" cy="384048"/>
+            <a:off x="8001000" y="1783080"/>
+            <a:ext cx="3657600" cy="1417320"/>
           </a:xfrm>
           <a:prstGeom prst="roundRect">
             <a:avLst>
@@ -8938,7 +8687,7 @@
             </a:avLst>
           </a:prstGeom>
           <a:solidFill>
-            <a:srgbClr val="E39B17"/>
+            <a:srgbClr val="EEF1F6"/>
           </a:solidFill>
           <a:ln>
             <a:noFill/>
@@ -8960,95 +8709,16 @@
           </a:fontRef>
         </p:style>
         <p:txBody>
-          <a:bodyPr rtlCol="0" anchor="ctr" lIns="0" rIns="0"/>
+          <a:bodyPr rtlCol="0" anchor="ctr"/>
           <a:lstStyle/>
           <a:p>
             <a:pPr algn="ctr"/>
-            <a:r>
-              <a:rPr sz="1200" b="1">
-                <a:solidFill>
-                  <a:srgbClr val="14213D"/>
-                </a:solidFill>
-                <a:latin typeface="Calibri"/>
-              </a:rPr>
-              <a:t>Paraj</a:t>
-            </a:r>
-          </a:p>
-        </p:txBody>
-      </p:sp>
-      <p:pic>
-        <p:nvPicPr>
-          <p:cNvPr id="5" name="Picture 4" descr="comb.png"/>
-          <p:cNvPicPr>
-            <a:picLocks noChangeAspect="1"/>
-          </p:cNvPicPr>
-          <p:nvPr/>
-        </p:nvPicPr>
-        <p:blipFill>
-          <a:blip r:embed="rId2"/>
-          <a:stretch>
-            <a:fillRect/>
-          </a:stretch>
-        </p:blipFill>
-        <p:spPr>
-          <a:xfrm>
-            <a:off x="457200" y="1691640"/>
-            <a:ext cx="7132320" cy="3922776"/>
-          </a:xfrm>
-          <a:prstGeom prst="rect">
-            <a:avLst/>
-          </a:prstGeom>
-        </p:spPr>
-      </p:pic>
-      <p:sp>
-        <p:nvSpPr>
-          <p:cNvPr id="6" name="Rounded Rectangle 5"/>
-          <p:cNvSpPr/>
-          <p:nvPr/>
-        </p:nvSpPr>
-        <p:spPr>
-          <a:xfrm>
-            <a:off x="8001000" y="1783080"/>
-            <a:ext cx="3657600" cy="1417320"/>
-          </a:xfrm>
-          <a:prstGeom prst="roundRect">
-            <a:avLst>
-              <a:gd name="adj" fmla="val 8000"/>
-            </a:avLst>
-          </a:prstGeom>
-          <a:solidFill>
-            <a:srgbClr val="EEF1F6"/>
-          </a:solidFill>
-          <a:ln>
-            <a:noFill/>
-          </a:ln>
-          <a:effectLst/>
-        </p:spPr>
-        <p:style>
-          <a:lnRef idx="1">
-            <a:schemeClr val="accent1"/>
-          </a:lnRef>
-          <a:fillRef idx="3">
-            <a:schemeClr val="accent1"/>
-          </a:fillRef>
-          <a:effectRef idx="2">
-            <a:schemeClr val="accent1"/>
-          </a:effectRef>
-          <a:fontRef idx="minor">
-            <a:schemeClr val="lt1"/>
-          </a:fontRef>
-        </p:style>
-        <p:txBody>
-          <a:bodyPr rtlCol="0" anchor="ctr"/>
-          <a:lstStyle/>
-          <a:p>
-            <a:pPr algn="ctr"/>
-          </a:p>
-        </p:txBody>
-      </p:sp>
-      <p:sp>
-        <p:nvSpPr>
-          <p:cNvPr id="7" name="TextBox 6"/>
+          </a:p>
+        </p:txBody>
+      </p:sp>
+      <p:sp>
+        <p:nvSpPr>
+          <p:cNvPr id="6" name="TextBox 5"/>
           <p:cNvSpPr txBox="1"/>
           <p:nvPr/>
         </p:nvSpPr>
@@ -9087,7 +8757,7 @@
       </p:sp>
       <p:sp>
         <p:nvSpPr>
-          <p:cNvPr id="8" name="TextBox 7"/>
+          <p:cNvPr id="7" name="TextBox 6"/>
           <p:cNvSpPr txBox="1"/>
           <p:nvPr/>
         </p:nvSpPr>
@@ -9126,7 +8796,7 @@
       </p:sp>
       <p:graphicFrame>
         <p:nvGraphicFramePr>
-          <p:cNvPr id="9" name="Table 8"/>
+          <p:cNvPr id="8" name="Table 7"/>
           <p:cNvGraphicFramePr>
             <a:graphicFrameLocks noGrp="1"/>
           </p:cNvGraphicFramePr>
@@ -9563,7 +9233,7 @@
         <p:spPr>
           <a:xfrm>
             <a:off x="548640" y="411480"/>
-            <a:ext cx="9692640" cy="731520"/>
+            <a:ext cx="11064240" cy="731520"/>
           </a:xfrm>
           <a:prstGeom prst="rect">
             <a:avLst/>
@@ -9595,62 +9265,7 @@
       </p:sp>
       <p:sp>
         <p:nvSpPr>
-          <p:cNvPr id="3" name="Rounded Rectangle 2"/>
-          <p:cNvSpPr/>
-          <p:nvPr/>
-        </p:nvSpPr>
-        <p:spPr>
-          <a:xfrm>
-            <a:off x="10271455" y="457200"/>
-            <a:ext cx="1371600" cy="384048"/>
-          </a:xfrm>
-          <a:prstGeom prst="roundRect">
-            <a:avLst>
-              <a:gd name="adj" fmla="val 8000"/>
-            </a:avLst>
-          </a:prstGeom>
-          <a:solidFill>
-            <a:srgbClr val="E39B17"/>
-          </a:solidFill>
-          <a:ln>
-            <a:noFill/>
-          </a:ln>
-          <a:effectLst/>
-        </p:spPr>
-        <p:style>
-          <a:lnRef idx="1">
-            <a:schemeClr val="accent1"/>
-          </a:lnRef>
-          <a:fillRef idx="3">
-            <a:schemeClr val="accent1"/>
-          </a:fillRef>
-          <a:effectRef idx="2">
-            <a:schemeClr val="accent1"/>
-          </a:effectRef>
-          <a:fontRef idx="minor">
-            <a:schemeClr val="lt1"/>
-          </a:fontRef>
-        </p:style>
-        <p:txBody>
-          <a:bodyPr rtlCol="0" anchor="ctr" lIns="0" rIns="0"/>
-          <a:lstStyle/>
-          <a:p>
-            <a:pPr algn="ctr"/>
-            <a:r>
-              <a:rPr sz="1200" b="1">
-                <a:solidFill>
-                  <a:srgbClr val="14213D"/>
-                </a:solidFill>
-                <a:latin typeface="Calibri"/>
-              </a:rPr>
-              <a:t>Both</a:t>
-            </a:r>
-          </a:p>
-        </p:txBody>
-      </p:sp>
-      <p:sp>
-        <p:nvSpPr>
-          <p:cNvPr id="4" name="TextBox 3"/>
+          <p:cNvPr id="3" name="TextBox 2"/>
           <p:cNvSpPr txBox="1"/>
           <p:nvPr/>
         </p:nvSpPr>
@@ -9689,7 +9304,7 @@
       </p:sp>
       <p:sp>
         <p:nvSpPr>
-          <p:cNvPr id="5" name="TextBox 4"/>
+          <p:cNvPr id="4" name="TextBox 3"/>
           <p:cNvSpPr txBox="1"/>
           <p:nvPr/>
         </p:nvSpPr>
@@ -9776,7 +9391,7 @@
       </p:sp>
       <p:sp>
         <p:nvSpPr>
-          <p:cNvPr id="6" name="TextBox 5"/>
+          <p:cNvPr id="5" name="TextBox 4"/>
           <p:cNvSpPr txBox="1"/>
           <p:nvPr/>
         </p:nvSpPr>
@@ -9815,7 +9430,7 @@
       </p:sp>
       <p:sp>
         <p:nvSpPr>
-          <p:cNvPr id="7" name="TextBox 6"/>
+          <p:cNvPr id="6" name="TextBox 5"/>
           <p:cNvSpPr txBox="1"/>
           <p:nvPr/>
         </p:nvSpPr>
@@ -9935,7 +9550,7 @@
         <p:spPr>
           <a:xfrm>
             <a:off x="548640" y="411480"/>
-            <a:ext cx="9692640" cy="731520"/>
+            <a:ext cx="11064240" cy="731520"/>
           </a:xfrm>
           <a:prstGeom prst="rect">
             <a:avLst/>
@@ -10012,7 +9627,7 @@
         </p:nvSpPr>
         <p:spPr>
           <a:xfrm>
-            <a:off x="886968" y="2816352"/>
+            <a:off x="886968" y="3227832"/>
             <a:ext cx="10094976" cy="45720"/>
           </a:xfrm>
           <a:prstGeom prst="rect">
@@ -10055,7 +9670,7 @@
         </p:nvSpPr>
         <p:spPr>
           <a:xfrm>
-            <a:off x="566928" y="2514600"/>
+            <a:off x="566928" y="2926080"/>
             <a:ext cx="658368" cy="658368"/>
           </a:xfrm>
           <a:prstGeom prst="ellipse">
@@ -10107,7 +9722,7 @@
         </p:nvSpPr>
         <p:spPr>
           <a:xfrm>
-            <a:off x="292608" y="3383280"/>
+            <a:off x="292608" y="3794760"/>
             <a:ext cx="1207008" cy="685800"/>
           </a:xfrm>
           <a:prstGeom prst="rect">
@@ -10162,7 +9777,7 @@
         </p:nvSpPr>
         <p:spPr>
           <a:xfrm>
-            <a:off x="292608" y="4114800"/>
+            <a:off x="292608" y="4526280"/>
             <a:ext cx="1207008" cy="320040"/>
           </a:xfrm>
           <a:prstGeom prst="rect">
@@ -10201,7 +9816,7 @@
         </p:nvSpPr>
         <p:spPr>
           <a:xfrm>
-            <a:off x="1828800" y="2514600"/>
+            <a:off x="1828800" y="2926080"/>
             <a:ext cx="658368" cy="658368"/>
           </a:xfrm>
           <a:prstGeom prst="ellipse">
@@ -10253,7 +9868,7 @@
         </p:nvSpPr>
         <p:spPr>
           <a:xfrm>
-            <a:off x="1554480" y="3383280"/>
+            <a:off x="1554480" y="3794760"/>
             <a:ext cx="1207008" cy="685800"/>
           </a:xfrm>
           <a:prstGeom prst="rect">
@@ -10292,7 +9907,7 @@
         </p:nvSpPr>
         <p:spPr>
           <a:xfrm>
-            <a:off x="1554480" y="4114800"/>
+            <a:off x="1554480" y="4526280"/>
             <a:ext cx="1207008" cy="320040"/>
           </a:xfrm>
           <a:prstGeom prst="rect">
@@ -10331,7 +9946,7 @@
         </p:nvSpPr>
         <p:spPr>
           <a:xfrm>
-            <a:off x="3090672" y="2514600"/>
+            <a:off x="3090672" y="2926080"/>
             <a:ext cx="658368" cy="658368"/>
           </a:xfrm>
           <a:prstGeom prst="ellipse">
@@ -10383,7 +9998,7 @@
         </p:nvSpPr>
         <p:spPr>
           <a:xfrm>
-            <a:off x="2816352" y="3383280"/>
+            <a:off x="2816352" y="3794760"/>
             <a:ext cx="1207008" cy="685800"/>
           </a:xfrm>
           <a:prstGeom prst="rect">
@@ -10422,7 +10037,7 @@
         </p:nvSpPr>
         <p:spPr>
           <a:xfrm>
-            <a:off x="2816352" y="4114800"/>
+            <a:off x="2816352" y="4526280"/>
             <a:ext cx="1207008" cy="320040"/>
           </a:xfrm>
           <a:prstGeom prst="rect">
@@ -10461,7 +10076,7 @@
         </p:nvSpPr>
         <p:spPr>
           <a:xfrm>
-            <a:off x="4352544" y="2514600"/>
+            <a:off x="4352544" y="2926080"/>
             <a:ext cx="658368" cy="658368"/>
           </a:xfrm>
           <a:prstGeom prst="ellipse">
@@ -10513,7 +10128,7 @@
         </p:nvSpPr>
         <p:spPr>
           <a:xfrm>
-            <a:off x="4078224" y="3383280"/>
+            <a:off x="4078224" y="3794760"/>
             <a:ext cx="1207008" cy="685800"/>
           </a:xfrm>
           <a:prstGeom prst="rect">
@@ -10552,7 +10167,7 @@
         </p:nvSpPr>
         <p:spPr>
           <a:xfrm>
-            <a:off x="4078224" y="4114800"/>
+            <a:off x="4078224" y="4526280"/>
             <a:ext cx="1207008" cy="320040"/>
           </a:xfrm>
           <a:prstGeom prst="rect">
@@ -10591,7 +10206,7 @@
         </p:nvSpPr>
         <p:spPr>
           <a:xfrm>
-            <a:off x="5614416" y="2514600"/>
+            <a:off x="5614416" y="2926080"/>
             <a:ext cx="658368" cy="658368"/>
           </a:xfrm>
           <a:prstGeom prst="ellipse">
@@ -10643,7 +10258,7 @@
         </p:nvSpPr>
         <p:spPr>
           <a:xfrm>
-            <a:off x="5340096" y="3383280"/>
+            <a:off x="5340096" y="3794760"/>
             <a:ext cx="1207008" cy="685800"/>
           </a:xfrm>
           <a:prstGeom prst="rect">
@@ -10698,7 +10313,7 @@
         </p:nvSpPr>
         <p:spPr>
           <a:xfrm>
-            <a:off x="5340096" y="4114800"/>
+            <a:off x="5340096" y="4526280"/>
             <a:ext cx="1207008" cy="320040"/>
           </a:xfrm>
           <a:prstGeom prst="rect">
@@ -10737,7 +10352,7 @@
         </p:nvSpPr>
         <p:spPr>
           <a:xfrm>
-            <a:off x="6876288" y="2514600"/>
+            <a:off x="6876288" y="2926080"/>
             <a:ext cx="658368" cy="658368"/>
           </a:xfrm>
           <a:prstGeom prst="ellipse">
@@ -10789,7 +10404,7 @@
         </p:nvSpPr>
         <p:spPr>
           <a:xfrm>
-            <a:off x="6601968" y="3383280"/>
+            <a:off x="6601968" y="3794760"/>
             <a:ext cx="1207008" cy="685800"/>
           </a:xfrm>
           <a:prstGeom prst="rect">
@@ -10844,7 +10459,7 @@
         </p:nvSpPr>
         <p:spPr>
           <a:xfrm>
-            <a:off x="6601968" y="4114800"/>
+            <a:off x="6601968" y="4526280"/>
             <a:ext cx="1207008" cy="320040"/>
           </a:xfrm>
           <a:prstGeom prst="rect">
@@ -10883,7 +10498,7 @@
         </p:nvSpPr>
         <p:spPr>
           <a:xfrm>
-            <a:off x="8138159" y="2514600"/>
+            <a:off x="8138159" y="2926080"/>
             <a:ext cx="658368" cy="658368"/>
           </a:xfrm>
           <a:prstGeom prst="ellipse">
@@ -10935,7 +10550,7 @@
         </p:nvSpPr>
         <p:spPr>
           <a:xfrm>
-            <a:off x="7863839" y="3383280"/>
+            <a:off x="7863839" y="3794760"/>
             <a:ext cx="1207008" cy="685800"/>
           </a:xfrm>
           <a:prstGeom prst="rect">
@@ -10990,7 +10605,7 @@
         </p:nvSpPr>
         <p:spPr>
           <a:xfrm>
-            <a:off x="7863839" y="4114800"/>
+            <a:off x="7863839" y="4526280"/>
             <a:ext cx="1207008" cy="320040"/>
           </a:xfrm>
           <a:prstGeom prst="rect">
@@ -11029,7 +10644,7 @@
         </p:nvSpPr>
         <p:spPr>
           <a:xfrm>
-            <a:off x="9400032" y="2514600"/>
+            <a:off x="9400032" y="2926080"/>
             <a:ext cx="658368" cy="658368"/>
           </a:xfrm>
           <a:prstGeom prst="ellipse">
@@ -11081,7 +10696,7 @@
         </p:nvSpPr>
         <p:spPr>
           <a:xfrm>
-            <a:off x="9125711" y="3383280"/>
+            <a:off x="9125711" y="3794760"/>
             <a:ext cx="1207008" cy="685800"/>
           </a:xfrm>
           <a:prstGeom prst="rect">
@@ -11136,7 +10751,7 @@
         </p:nvSpPr>
         <p:spPr>
           <a:xfrm>
-            <a:off x="9125711" y="4114800"/>
+            <a:off x="9125711" y="4526280"/>
             <a:ext cx="1207008" cy="320040"/>
           </a:xfrm>
           <a:prstGeom prst="rect">
@@ -11175,7 +10790,7 @@
         </p:nvSpPr>
         <p:spPr>
           <a:xfrm>
-            <a:off x="10661903" y="2514600"/>
+            <a:off x="10661903" y="2926080"/>
             <a:ext cx="658368" cy="658368"/>
           </a:xfrm>
           <a:prstGeom prst="ellipse">
@@ -11227,7 +10842,7 @@
         </p:nvSpPr>
         <p:spPr>
           <a:xfrm>
-            <a:off x="10387583" y="3383280"/>
+            <a:off x="10387583" y="3794760"/>
             <a:ext cx="1207008" cy="685800"/>
           </a:xfrm>
           <a:prstGeom prst="rect">
@@ -11266,7 +10881,7 @@
         </p:nvSpPr>
         <p:spPr>
           <a:xfrm>
-            <a:off x="10387583" y="4114800"/>
+            <a:off x="10387583" y="4526280"/>
             <a:ext cx="1207008" cy="320040"/>
           </a:xfrm>
           <a:prstGeom prst="rect">
@@ -11293,293 +10908,6 @@
                 <a:latin typeface="Calibri"/>
               </a:rPr>
               <a:t>Slide 16</a:t>
-            </a:r>
-          </a:p>
-        </p:txBody>
-      </p:sp>
-      <p:sp>
-        <p:nvSpPr>
-          <p:cNvPr id="32" name="Rounded Rectangle 31"/>
-          <p:cNvSpPr/>
-          <p:nvPr/>
-        </p:nvSpPr>
-        <p:spPr>
-          <a:xfrm>
-            <a:off x="548640" y="4892040"/>
-            <a:ext cx="5440680" cy="1097280"/>
-          </a:xfrm>
-          <a:prstGeom prst="roundRect">
-            <a:avLst>
-              <a:gd name="adj" fmla="val 8000"/>
-            </a:avLst>
-          </a:prstGeom>
-          <a:solidFill>
-            <a:srgbClr val="EEF1F6"/>
-          </a:solidFill>
-          <a:ln>
-            <a:noFill/>
-          </a:ln>
-          <a:effectLst/>
-        </p:spPr>
-        <p:style>
-          <a:lnRef idx="1">
-            <a:schemeClr val="accent1"/>
-          </a:lnRef>
-          <a:fillRef idx="3">
-            <a:schemeClr val="accent1"/>
-          </a:fillRef>
-          <a:effectRef idx="2">
-            <a:schemeClr val="accent1"/>
-          </a:effectRef>
-          <a:fontRef idx="minor">
-            <a:schemeClr val="lt1"/>
-          </a:fontRef>
-        </p:style>
-        <p:txBody>
-          <a:bodyPr rtlCol="0" anchor="ctr"/>
-          <a:lstStyle/>
-          <a:p>
-            <a:pPr algn="ctr"/>
-          </a:p>
-        </p:txBody>
-      </p:sp>
-      <p:sp>
-        <p:nvSpPr>
-          <p:cNvPr id="33" name="TextBox 32"/>
-          <p:cNvSpPr txBox="1"/>
-          <p:nvPr/>
-        </p:nvSpPr>
-        <p:spPr>
-          <a:xfrm>
-            <a:off x="777240" y="5029200"/>
-            <a:ext cx="5029200" cy="365760"/>
-          </a:xfrm>
-          <a:prstGeom prst="rect">
-            <a:avLst/>
-          </a:prstGeom>
-          <a:noFill/>
-        </p:spPr>
-        <p:txBody>
-          <a:bodyPr wrap="square" anchor="t" lIns="0" rIns="0" tIns="0" bIns="0">
-            <a:spAutoFit/>
-          </a:bodyPr>
-          <a:lstStyle/>
-          <a:p>
-            <a:pPr algn="l">
-              <a:spcAft>
-                <a:spcPts val="600"/>
-              </a:spcAft>
-            </a:pPr>
-            <a:r>
-              <a:rPr sz="1600" b="1" i="0">
-                <a:solidFill>
-                  <a:srgbClr val="14213D"/>
-                </a:solidFill>
-                <a:latin typeface="Calibri"/>
-              </a:rPr>
-              <a:t>Reza Zamani</a:t>
-            </a:r>
-          </a:p>
-        </p:txBody>
-      </p:sp>
-      <p:sp>
-        <p:nvSpPr>
-          <p:cNvPr id="34" name="TextBox 33"/>
-          <p:cNvSpPr txBox="1"/>
-          <p:nvPr/>
-        </p:nvSpPr>
-        <p:spPr>
-          <a:xfrm>
-            <a:off x="777240" y="5413248"/>
-            <a:ext cx="5029200" cy="457200"/>
-          </a:xfrm>
-          <a:prstGeom prst="rect">
-            <a:avLst/>
-          </a:prstGeom>
-          <a:noFill/>
-        </p:spPr>
-        <p:txBody>
-          <a:bodyPr wrap="square" anchor="t" lIns="0" rIns="0" tIns="0" bIns="0">
-            <a:spAutoFit/>
-          </a:bodyPr>
-          <a:lstStyle/>
-          <a:p>
-            <a:pPr algn="l">
-              <a:spcAft>
-                <a:spcPts val="600"/>
-              </a:spcAft>
-            </a:pPr>
-            <a:r>
-              <a:rPr sz="1300" b="0" i="0">
-                <a:solidFill>
-                  <a:srgbClr val="1B1F27"/>
-                </a:solidFill>
-                <a:latin typeface="Calibri"/>
-              </a:rPr>
-              <a:t>Motivation, questions and hypotheses; Strategy A (G10 FX) and its risk</a:t>
-            </a:r>
-          </a:p>
-        </p:txBody>
-      </p:sp>
-      <p:sp>
-        <p:nvSpPr>
-          <p:cNvPr id="35" name="Rounded Rectangle 34"/>
-          <p:cNvSpPr/>
-          <p:nvPr/>
-        </p:nvSpPr>
-        <p:spPr>
-          <a:xfrm>
-            <a:off x="6172200" y="4892040"/>
-            <a:ext cx="5440680" cy="1097280"/>
-          </a:xfrm>
-          <a:prstGeom prst="roundRect">
-            <a:avLst>
-              <a:gd name="adj" fmla="val 8000"/>
-            </a:avLst>
-          </a:prstGeom>
-          <a:solidFill>
-            <a:srgbClr val="EEF1F6"/>
-          </a:solidFill>
-          <a:ln>
-            <a:noFill/>
-          </a:ln>
-          <a:effectLst/>
-        </p:spPr>
-        <p:style>
-          <a:lnRef idx="1">
-            <a:schemeClr val="accent1"/>
-          </a:lnRef>
-          <a:fillRef idx="3">
-            <a:schemeClr val="accent1"/>
-          </a:fillRef>
-          <a:effectRef idx="2">
-            <a:schemeClr val="accent1"/>
-          </a:effectRef>
-          <a:fontRef idx="minor">
-            <a:schemeClr val="lt1"/>
-          </a:fontRef>
-        </p:style>
-        <p:txBody>
-          <a:bodyPr rtlCol="0" anchor="ctr"/>
-          <a:lstStyle/>
-          <a:p>
-            <a:pPr algn="ctr"/>
-          </a:p>
-        </p:txBody>
-      </p:sp>
-      <p:sp>
-        <p:nvSpPr>
-          <p:cNvPr id="36" name="TextBox 35"/>
-          <p:cNvSpPr txBox="1"/>
-          <p:nvPr/>
-        </p:nvSpPr>
-        <p:spPr>
-          <a:xfrm>
-            <a:off x="6400800" y="5029200"/>
-            <a:ext cx="5029200" cy="365760"/>
-          </a:xfrm>
-          <a:prstGeom prst="rect">
-            <a:avLst/>
-          </a:prstGeom>
-          <a:noFill/>
-        </p:spPr>
-        <p:txBody>
-          <a:bodyPr wrap="square" anchor="t" lIns="0" rIns="0" tIns="0" bIns="0">
-            <a:spAutoFit/>
-          </a:bodyPr>
-          <a:lstStyle/>
-          <a:p>
-            <a:pPr algn="l">
-              <a:spcAft>
-                <a:spcPts val="600"/>
-              </a:spcAft>
-            </a:pPr>
-            <a:r>
-              <a:rPr sz="1600" b="1" i="0">
-                <a:solidFill>
-                  <a:srgbClr val="14213D"/>
-                </a:solidFill>
-                <a:latin typeface="Calibri"/>
-              </a:rPr>
-              <a:t>Paraj Goyal</a:t>
-            </a:r>
-          </a:p>
-        </p:txBody>
-      </p:sp>
-      <p:sp>
-        <p:nvSpPr>
-          <p:cNvPr id="37" name="TextBox 36"/>
-          <p:cNvSpPr txBox="1"/>
-          <p:nvPr/>
-        </p:nvSpPr>
-        <p:spPr>
-          <a:xfrm>
-            <a:off x="6400800" y="5413248"/>
-            <a:ext cx="5029200" cy="457200"/>
-          </a:xfrm>
-          <a:prstGeom prst="rect">
-            <a:avLst/>
-          </a:prstGeom>
-          <a:noFill/>
-        </p:spPr>
-        <p:txBody>
-          <a:bodyPr wrap="square" anchor="t" lIns="0" rIns="0" tIns="0" bIns="0">
-            <a:spAutoFit/>
-          </a:bodyPr>
-          <a:lstStyle/>
-          <a:p>
-            <a:pPr algn="l">
-              <a:spcAft>
-                <a:spcPts val="600"/>
-              </a:spcAft>
-            </a:pPr>
-            <a:r>
-              <a:rPr sz="1300" b="0" i="0">
-                <a:solidFill>
-                  <a:srgbClr val="1B1F27"/>
-                </a:solidFill>
-                <a:latin typeface="Calibri"/>
-              </a:rPr>
-              <a:t>Data and methodology; Strategy C (crypto) and its risk; combined portfolio</a:t>
-            </a:r>
-          </a:p>
-        </p:txBody>
-      </p:sp>
-      <p:sp>
-        <p:nvSpPr>
-          <p:cNvPr id="38" name="TextBox 37"/>
-          <p:cNvSpPr txBox="1"/>
-          <p:nvPr/>
-        </p:nvSpPr>
-        <p:spPr>
-          <a:xfrm>
-            <a:off x="548640" y="6144768"/>
-            <a:ext cx="7315200" cy="320040"/>
-          </a:xfrm>
-          <a:prstGeom prst="rect">
-            <a:avLst/>
-          </a:prstGeom>
-          <a:noFill/>
-        </p:spPr>
-        <p:txBody>
-          <a:bodyPr wrap="square" anchor="t" lIns="0" rIns="0" tIns="0" bIns="0">
-            <a:spAutoFit/>
-          </a:bodyPr>
-          <a:lstStyle/>
-          <a:p>
-            <a:pPr algn="l">
-              <a:spcAft>
-                <a:spcPts val="600"/>
-              </a:spcAft>
-            </a:pPr>
-            <a:r>
-              <a:rPr sz="1100" b="0" i="0">
-                <a:solidFill>
-                  <a:srgbClr val="5C677D"/>
-                </a:solidFill>
-                <a:latin typeface="Calibri"/>
-              </a:rPr>
-              <a:t>Proposed split · conclusions presented together</a:t>
             </a:r>
           </a:p>
         </p:txBody>
@@ -11619,7 +10947,7 @@
         <p:spPr>
           <a:xfrm>
             <a:off x="548640" y="411480"/>
-            <a:ext cx="9692640" cy="731520"/>
+            <a:ext cx="11064240" cy="731520"/>
           </a:xfrm>
           <a:prstGeom prst="rect">
             <a:avLst/>
@@ -11690,14 +11018,163 @@
       </p:sp>
       <p:sp>
         <p:nvSpPr>
-          <p:cNvPr id="4" name="Rounded Rectangle 3"/>
+          <p:cNvPr id="4" name="TextBox 3"/>
+          <p:cNvSpPr txBox="1"/>
+          <p:nvPr/>
+        </p:nvSpPr>
+        <p:spPr>
+          <a:xfrm>
+            <a:off x="548640" y="1828800"/>
+            <a:ext cx="4937760" cy="3474720"/>
+          </a:xfrm>
+          <a:prstGeom prst="rect">
+            <a:avLst/>
+          </a:prstGeom>
+          <a:noFill/>
+        </p:spPr>
+        <p:txBody>
+          <a:bodyPr wrap="square" anchor="t" lIns="0" rIns="0" tIns="0" bIns="0">
+            <a:spAutoFit/>
+          </a:bodyPr>
+          <a:lstStyle/>
+          <a:p>
+            <a:pPr algn="l">
+              <a:spcAft>
+                <a:spcPts val="1400"/>
+              </a:spcAft>
+            </a:pPr>
+            <a:r>
+              <a:rPr sz="1700" b="0" i="0">
+                <a:solidFill>
+                  <a:srgbClr val="1B1F27"/>
+                </a:solidFill>
+                <a:latin typeface="Calibri"/>
+              </a:rPr>
+              <a:t>•  High-yield assets earn a premium over low-yield ones.</a:t>
+            </a:r>
+          </a:p>
+          <a:p>
+            <a:pPr algn="l">
+              <a:spcAft>
+                <a:spcPts val="1400"/>
+              </a:spcAft>
+            </a:pPr>
+            <a:r>
+              <a:rPr sz="1700" b="0" i="0">
+                <a:solidFill>
+                  <a:srgbClr val="1B1F27"/>
+                </a:solidFill>
+                <a:latin typeface="Calibri"/>
+              </a:rPr>
+              <a:t>•  The premium is compensation for crash risk: when many investors hold the same trade, forced unwinding produces sudden losses (Brunnermeier, Nagel &amp; Pedersen 2008).</a:t>
+            </a:r>
+          </a:p>
+          <a:p>
+            <a:pPr algn="l">
+              <a:spcAft>
+                <a:spcPts val="1400"/>
+              </a:spcAft>
+            </a:pPr>
+            <a:r>
+              <a:rPr sz="1700" b="1" i="0">
+                <a:solidFill>
+                  <a:srgbClr val="1B1F27"/>
+                </a:solidFill>
+                <a:latin typeface="Calibri"/>
+              </a:rPr>
+              <a:t>•  Hypothesis: crowding is measurable, and crowded carry should crash more.</a:t>
+            </a:r>
+          </a:p>
+        </p:txBody>
+      </p:sp>
+      <p:sp>
+        <p:nvSpPr>
+          <p:cNvPr id="5" name="TextBox 4"/>
+          <p:cNvSpPr txBox="1"/>
+          <p:nvPr/>
+        </p:nvSpPr>
+        <p:spPr>
+          <a:xfrm>
+            <a:off x="7818120" y="1828800"/>
+            <a:ext cx="1828800" cy="457200"/>
+          </a:xfrm>
+          <a:prstGeom prst="rect">
+            <a:avLst/>
+          </a:prstGeom>
+          <a:noFill/>
+        </p:spPr>
+        <p:txBody>
+          <a:bodyPr wrap="square" anchor="t" lIns="0" rIns="0" tIns="0" bIns="0">
+            <a:spAutoFit/>
+          </a:bodyPr>
+          <a:lstStyle/>
+          <a:p>
+            <a:pPr algn="l">
+              <a:spcAft>
+                <a:spcPts val="600"/>
+              </a:spcAft>
+            </a:pPr>
+            <a:r>
+              <a:rPr sz="1600" b="1" i="0">
+                <a:solidFill>
+                  <a:srgbClr val="14213D"/>
+                </a:solidFill>
+                <a:latin typeface="Calibri"/>
+              </a:rPr>
+              <a:t>A: G10 FX</a:t>
+            </a:r>
+          </a:p>
+        </p:txBody>
+      </p:sp>
+      <p:sp>
+        <p:nvSpPr>
+          <p:cNvPr id="6" name="TextBox 5"/>
+          <p:cNvSpPr txBox="1"/>
+          <p:nvPr/>
+        </p:nvSpPr>
+        <p:spPr>
+          <a:xfrm>
+            <a:off x="9738360" y="1828800"/>
+            <a:ext cx="1920240" cy="457200"/>
+          </a:xfrm>
+          <a:prstGeom prst="rect">
+            <a:avLst/>
+          </a:prstGeom>
+          <a:noFill/>
+        </p:spPr>
+        <p:txBody>
+          <a:bodyPr wrap="square" anchor="t" lIns="0" rIns="0" tIns="0" bIns="0">
+            <a:spAutoFit/>
+          </a:bodyPr>
+          <a:lstStyle/>
+          <a:p>
+            <a:pPr algn="l">
+              <a:spcAft>
+                <a:spcPts val="600"/>
+              </a:spcAft>
+            </a:pPr>
+            <a:r>
+              <a:rPr sz="1600" b="1" i="0">
+                <a:solidFill>
+                  <a:srgbClr val="E39B17"/>
+                </a:solidFill>
+                <a:latin typeface="Calibri"/>
+              </a:rPr>
+              <a:t>C: Crypto</a:t>
+            </a:r>
+          </a:p>
+        </p:txBody>
+      </p:sp>
+      <p:sp>
+        <p:nvSpPr>
+          <p:cNvPr id="7" name="Rounded Rectangle 6"/>
           <p:cNvSpPr/>
           <p:nvPr/>
         </p:nvSpPr>
         <p:spPr>
           <a:xfrm>
-            <a:off x="10271455" y="457200"/>
-            <a:ext cx="1371600" cy="384048"/>
+            <a:off x="5943600" y="2432304"/>
+            <a:ext cx="5715000" cy="603504"/>
           </a:xfrm>
           <a:prstGeom prst="roundRect">
             <a:avLst>
@@ -11705,7 +11182,7 @@
             </a:avLst>
           </a:prstGeom>
           <a:solidFill>
-            <a:srgbClr val="E39B17"/>
+            <a:srgbClr val="EEF1F6"/>
           </a:solidFill>
           <a:ln>
             <a:noFill/>
@@ -11727,32 +11204,23 @@
           </a:fontRef>
         </p:style>
         <p:txBody>
-          <a:bodyPr rtlCol="0" anchor="ctr" lIns="0" rIns="0"/>
+          <a:bodyPr rtlCol="0" anchor="ctr"/>
           <a:lstStyle/>
           <a:p>
             <a:pPr algn="ctr"/>
-            <a:r>
-              <a:rPr sz="1200" b="1">
-                <a:solidFill>
-                  <a:srgbClr val="14213D"/>
-                </a:solidFill>
-                <a:latin typeface="Calibri"/>
-              </a:rPr>
-              <a:t>Reza</a:t>
-            </a:r>
-          </a:p>
-        </p:txBody>
-      </p:sp>
-      <p:sp>
-        <p:nvSpPr>
-          <p:cNvPr id="5" name="TextBox 4"/>
+          </a:p>
+        </p:txBody>
+      </p:sp>
+      <p:sp>
+        <p:nvSpPr>
+          <p:cNvPr id="8" name="TextBox 7"/>
           <p:cNvSpPr txBox="1"/>
           <p:nvPr/>
         </p:nvSpPr>
         <p:spPr>
           <a:xfrm>
-            <a:off x="548640" y="1828800"/>
-            <a:ext cx="4937760" cy="3474720"/>
+            <a:off x="6126480" y="2542032"/>
+            <a:ext cx="1645920" cy="457200"/>
           </a:xfrm>
           <a:prstGeom prst="rect">
             <a:avLst/>
@@ -11767,62 +11235,30 @@
           <a:p>
             <a:pPr algn="l">
               <a:spcAft>
-                <a:spcPts val="1400"/>
-              </a:spcAft>
-            </a:pPr>
-            <a:r>
-              <a:rPr sz="1700" b="0" i="0">
-                <a:solidFill>
-                  <a:srgbClr val="1B1F27"/>
+                <a:spcPts val="600"/>
+              </a:spcAft>
+            </a:pPr>
+            <a:r>
+              <a:rPr sz="1300" b="1" i="0">
+                <a:solidFill>
+                  <a:srgbClr val="5C677D"/>
                 </a:solidFill>
                 <a:latin typeface="Calibri"/>
               </a:rPr>
-              <a:t>•  High-yield assets earn a premium over low-yield ones.</a:t>
-            </a:r>
-          </a:p>
-          <a:p>
-            <a:pPr algn="l">
-              <a:spcAft>
-                <a:spcPts val="1400"/>
-              </a:spcAft>
-            </a:pPr>
-            <a:r>
-              <a:rPr sz="1700" b="0" i="0">
-                <a:solidFill>
-                  <a:srgbClr val="1B1F27"/>
-                </a:solidFill>
-                <a:latin typeface="Calibri"/>
-              </a:rPr>
-              <a:t>•  The premium is compensation for crash risk: when many investors hold the same trade, forced unwinding produces sudden losses (Brunnermeier, Nagel &amp; Pedersen 2008).</a:t>
-            </a:r>
-          </a:p>
-          <a:p>
-            <a:pPr algn="l">
-              <a:spcAft>
-                <a:spcPts val="1400"/>
-              </a:spcAft>
-            </a:pPr>
-            <a:r>
-              <a:rPr sz="1700" b="1" i="0">
-                <a:solidFill>
-                  <a:srgbClr val="1B1F27"/>
-                </a:solidFill>
-                <a:latin typeface="Calibri"/>
-              </a:rPr>
-              <a:t>•  Hypothesis: crowding is measurable, and crowded carry should crash more.</a:t>
-            </a:r>
-          </a:p>
-        </p:txBody>
-      </p:sp>
-      <p:sp>
-        <p:nvSpPr>
-          <p:cNvPr id="6" name="TextBox 5"/>
+              <a:t>Carry signal</a:t>
+            </a:r>
+          </a:p>
+        </p:txBody>
+      </p:sp>
+      <p:sp>
+        <p:nvSpPr>
+          <p:cNvPr id="9" name="TextBox 8"/>
           <p:cNvSpPr txBox="1"/>
           <p:nvPr/>
         </p:nvSpPr>
         <p:spPr>
           <a:xfrm>
-            <a:off x="7818120" y="1828800"/>
+            <a:off x="7818120" y="2542032"/>
             <a:ext cx="1828800" cy="457200"/>
           </a:xfrm>
           <a:prstGeom prst="rect">
@@ -11842,27 +11278,27 @@
               </a:spcAft>
             </a:pPr>
             <a:r>
-              <a:rPr sz="1600" b="1" i="0">
-                <a:solidFill>
-                  <a:srgbClr val="14213D"/>
+              <a:rPr sz="1300" b="0" i="0">
+                <a:solidFill>
+                  <a:srgbClr val="1B1F27"/>
                 </a:solidFill>
                 <a:latin typeface="Calibri"/>
               </a:rPr>
-              <a:t>A: G10 FX</a:t>
-            </a:r>
-          </a:p>
-        </p:txBody>
-      </p:sp>
-      <p:sp>
-        <p:nvSpPr>
-          <p:cNvPr id="7" name="TextBox 6"/>
+              <a:t>3-month rate differential</a:t>
+            </a:r>
+          </a:p>
+        </p:txBody>
+      </p:sp>
+      <p:sp>
+        <p:nvSpPr>
+          <p:cNvPr id="10" name="TextBox 9"/>
           <p:cNvSpPr txBox="1"/>
           <p:nvPr/>
         </p:nvSpPr>
         <p:spPr>
           <a:xfrm>
-            <a:off x="9738360" y="1828800"/>
-            <a:ext cx="1920240" cy="457200"/>
+            <a:off x="9738360" y="2542032"/>
+            <a:ext cx="1828800" cy="457200"/>
           </a:xfrm>
           <a:prstGeom prst="rect">
             <a:avLst/>
@@ -11881,26 +11317,26 @@
               </a:spcAft>
             </a:pPr>
             <a:r>
-              <a:rPr sz="1600" b="1" i="0">
-                <a:solidFill>
-                  <a:srgbClr val="E39B17"/>
+              <a:rPr sz="1300" b="0" i="0">
+                <a:solidFill>
+                  <a:srgbClr val="1B1F27"/>
                 </a:solidFill>
                 <a:latin typeface="Calibri"/>
               </a:rPr>
-              <a:t>C: Crypto</a:t>
-            </a:r>
-          </a:p>
-        </p:txBody>
-      </p:sp>
-      <p:sp>
-        <p:nvSpPr>
-          <p:cNvPr id="8" name="Rounded Rectangle 7"/>
+              <a:t>Perpetual funding rate</a:t>
+            </a:r>
+          </a:p>
+        </p:txBody>
+      </p:sp>
+      <p:sp>
+        <p:nvSpPr>
+          <p:cNvPr id="11" name="Rounded Rectangle 10"/>
           <p:cNvSpPr/>
           <p:nvPr/>
         </p:nvSpPr>
         <p:spPr>
           <a:xfrm>
-            <a:off x="5943600" y="2432304"/>
+            <a:off x="5943600" y="3145536"/>
             <a:ext cx="5715000" cy="603504"/>
           </a:xfrm>
           <a:prstGeom prst="roundRect">
@@ -11940,13 +11376,13 @@
       </p:sp>
       <p:sp>
         <p:nvSpPr>
-          <p:cNvPr id="9" name="TextBox 8"/>
+          <p:cNvPr id="12" name="TextBox 11"/>
           <p:cNvSpPr txBox="1"/>
           <p:nvPr/>
         </p:nvSpPr>
         <p:spPr>
           <a:xfrm>
-            <a:off x="6126480" y="2542032"/>
+            <a:off x="6126480" y="3255264"/>
             <a:ext cx="1645920" cy="457200"/>
           </a:xfrm>
           <a:prstGeom prst="rect">
@@ -11972,20 +11408,20 @@
                 </a:solidFill>
                 <a:latin typeface="Calibri"/>
               </a:rPr>
-              <a:t>Carry signal</a:t>
-            </a:r>
-          </a:p>
-        </p:txBody>
-      </p:sp>
-      <p:sp>
-        <p:nvSpPr>
-          <p:cNvPr id="10" name="TextBox 9"/>
+              <a:t>Crowding data</a:t>
+            </a:r>
+          </a:p>
+        </p:txBody>
+      </p:sp>
+      <p:sp>
+        <p:nvSpPr>
+          <p:cNvPr id="13" name="TextBox 12"/>
           <p:cNvSpPr txBox="1"/>
           <p:nvPr/>
         </p:nvSpPr>
         <p:spPr>
           <a:xfrm>
-            <a:off x="7818120" y="2542032"/>
+            <a:off x="7818120" y="3255264"/>
             <a:ext cx="1828800" cy="457200"/>
           </a:xfrm>
           <a:prstGeom prst="rect">
@@ -12011,20 +11447,20 @@
                 </a:solidFill>
                 <a:latin typeface="Calibri"/>
               </a:rPr>
-              <a:t>3-month rate differential</a:t>
-            </a:r>
-          </a:p>
-        </p:txBody>
-      </p:sp>
-      <p:sp>
-        <p:nvSpPr>
-          <p:cNvPr id="11" name="TextBox 10"/>
+              <a:t>CFTC speculator positions</a:t>
+            </a:r>
+          </a:p>
+        </p:txBody>
+      </p:sp>
+      <p:sp>
+        <p:nvSpPr>
+          <p:cNvPr id="14" name="TextBox 13"/>
           <p:cNvSpPr txBox="1"/>
           <p:nvPr/>
         </p:nvSpPr>
         <p:spPr>
           <a:xfrm>
-            <a:off x="9738360" y="2542032"/>
+            <a:off x="9738360" y="3255264"/>
             <a:ext cx="1828800" cy="457200"/>
           </a:xfrm>
           <a:prstGeom prst="rect">
@@ -12050,20 +11486,20 @@
                 </a:solidFill>
                 <a:latin typeface="Calibri"/>
               </a:rPr>
-              <a:t>Perpetual funding rate</a:t>
-            </a:r>
-          </a:p>
-        </p:txBody>
-      </p:sp>
-      <p:sp>
-        <p:nvSpPr>
-          <p:cNvPr id="12" name="Rounded Rectangle 11"/>
+              <a:t>Funding = leveraged demand</a:t>
+            </a:r>
+          </a:p>
+        </p:txBody>
+      </p:sp>
+      <p:sp>
+        <p:nvSpPr>
+          <p:cNvPr id="15" name="Rounded Rectangle 14"/>
           <p:cNvSpPr/>
           <p:nvPr/>
         </p:nvSpPr>
         <p:spPr>
           <a:xfrm>
-            <a:off x="5943600" y="3145536"/>
+            <a:off x="5943600" y="3858768"/>
             <a:ext cx="5715000" cy="603504"/>
           </a:xfrm>
           <a:prstGeom prst="roundRect">
@@ -12103,13 +11539,13 @@
       </p:sp>
       <p:sp>
         <p:nvSpPr>
-          <p:cNvPr id="13" name="TextBox 12"/>
+          <p:cNvPr id="16" name="TextBox 15"/>
           <p:cNvSpPr txBox="1"/>
           <p:nvPr/>
         </p:nvSpPr>
         <p:spPr>
           <a:xfrm>
-            <a:off x="6126480" y="3255264"/>
+            <a:off x="6126480" y="3968496"/>
             <a:ext cx="1645920" cy="457200"/>
           </a:xfrm>
           <a:prstGeom prst="rect">
@@ -12135,20 +11571,20 @@
                 </a:solidFill>
                 <a:latin typeface="Calibri"/>
               </a:rPr>
-              <a:t>Crowding data</a:t>
-            </a:r>
-          </a:p>
-        </p:txBody>
-      </p:sp>
-      <p:sp>
-        <p:nvSpPr>
-          <p:cNvPr id="14" name="TextBox 13"/>
+              <a:t>Universe</a:t>
+            </a:r>
+          </a:p>
+        </p:txBody>
+      </p:sp>
+      <p:sp>
+        <p:nvSpPr>
+          <p:cNvPr id="17" name="TextBox 16"/>
           <p:cNvSpPr txBox="1"/>
           <p:nvPr/>
         </p:nvSpPr>
         <p:spPr>
           <a:xfrm>
-            <a:off x="7818120" y="3255264"/>
+            <a:off x="7818120" y="3968496"/>
             <a:ext cx="1828800" cy="457200"/>
           </a:xfrm>
           <a:prstGeom prst="rect">
@@ -12174,20 +11610,20 @@
                 </a:solidFill>
                 <a:latin typeface="Calibri"/>
               </a:rPr>
-              <a:t>CFTC speculator positions</a:t>
-            </a:r>
-          </a:p>
-        </p:txBody>
-      </p:sp>
-      <p:sp>
-        <p:nvSpPr>
-          <p:cNvPr id="15" name="TextBox 14"/>
+              <a:t>7 currencies vs USD</a:t>
+            </a:r>
+          </a:p>
+        </p:txBody>
+      </p:sp>
+      <p:sp>
+        <p:nvSpPr>
+          <p:cNvPr id="18" name="TextBox 17"/>
           <p:cNvSpPr txBox="1"/>
           <p:nvPr/>
         </p:nvSpPr>
         <p:spPr>
           <a:xfrm>
-            <a:off x="9738360" y="3255264"/>
+            <a:off x="9738360" y="3968496"/>
             <a:ext cx="1828800" cy="457200"/>
           </a:xfrm>
           <a:prstGeom prst="rect">
@@ -12213,20 +11649,20 @@
                 </a:solidFill>
                 <a:latin typeface="Calibri"/>
               </a:rPr>
-              <a:t>Funding = leveraged demand</a:t>
-            </a:r>
-          </a:p>
-        </p:txBody>
-      </p:sp>
-      <p:sp>
-        <p:nvSpPr>
-          <p:cNvPr id="16" name="Rounded Rectangle 15"/>
+              <a:t>12 coins incl. LUNA, FTT</a:t>
+            </a:r>
+          </a:p>
+        </p:txBody>
+      </p:sp>
+      <p:sp>
+        <p:nvSpPr>
+          <p:cNvPr id="19" name="Rounded Rectangle 18"/>
           <p:cNvSpPr/>
           <p:nvPr/>
         </p:nvSpPr>
         <p:spPr>
           <a:xfrm>
-            <a:off x="5943600" y="3858768"/>
+            <a:off x="5943600" y="4572000"/>
             <a:ext cx="5715000" cy="603504"/>
           </a:xfrm>
           <a:prstGeom prst="roundRect">
@@ -12266,13 +11702,13 @@
       </p:sp>
       <p:sp>
         <p:nvSpPr>
-          <p:cNvPr id="17" name="TextBox 16"/>
+          <p:cNvPr id="20" name="TextBox 19"/>
           <p:cNvSpPr txBox="1"/>
           <p:nvPr/>
         </p:nvSpPr>
         <p:spPr>
           <a:xfrm>
-            <a:off x="6126480" y="3968496"/>
+            <a:off x="6126480" y="4681728"/>
             <a:ext cx="1645920" cy="457200"/>
           </a:xfrm>
           <a:prstGeom prst="rect">
@@ -12298,20 +11734,20 @@
                 </a:solidFill>
                 <a:latin typeface="Calibri"/>
               </a:rPr>
-              <a:t>Universe</a:t>
-            </a:r>
-          </a:p>
-        </p:txBody>
-      </p:sp>
-      <p:sp>
-        <p:nvSpPr>
-          <p:cNvPr id="18" name="TextBox 17"/>
+              <a:t>Frequency</a:t>
+            </a:r>
+          </a:p>
+        </p:txBody>
+      </p:sp>
+      <p:sp>
+        <p:nvSpPr>
+          <p:cNvPr id="21" name="TextBox 20"/>
           <p:cNvSpPr txBox="1"/>
           <p:nvPr/>
         </p:nvSpPr>
         <p:spPr>
           <a:xfrm>
-            <a:off x="7818120" y="3968496"/>
+            <a:off x="7818120" y="4681728"/>
             <a:ext cx="1828800" cy="457200"/>
           </a:xfrm>
           <a:prstGeom prst="rect">
@@ -12337,131 +11773,7 @@
                 </a:solidFill>
                 <a:latin typeface="Calibri"/>
               </a:rPr>
-              <a:t>7 currencies vs USD</a:t>
-            </a:r>
-          </a:p>
-        </p:txBody>
-      </p:sp>
-      <p:sp>
-        <p:nvSpPr>
-          <p:cNvPr id="19" name="TextBox 18"/>
-          <p:cNvSpPr txBox="1"/>
-          <p:nvPr/>
-        </p:nvSpPr>
-        <p:spPr>
-          <a:xfrm>
-            <a:off x="9738360" y="3968496"/>
-            <a:ext cx="1828800" cy="457200"/>
-          </a:xfrm>
-          <a:prstGeom prst="rect">
-            <a:avLst/>
-          </a:prstGeom>
-          <a:noFill/>
-        </p:spPr>
-        <p:txBody>
-          <a:bodyPr wrap="square" anchor="t" lIns="0" rIns="0" tIns="0" bIns="0">
-            <a:spAutoFit/>
-          </a:bodyPr>
-          <a:lstStyle/>
-          <a:p>
-            <a:pPr algn="l">
-              <a:spcAft>
-                <a:spcPts val="600"/>
-              </a:spcAft>
-            </a:pPr>
-            <a:r>
-              <a:rPr sz="1300" b="0" i="0">
-                <a:solidFill>
-                  <a:srgbClr val="1B1F27"/>
-                </a:solidFill>
-                <a:latin typeface="Calibri"/>
-              </a:rPr>
-              <a:t>12 coins incl. LUNA, FTT</a:t>
-            </a:r>
-          </a:p>
-        </p:txBody>
-      </p:sp>
-      <p:sp>
-        <p:nvSpPr>
-          <p:cNvPr id="20" name="Rounded Rectangle 19"/>
-          <p:cNvSpPr/>
-          <p:nvPr/>
-        </p:nvSpPr>
-        <p:spPr>
-          <a:xfrm>
-            <a:off x="5943600" y="4572000"/>
-            <a:ext cx="5715000" cy="603504"/>
-          </a:xfrm>
-          <a:prstGeom prst="roundRect">
-            <a:avLst>
-              <a:gd name="adj" fmla="val 8000"/>
-            </a:avLst>
-          </a:prstGeom>
-          <a:solidFill>
-            <a:srgbClr val="EEF1F6"/>
-          </a:solidFill>
-          <a:ln>
-            <a:noFill/>
-          </a:ln>
-          <a:effectLst/>
-        </p:spPr>
-        <p:style>
-          <a:lnRef idx="1">
-            <a:schemeClr val="accent1"/>
-          </a:lnRef>
-          <a:fillRef idx="3">
-            <a:schemeClr val="accent1"/>
-          </a:fillRef>
-          <a:effectRef idx="2">
-            <a:schemeClr val="accent1"/>
-          </a:effectRef>
-          <a:fontRef idx="minor">
-            <a:schemeClr val="lt1"/>
-          </a:fontRef>
-        </p:style>
-        <p:txBody>
-          <a:bodyPr rtlCol="0" anchor="ctr"/>
-          <a:lstStyle/>
-          <a:p>
-            <a:pPr algn="ctr"/>
-          </a:p>
-        </p:txBody>
-      </p:sp>
-      <p:sp>
-        <p:nvSpPr>
-          <p:cNvPr id="21" name="TextBox 20"/>
-          <p:cNvSpPr txBox="1"/>
-          <p:nvPr/>
-        </p:nvSpPr>
-        <p:spPr>
-          <a:xfrm>
-            <a:off x="6126480" y="4681728"/>
-            <a:ext cx="1645920" cy="457200"/>
-          </a:xfrm>
-          <a:prstGeom prst="rect">
-            <a:avLst/>
-          </a:prstGeom>
-          <a:noFill/>
-        </p:spPr>
-        <p:txBody>
-          <a:bodyPr wrap="square" anchor="t" lIns="0" rIns="0" tIns="0" bIns="0">
-            <a:spAutoFit/>
-          </a:bodyPr>
-          <a:lstStyle/>
-          <a:p>
-            <a:pPr algn="l">
-              <a:spcAft>
-                <a:spcPts val="600"/>
-              </a:spcAft>
-            </a:pPr>
-            <a:r>
-              <a:rPr sz="1300" b="1" i="0">
-                <a:solidFill>
-                  <a:srgbClr val="5C677D"/>
-                </a:solidFill>
-                <a:latin typeface="Calibri"/>
-              </a:rPr>
-              <a:t>Frequency</a:t>
+              <a:t>Monthly</a:t>
             </a:r>
           </a:p>
         </p:txBody>
@@ -12469,45 +11781,6 @@
       <p:sp>
         <p:nvSpPr>
           <p:cNvPr id="22" name="TextBox 21"/>
-          <p:cNvSpPr txBox="1"/>
-          <p:nvPr/>
-        </p:nvSpPr>
-        <p:spPr>
-          <a:xfrm>
-            <a:off x="7818120" y="4681728"/>
-            <a:ext cx="1828800" cy="457200"/>
-          </a:xfrm>
-          <a:prstGeom prst="rect">
-            <a:avLst/>
-          </a:prstGeom>
-          <a:noFill/>
-        </p:spPr>
-        <p:txBody>
-          <a:bodyPr wrap="square" anchor="t" lIns="0" rIns="0" tIns="0" bIns="0">
-            <a:spAutoFit/>
-          </a:bodyPr>
-          <a:lstStyle/>
-          <a:p>
-            <a:pPr algn="l">
-              <a:spcAft>
-                <a:spcPts val="600"/>
-              </a:spcAft>
-            </a:pPr>
-            <a:r>
-              <a:rPr sz="1300" b="0" i="0">
-                <a:solidFill>
-                  <a:srgbClr val="1B1F27"/>
-                </a:solidFill>
-                <a:latin typeface="Calibri"/>
-              </a:rPr>
-              <a:t>Monthly</a:t>
-            </a:r>
-          </a:p>
-        </p:txBody>
-      </p:sp>
-      <p:sp>
-        <p:nvSpPr>
-          <p:cNvPr id="23" name="TextBox 22"/>
           <p:cNvSpPr txBox="1"/>
           <p:nvPr/>
         </p:nvSpPr>
@@ -12579,7 +11852,7 @@
         <p:spPr>
           <a:xfrm>
             <a:off x="548640" y="411480"/>
-            <a:ext cx="9692640" cy="731520"/>
+            <a:ext cx="11064240" cy="731520"/>
           </a:xfrm>
           <a:prstGeom prst="rect">
             <a:avLst/>
@@ -12656,8 +11929,8 @@
         </p:nvSpPr>
         <p:spPr>
           <a:xfrm>
-            <a:off x="10271455" y="457200"/>
-            <a:ext cx="1371600" cy="384048"/>
+            <a:off x="548640" y="1783080"/>
+            <a:ext cx="5394960" cy="4526280"/>
           </a:xfrm>
           <a:prstGeom prst="roundRect">
             <a:avLst>
@@ -12665,7 +11938,7 @@
             </a:avLst>
           </a:prstGeom>
           <a:solidFill>
-            <a:srgbClr val="E39B17"/>
+            <a:srgbClr val="EEF1F6"/>
           </a:solidFill>
           <a:ln>
             <a:noFill/>
@@ -12687,31 +11960,405 @@
           </a:fontRef>
         </p:style>
         <p:txBody>
-          <a:bodyPr rtlCol="0" anchor="ctr" lIns="0" rIns="0"/>
+          <a:bodyPr rtlCol="0" anchor="ctr"/>
           <a:lstStyle/>
           <a:p>
             <a:pPr algn="ctr"/>
-            <a:r>
-              <a:rPr sz="1200" b="1">
+          </a:p>
+        </p:txBody>
+      </p:sp>
+      <p:sp>
+        <p:nvSpPr>
+          <p:cNvPr id="5" name="TextBox 4"/>
+          <p:cNvSpPr txBox="1"/>
+          <p:nvPr/>
+        </p:nvSpPr>
+        <p:spPr>
+          <a:xfrm>
+            <a:off x="822959" y="1920240"/>
+            <a:ext cx="4937760" cy="411480"/>
+          </a:xfrm>
+          <a:prstGeom prst="rect">
+            <a:avLst/>
+          </a:prstGeom>
+          <a:noFill/>
+        </p:spPr>
+        <p:txBody>
+          <a:bodyPr wrap="square" anchor="t" lIns="0" rIns="0" tIns="0" bIns="0">
+            <a:spAutoFit/>
+          </a:bodyPr>
+          <a:lstStyle/>
+          <a:p>
+            <a:pPr algn="l">
+              <a:spcAft>
+                <a:spcPts val="600"/>
+              </a:spcAft>
+            </a:pPr>
+            <a:r>
+              <a:rPr sz="1800" b="1" i="0">
                 <a:solidFill>
                   <a:srgbClr val="14213D"/>
                 </a:solidFill>
                 <a:latin typeface="Calibri"/>
               </a:rPr>
-              <a:t>Reza</a:t>
-            </a:r>
-          </a:p>
-        </p:txBody>
-      </p:sp>
-      <p:sp>
-        <p:nvSpPr>
-          <p:cNvPr id="5" name="Rounded Rectangle 4"/>
+              <a:t>Strategy A · G10 FX carry</a:t>
+            </a:r>
+          </a:p>
+        </p:txBody>
+      </p:sp>
+      <p:sp>
+        <p:nvSpPr>
+          <p:cNvPr id="6" name="TextBox 5"/>
+          <p:cNvSpPr txBox="1"/>
+          <p:nvPr/>
+        </p:nvSpPr>
+        <p:spPr>
+          <a:xfrm>
+            <a:off x="822959" y="2423160"/>
+            <a:ext cx="640080" cy="320040"/>
+          </a:xfrm>
+          <a:prstGeom prst="rect">
+            <a:avLst/>
+          </a:prstGeom>
+          <a:noFill/>
+        </p:spPr>
+        <p:txBody>
+          <a:bodyPr wrap="square" anchor="t" lIns="0" rIns="0" tIns="0" bIns="0">
+            <a:spAutoFit/>
+          </a:bodyPr>
+          <a:lstStyle/>
+          <a:p>
+            <a:pPr algn="l">
+              <a:spcAft>
+                <a:spcPts val="600"/>
+              </a:spcAft>
+            </a:pPr>
+            <a:r>
+              <a:rPr sz="1300" b="1" i="0">
+                <a:solidFill>
+                  <a:srgbClr val="5C677D"/>
+                </a:solidFill>
+                <a:latin typeface="Calibri"/>
+              </a:rPr>
+              <a:t>RQ1</a:t>
+            </a:r>
+          </a:p>
+        </p:txBody>
+      </p:sp>
+      <p:sp>
+        <p:nvSpPr>
+          <p:cNvPr id="7" name="TextBox 6"/>
+          <p:cNvSpPr txBox="1"/>
+          <p:nvPr/>
+        </p:nvSpPr>
+        <p:spPr>
+          <a:xfrm>
+            <a:off x="1463040" y="2423160"/>
+            <a:ext cx="4251960" cy="640080"/>
+          </a:xfrm>
+          <a:prstGeom prst="rect">
+            <a:avLst/>
+          </a:prstGeom>
+          <a:noFill/>
+        </p:spPr>
+        <p:txBody>
+          <a:bodyPr wrap="square" anchor="t" lIns="0" rIns="0" tIns="0" bIns="0">
+            <a:spAutoFit/>
+          </a:bodyPr>
+          <a:lstStyle/>
+          <a:p>
+            <a:pPr algn="l">
+              <a:spcAft>
+                <a:spcPts val="600"/>
+              </a:spcAft>
+            </a:pPr>
+            <a:r>
+              <a:rPr sz="1300" b="0" i="0">
+                <a:solidFill>
+                  <a:srgbClr val="1B1F27"/>
+                </a:solidFill>
+                <a:latin typeface="Calibri"/>
+              </a:rPr>
+              <a:t>Does G10 carry earn a premium after costs, and match the academic carry factor?</a:t>
+            </a:r>
+          </a:p>
+        </p:txBody>
+      </p:sp>
+      <p:sp>
+        <p:nvSpPr>
+          <p:cNvPr id="8" name="TextBox 7"/>
+          <p:cNvSpPr txBox="1"/>
+          <p:nvPr/>
+        </p:nvSpPr>
+        <p:spPr>
+          <a:xfrm>
+            <a:off x="822959" y="3081528"/>
+            <a:ext cx="640080" cy="320040"/>
+          </a:xfrm>
+          <a:prstGeom prst="rect">
+            <a:avLst/>
+          </a:prstGeom>
+          <a:noFill/>
+        </p:spPr>
+        <p:txBody>
+          <a:bodyPr wrap="square" anchor="t" lIns="0" rIns="0" tIns="0" bIns="0">
+            <a:spAutoFit/>
+          </a:bodyPr>
+          <a:lstStyle/>
+          <a:p>
+            <a:pPr algn="l">
+              <a:spcAft>
+                <a:spcPts val="600"/>
+              </a:spcAft>
+            </a:pPr>
+            <a:r>
+              <a:rPr sz="1300" b="1" i="0">
+                <a:solidFill>
+                  <a:srgbClr val="5C677D"/>
+                </a:solidFill>
+                <a:latin typeface="Calibri"/>
+              </a:rPr>
+              <a:t>RQ2</a:t>
+            </a:r>
+          </a:p>
+        </p:txBody>
+      </p:sp>
+      <p:sp>
+        <p:nvSpPr>
+          <p:cNvPr id="9" name="TextBox 8"/>
+          <p:cNvSpPr txBox="1"/>
+          <p:nvPr/>
+        </p:nvSpPr>
+        <p:spPr>
+          <a:xfrm>
+            <a:off x="1463040" y="3081528"/>
+            <a:ext cx="4251960" cy="640080"/>
+          </a:xfrm>
+          <a:prstGeom prst="rect">
+            <a:avLst/>
+          </a:prstGeom>
+          <a:noFill/>
+        </p:spPr>
+        <p:txBody>
+          <a:bodyPr wrap="square" anchor="t" lIns="0" rIns="0" tIns="0" bIns="0">
+            <a:spAutoFit/>
+          </a:bodyPr>
+          <a:lstStyle/>
+          <a:p>
+            <a:pPr algn="l">
+              <a:spcAft>
+                <a:spcPts val="600"/>
+              </a:spcAft>
+            </a:pPr>
+            <a:r>
+              <a:rPr sz="1300" b="0" i="0">
+                <a:solidFill>
+                  <a:srgbClr val="1B1F27"/>
+                </a:solidFill>
+                <a:latin typeface="Calibri"/>
+              </a:rPr>
+              <a:t>Does CFTC crowding predict weaker carry, and does cutting exposure help out of sample?</a:t>
+            </a:r>
+          </a:p>
+        </p:txBody>
+      </p:sp>
+      <p:sp>
+        <p:nvSpPr>
+          <p:cNvPr id="10" name="TextBox 9"/>
+          <p:cNvSpPr txBox="1"/>
+          <p:nvPr/>
+        </p:nvSpPr>
+        <p:spPr>
+          <a:xfrm>
+            <a:off x="822959" y="3739896"/>
+            <a:ext cx="640080" cy="320040"/>
+          </a:xfrm>
+          <a:prstGeom prst="rect">
+            <a:avLst/>
+          </a:prstGeom>
+          <a:noFill/>
+        </p:spPr>
+        <p:txBody>
+          <a:bodyPr wrap="square" anchor="t" lIns="0" rIns="0" tIns="0" bIns="0">
+            <a:spAutoFit/>
+          </a:bodyPr>
+          <a:lstStyle/>
+          <a:p>
+            <a:pPr algn="l">
+              <a:spcAft>
+                <a:spcPts val="600"/>
+              </a:spcAft>
+            </a:pPr>
+            <a:r>
+              <a:rPr sz="1300" b="1" i="0">
+                <a:solidFill>
+                  <a:srgbClr val="5C677D"/>
+                </a:solidFill>
+                <a:latin typeface="Calibri"/>
+              </a:rPr>
+              <a:t>RQ3</a:t>
+            </a:r>
+          </a:p>
+        </p:txBody>
+      </p:sp>
+      <p:sp>
+        <p:nvSpPr>
+          <p:cNvPr id="11" name="TextBox 10"/>
+          <p:cNvSpPr txBox="1"/>
+          <p:nvPr/>
+        </p:nvSpPr>
+        <p:spPr>
+          <a:xfrm>
+            <a:off x="1463040" y="3739896"/>
+            <a:ext cx="4251960" cy="640080"/>
+          </a:xfrm>
+          <a:prstGeom prst="rect">
+            <a:avLst/>
+          </a:prstGeom>
+          <a:noFill/>
+        </p:spPr>
+        <p:txBody>
+          <a:bodyPr wrap="square" anchor="t" lIns="0" rIns="0" tIns="0" bIns="0">
+            <a:spAutoFit/>
+          </a:bodyPr>
+          <a:lstStyle/>
+          <a:p>
+            <a:pPr algn="l">
+              <a:spcAft>
+                <a:spcPts val="600"/>
+              </a:spcAft>
+            </a:pPr>
+            <a:r>
+              <a:rPr sz="1300" b="0" i="0">
+                <a:solidFill>
+                  <a:srgbClr val="1B1F27"/>
+                </a:solidFill>
+                <a:latin typeface="Calibri"/>
+              </a:rPr>
+              <a:t>Is carry exposed to volatility shocks and the dollar factor?</a:t>
+            </a:r>
+          </a:p>
+        </p:txBody>
+      </p:sp>
+      <p:sp>
+        <p:nvSpPr>
+          <p:cNvPr id="12" name="TextBox 11"/>
+          <p:cNvSpPr txBox="1"/>
+          <p:nvPr/>
+        </p:nvSpPr>
+        <p:spPr>
+          <a:xfrm>
+            <a:off x="822959" y="4443983"/>
+            <a:ext cx="4937760" cy="320040"/>
+          </a:xfrm>
+          <a:prstGeom prst="rect">
+            <a:avLst/>
+          </a:prstGeom>
+          <a:noFill/>
+        </p:spPr>
+        <p:txBody>
+          <a:bodyPr wrap="square" anchor="t" lIns="0" rIns="0" tIns="0" bIns="0">
+            <a:spAutoFit/>
+          </a:bodyPr>
+          <a:lstStyle/>
+          <a:p>
+            <a:pPr algn="l">
+              <a:spcAft>
+                <a:spcPts val="600"/>
+              </a:spcAft>
+            </a:pPr>
+            <a:r>
+              <a:rPr sz="1300" b="1" i="0">
+                <a:solidFill>
+                  <a:srgbClr val="5C677D"/>
+                </a:solidFill>
+                <a:latin typeface="Calibri"/>
+              </a:rPr>
+              <a:t>Hypotheses</a:t>
+            </a:r>
+          </a:p>
+        </p:txBody>
+      </p:sp>
+      <p:sp>
+        <p:nvSpPr>
+          <p:cNvPr id="13" name="TextBox 12"/>
+          <p:cNvSpPr txBox="1"/>
+          <p:nvPr/>
+        </p:nvSpPr>
+        <p:spPr>
+          <a:xfrm>
+            <a:off x="822959" y="4782312"/>
+            <a:ext cx="4937760" cy="1280160"/>
+          </a:xfrm>
+          <a:prstGeom prst="rect">
+            <a:avLst/>
+          </a:prstGeom>
+          <a:noFill/>
+        </p:spPr>
+        <p:txBody>
+          <a:bodyPr wrap="square" anchor="t" lIns="0" rIns="0" tIns="0" bIns="0">
+            <a:spAutoFit/>
+          </a:bodyPr>
+          <a:lstStyle/>
+          <a:p>
+            <a:pPr algn="l">
+              <a:spcAft>
+                <a:spcPts val="400"/>
+              </a:spcAft>
+            </a:pPr>
+            <a:r>
+              <a:rPr sz="1300" b="0" i="0">
+                <a:solidFill>
+                  <a:srgbClr val="1B1F27"/>
+                </a:solidFill>
+                <a:latin typeface="Calibri"/>
+              </a:rPr>
+              <a:t>•  H1: positive carry premium (H0: zero)</a:t>
+            </a:r>
+          </a:p>
+          <a:p>
+            <a:pPr algn="l">
+              <a:spcAft>
+                <a:spcPts val="400"/>
+              </a:spcAft>
+            </a:pPr>
+            <a:r>
+              <a:rPr sz="1300" b="0" i="0">
+                <a:solidFill>
+                  <a:srgbClr val="1B1F27"/>
+                </a:solidFill>
+                <a:latin typeface="Calibri"/>
+              </a:rPr>
+              <a:t>•  H1: weaker, more negatively skewed carry after crowded months</a:t>
+            </a:r>
+          </a:p>
+          <a:p>
+            <a:pPr algn="l">
+              <a:spcAft>
+                <a:spcPts val="400"/>
+              </a:spcAft>
+            </a:pPr>
+            <a:r>
+              <a:rPr sz="1300" b="0" i="0">
+                <a:solidFill>
+                  <a:srgbClr val="1B1F27"/>
+                </a:solidFill>
+                <a:latin typeface="Calibri"/>
+              </a:rPr>
+              <a:t>•  H1: negative beta to volatility innovations</a:t>
+            </a:r>
+          </a:p>
+        </p:txBody>
+      </p:sp>
+      <p:sp>
+        <p:nvSpPr>
+          <p:cNvPr id="14" name="Rounded Rectangle 13"/>
           <p:cNvSpPr/>
           <p:nvPr/>
         </p:nvSpPr>
         <p:spPr>
           <a:xfrm>
-            <a:off x="548640" y="1783080"/>
+            <a:off x="6263640" y="1783080"/>
             <a:ext cx="5394960" cy="4526280"/>
           </a:xfrm>
           <a:prstGeom prst="roundRect">
@@ -12751,13 +12398,13 @@
       </p:sp>
       <p:sp>
         <p:nvSpPr>
-          <p:cNvPr id="6" name="TextBox 5"/>
+          <p:cNvPr id="15" name="TextBox 14"/>
           <p:cNvSpPr txBox="1"/>
           <p:nvPr/>
         </p:nvSpPr>
         <p:spPr>
           <a:xfrm>
-            <a:off x="822959" y="1920240"/>
+            <a:off x="6537959" y="1920240"/>
             <a:ext cx="4937760" cy="411480"/>
           </a:xfrm>
           <a:prstGeom prst="rect">
@@ -12779,24 +12426,24 @@
             <a:r>
               <a:rPr sz="1800" b="1" i="0">
                 <a:solidFill>
-                  <a:srgbClr val="14213D"/>
+                  <a:srgbClr val="B7700C"/>
                 </a:solidFill>
                 <a:latin typeface="Calibri"/>
               </a:rPr>
-              <a:t>Strategy A · G10 FX carry</a:t>
-            </a:r>
-          </a:p>
-        </p:txBody>
-      </p:sp>
-      <p:sp>
-        <p:nvSpPr>
-          <p:cNvPr id="7" name="TextBox 6"/>
+              <a:t>Strategy C · crypto funding carry</a:t>
+            </a:r>
+          </a:p>
+        </p:txBody>
+      </p:sp>
+      <p:sp>
+        <p:nvSpPr>
+          <p:cNvPr id="16" name="TextBox 15"/>
           <p:cNvSpPr txBox="1"/>
           <p:nvPr/>
         </p:nvSpPr>
         <p:spPr>
           <a:xfrm>
-            <a:off x="822959" y="2423160"/>
+            <a:off x="6537959" y="2423160"/>
             <a:ext cx="640080" cy="320040"/>
           </a:xfrm>
           <a:prstGeom prst="rect">
@@ -12822,20 +12469,20 @@
                 </a:solidFill>
                 <a:latin typeface="Calibri"/>
               </a:rPr>
-              <a:t>RQ1</a:t>
-            </a:r>
-          </a:p>
-        </p:txBody>
-      </p:sp>
-      <p:sp>
-        <p:nvSpPr>
-          <p:cNvPr id="8" name="TextBox 7"/>
+              <a:t>RQ4</a:t>
+            </a:r>
+          </a:p>
+        </p:txBody>
+      </p:sp>
+      <p:sp>
+        <p:nvSpPr>
+          <p:cNvPr id="17" name="TextBox 16"/>
           <p:cNvSpPr txBox="1"/>
           <p:nvPr/>
         </p:nvSpPr>
         <p:spPr>
           <a:xfrm>
-            <a:off x="1463040" y="2423160"/>
+            <a:off x="7178040" y="2423160"/>
             <a:ext cx="4251960" cy="640080"/>
           </a:xfrm>
           <a:prstGeom prst="rect">
@@ -12861,20 +12508,20 @@
                 </a:solidFill>
                 <a:latin typeface="Calibri"/>
               </a:rPr>
-              <a:t>Does G10 carry earn a premium after costs, and match the academic carry factor?</a:t>
-            </a:r>
-          </a:p>
-        </p:txBody>
-      </p:sp>
-      <p:sp>
-        <p:nvSpPr>
-          <p:cNvPr id="9" name="TextBox 8"/>
+              <a:t>Does short-high / long-low funding earn a premium after costs, from funding or price?</a:t>
+            </a:r>
+          </a:p>
+        </p:txBody>
+      </p:sp>
+      <p:sp>
+        <p:nvSpPr>
+          <p:cNvPr id="18" name="TextBox 17"/>
           <p:cNvSpPr txBox="1"/>
           <p:nvPr/>
         </p:nvSpPr>
         <p:spPr>
           <a:xfrm>
-            <a:off x="822959" y="3081528"/>
+            <a:off x="6537959" y="3081528"/>
             <a:ext cx="640080" cy="320040"/>
           </a:xfrm>
           <a:prstGeom prst="rect">
@@ -12900,20 +12547,20 @@
                 </a:solidFill>
                 <a:latin typeface="Calibri"/>
               </a:rPr>
-              <a:t>RQ2</a:t>
-            </a:r>
-          </a:p>
-        </p:txBody>
-      </p:sp>
-      <p:sp>
-        <p:nvSpPr>
-          <p:cNvPr id="10" name="TextBox 9"/>
+              <a:t>RQ5</a:t>
+            </a:r>
+          </a:p>
+        </p:txBody>
+      </p:sp>
+      <p:sp>
+        <p:nvSpPr>
+          <p:cNvPr id="19" name="TextBox 18"/>
           <p:cNvSpPr txBox="1"/>
           <p:nvPr/>
         </p:nvSpPr>
         <p:spPr>
           <a:xfrm>
-            <a:off x="1463040" y="3081528"/>
+            <a:off x="7178040" y="3081528"/>
             <a:ext cx="4251960" cy="640080"/>
           </a:xfrm>
           <a:prstGeom prst="rect">
@@ -12939,20 +12586,20 @@
                 </a:solidFill>
                 <a:latin typeface="Calibri"/>
               </a:rPr>
-              <a:t>Does CFTC crowding predict weaker carry, and does cutting exposure help out of sample?</a:t>
-            </a:r>
-          </a:p>
-        </p:txBody>
-      </p:sp>
-      <p:sp>
-        <p:nvSpPr>
-          <p:cNvPr id="11" name="TextBox 10"/>
+              <a:t>What drives its losses, and does a pre-specified risk control help?</a:t>
+            </a:r>
+          </a:p>
+        </p:txBody>
+      </p:sp>
+      <p:sp>
+        <p:nvSpPr>
+          <p:cNvPr id="20" name="TextBox 19"/>
           <p:cNvSpPr txBox="1"/>
           <p:nvPr/>
         </p:nvSpPr>
         <p:spPr>
           <a:xfrm>
-            <a:off x="822959" y="3739896"/>
+            <a:off x="6537959" y="3739896"/>
             <a:ext cx="640080" cy="320040"/>
           </a:xfrm>
           <a:prstGeom prst="rect">
@@ -12978,20 +12625,20 @@
                 </a:solidFill>
                 <a:latin typeface="Calibri"/>
               </a:rPr>
-              <a:t>RQ3</a:t>
-            </a:r>
-          </a:p>
-        </p:txBody>
-      </p:sp>
-      <p:sp>
-        <p:nvSpPr>
-          <p:cNvPr id="12" name="TextBox 11"/>
+              <a:t>RQ6</a:t>
+            </a:r>
+          </a:p>
+        </p:txBody>
+      </p:sp>
+      <p:sp>
+        <p:nvSpPr>
+          <p:cNvPr id="21" name="TextBox 20"/>
           <p:cNvSpPr txBox="1"/>
           <p:nvPr/>
         </p:nvSpPr>
         <p:spPr>
           <a:xfrm>
-            <a:off x="1463040" y="3739896"/>
+            <a:off x="7178040" y="3739896"/>
             <a:ext cx="4251960" cy="640080"/>
           </a:xfrm>
           <a:prstGeom prst="rect">
@@ -13017,20 +12664,20 @@
                 </a:solidFill>
                 <a:latin typeface="Calibri"/>
               </a:rPr>
-              <a:t>Is carry exposed to volatility shocks and the dollar factor?</a:t>
-            </a:r>
-          </a:p>
-        </p:txBody>
-      </p:sp>
-      <p:sp>
-        <p:nvSpPr>
-          <p:cNvPr id="13" name="TextBox 12"/>
+              <a:t>Are FX and crypto carry correlated; does combining them diversify?</a:t>
+            </a:r>
+          </a:p>
+        </p:txBody>
+      </p:sp>
+      <p:sp>
+        <p:nvSpPr>
+          <p:cNvPr id="22" name="TextBox 21"/>
           <p:cNvSpPr txBox="1"/>
           <p:nvPr/>
         </p:nvSpPr>
         <p:spPr>
           <a:xfrm>
-            <a:off x="822959" y="4443983"/>
+            <a:off x="6537959" y="4443983"/>
             <a:ext cx="4937760" cy="320040"/>
           </a:xfrm>
           <a:prstGeom prst="rect">
@@ -13063,436 +12710,7 @@
       </p:sp>
       <p:sp>
         <p:nvSpPr>
-          <p:cNvPr id="14" name="TextBox 13"/>
-          <p:cNvSpPr txBox="1"/>
-          <p:nvPr/>
-        </p:nvSpPr>
-        <p:spPr>
-          <a:xfrm>
-            <a:off x="822959" y="4782312"/>
-            <a:ext cx="4937760" cy="1280160"/>
-          </a:xfrm>
-          <a:prstGeom prst="rect">
-            <a:avLst/>
-          </a:prstGeom>
-          <a:noFill/>
-        </p:spPr>
-        <p:txBody>
-          <a:bodyPr wrap="square" anchor="t" lIns="0" rIns="0" tIns="0" bIns="0">
-            <a:spAutoFit/>
-          </a:bodyPr>
-          <a:lstStyle/>
-          <a:p>
-            <a:pPr algn="l">
-              <a:spcAft>
-                <a:spcPts val="400"/>
-              </a:spcAft>
-            </a:pPr>
-            <a:r>
-              <a:rPr sz="1300" b="0" i="0">
-                <a:solidFill>
-                  <a:srgbClr val="1B1F27"/>
-                </a:solidFill>
-                <a:latin typeface="Calibri"/>
-              </a:rPr>
-              <a:t>•  H1: positive carry premium (H0: zero)</a:t>
-            </a:r>
-          </a:p>
-          <a:p>
-            <a:pPr algn="l">
-              <a:spcAft>
-                <a:spcPts val="400"/>
-              </a:spcAft>
-            </a:pPr>
-            <a:r>
-              <a:rPr sz="1300" b="0" i="0">
-                <a:solidFill>
-                  <a:srgbClr val="1B1F27"/>
-                </a:solidFill>
-                <a:latin typeface="Calibri"/>
-              </a:rPr>
-              <a:t>•  H1: weaker, more negatively skewed carry after crowded months</a:t>
-            </a:r>
-          </a:p>
-          <a:p>
-            <a:pPr algn="l">
-              <a:spcAft>
-                <a:spcPts val="400"/>
-              </a:spcAft>
-            </a:pPr>
-            <a:r>
-              <a:rPr sz="1300" b="0" i="0">
-                <a:solidFill>
-                  <a:srgbClr val="1B1F27"/>
-                </a:solidFill>
-                <a:latin typeface="Calibri"/>
-              </a:rPr>
-              <a:t>•  H1: negative beta to volatility innovations</a:t>
-            </a:r>
-          </a:p>
-        </p:txBody>
-      </p:sp>
-      <p:sp>
-        <p:nvSpPr>
-          <p:cNvPr id="15" name="Rounded Rectangle 14"/>
-          <p:cNvSpPr/>
-          <p:nvPr/>
-        </p:nvSpPr>
-        <p:spPr>
-          <a:xfrm>
-            <a:off x="6263640" y="1783080"/>
-            <a:ext cx="5394960" cy="4526280"/>
-          </a:xfrm>
-          <a:prstGeom prst="roundRect">
-            <a:avLst>
-              <a:gd name="adj" fmla="val 8000"/>
-            </a:avLst>
-          </a:prstGeom>
-          <a:solidFill>
-            <a:srgbClr val="EEF1F6"/>
-          </a:solidFill>
-          <a:ln>
-            <a:noFill/>
-          </a:ln>
-          <a:effectLst/>
-        </p:spPr>
-        <p:style>
-          <a:lnRef idx="1">
-            <a:schemeClr val="accent1"/>
-          </a:lnRef>
-          <a:fillRef idx="3">
-            <a:schemeClr val="accent1"/>
-          </a:fillRef>
-          <a:effectRef idx="2">
-            <a:schemeClr val="accent1"/>
-          </a:effectRef>
-          <a:fontRef idx="minor">
-            <a:schemeClr val="lt1"/>
-          </a:fontRef>
-        </p:style>
-        <p:txBody>
-          <a:bodyPr rtlCol="0" anchor="ctr"/>
-          <a:lstStyle/>
-          <a:p>
-            <a:pPr algn="ctr"/>
-          </a:p>
-        </p:txBody>
-      </p:sp>
-      <p:sp>
-        <p:nvSpPr>
-          <p:cNvPr id="16" name="TextBox 15"/>
-          <p:cNvSpPr txBox="1"/>
-          <p:nvPr/>
-        </p:nvSpPr>
-        <p:spPr>
-          <a:xfrm>
-            <a:off x="6537959" y="1920240"/>
-            <a:ext cx="4937760" cy="411480"/>
-          </a:xfrm>
-          <a:prstGeom prst="rect">
-            <a:avLst/>
-          </a:prstGeom>
-          <a:noFill/>
-        </p:spPr>
-        <p:txBody>
-          <a:bodyPr wrap="square" anchor="t" lIns="0" rIns="0" tIns="0" bIns="0">
-            <a:spAutoFit/>
-          </a:bodyPr>
-          <a:lstStyle/>
-          <a:p>
-            <a:pPr algn="l">
-              <a:spcAft>
-                <a:spcPts val="600"/>
-              </a:spcAft>
-            </a:pPr>
-            <a:r>
-              <a:rPr sz="1800" b="1" i="0">
-                <a:solidFill>
-                  <a:srgbClr val="B7700C"/>
-                </a:solidFill>
-                <a:latin typeface="Calibri"/>
-              </a:rPr>
-              <a:t>Strategy C · crypto funding carry</a:t>
-            </a:r>
-          </a:p>
-        </p:txBody>
-      </p:sp>
-      <p:sp>
-        <p:nvSpPr>
-          <p:cNvPr id="17" name="TextBox 16"/>
-          <p:cNvSpPr txBox="1"/>
-          <p:nvPr/>
-        </p:nvSpPr>
-        <p:spPr>
-          <a:xfrm>
-            <a:off x="6537959" y="2423160"/>
-            <a:ext cx="640080" cy="320040"/>
-          </a:xfrm>
-          <a:prstGeom prst="rect">
-            <a:avLst/>
-          </a:prstGeom>
-          <a:noFill/>
-        </p:spPr>
-        <p:txBody>
-          <a:bodyPr wrap="square" anchor="t" lIns="0" rIns="0" tIns="0" bIns="0">
-            <a:spAutoFit/>
-          </a:bodyPr>
-          <a:lstStyle/>
-          <a:p>
-            <a:pPr algn="l">
-              <a:spcAft>
-                <a:spcPts val="600"/>
-              </a:spcAft>
-            </a:pPr>
-            <a:r>
-              <a:rPr sz="1300" b="1" i="0">
-                <a:solidFill>
-                  <a:srgbClr val="5C677D"/>
-                </a:solidFill>
-                <a:latin typeface="Calibri"/>
-              </a:rPr>
-              <a:t>RQ4</a:t>
-            </a:r>
-          </a:p>
-        </p:txBody>
-      </p:sp>
-      <p:sp>
-        <p:nvSpPr>
-          <p:cNvPr id="18" name="TextBox 17"/>
-          <p:cNvSpPr txBox="1"/>
-          <p:nvPr/>
-        </p:nvSpPr>
-        <p:spPr>
-          <a:xfrm>
-            <a:off x="7178040" y="2423160"/>
-            <a:ext cx="4251960" cy="640080"/>
-          </a:xfrm>
-          <a:prstGeom prst="rect">
-            <a:avLst/>
-          </a:prstGeom>
-          <a:noFill/>
-        </p:spPr>
-        <p:txBody>
-          <a:bodyPr wrap="square" anchor="t" lIns="0" rIns="0" tIns="0" bIns="0">
-            <a:spAutoFit/>
-          </a:bodyPr>
-          <a:lstStyle/>
-          <a:p>
-            <a:pPr algn="l">
-              <a:spcAft>
-                <a:spcPts val="600"/>
-              </a:spcAft>
-            </a:pPr>
-            <a:r>
-              <a:rPr sz="1300" b="0" i="0">
-                <a:solidFill>
-                  <a:srgbClr val="1B1F27"/>
-                </a:solidFill>
-                <a:latin typeface="Calibri"/>
-              </a:rPr>
-              <a:t>Does short-high / long-low funding earn a premium after costs, from funding or price?</a:t>
-            </a:r>
-          </a:p>
-        </p:txBody>
-      </p:sp>
-      <p:sp>
-        <p:nvSpPr>
-          <p:cNvPr id="19" name="TextBox 18"/>
-          <p:cNvSpPr txBox="1"/>
-          <p:nvPr/>
-        </p:nvSpPr>
-        <p:spPr>
-          <a:xfrm>
-            <a:off x="6537959" y="3081528"/>
-            <a:ext cx="640080" cy="320040"/>
-          </a:xfrm>
-          <a:prstGeom prst="rect">
-            <a:avLst/>
-          </a:prstGeom>
-          <a:noFill/>
-        </p:spPr>
-        <p:txBody>
-          <a:bodyPr wrap="square" anchor="t" lIns="0" rIns="0" tIns="0" bIns="0">
-            <a:spAutoFit/>
-          </a:bodyPr>
-          <a:lstStyle/>
-          <a:p>
-            <a:pPr algn="l">
-              <a:spcAft>
-                <a:spcPts val="600"/>
-              </a:spcAft>
-            </a:pPr>
-            <a:r>
-              <a:rPr sz="1300" b="1" i="0">
-                <a:solidFill>
-                  <a:srgbClr val="5C677D"/>
-                </a:solidFill>
-                <a:latin typeface="Calibri"/>
-              </a:rPr>
-              <a:t>RQ5</a:t>
-            </a:r>
-          </a:p>
-        </p:txBody>
-      </p:sp>
-      <p:sp>
-        <p:nvSpPr>
-          <p:cNvPr id="20" name="TextBox 19"/>
-          <p:cNvSpPr txBox="1"/>
-          <p:nvPr/>
-        </p:nvSpPr>
-        <p:spPr>
-          <a:xfrm>
-            <a:off x="7178040" y="3081528"/>
-            <a:ext cx="4251960" cy="640080"/>
-          </a:xfrm>
-          <a:prstGeom prst="rect">
-            <a:avLst/>
-          </a:prstGeom>
-          <a:noFill/>
-        </p:spPr>
-        <p:txBody>
-          <a:bodyPr wrap="square" anchor="t" lIns="0" rIns="0" tIns="0" bIns="0">
-            <a:spAutoFit/>
-          </a:bodyPr>
-          <a:lstStyle/>
-          <a:p>
-            <a:pPr algn="l">
-              <a:spcAft>
-                <a:spcPts val="600"/>
-              </a:spcAft>
-            </a:pPr>
-            <a:r>
-              <a:rPr sz="1300" b="0" i="0">
-                <a:solidFill>
-                  <a:srgbClr val="1B1F27"/>
-                </a:solidFill>
-                <a:latin typeface="Calibri"/>
-              </a:rPr>
-              <a:t>What drives its losses, and does a pre-specified risk control help?</a:t>
-            </a:r>
-          </a:p>
-        </p:txBody>
-      </p:sp>
-      <p:sp>
-        <p:nvSpPr>
-          <p:cNvPr id="21" name="TextBox 20"/>
-          <p:cNvSpPr txBox="1"/>
-          <p:nvPr/>
-        </p:nvSpPr>
-        <p:spPr>
-          <a:xfrm>
-            <a:off x="6537959" y="3739896"/>
-            <a:ext cx="640080" cy="320040"/>
-          </a:xfrm>
-          <a:prstGeom prst="rect">
-            <a:avLst/>
-          </a:prstGeom>
-          <a:noFill/>
-        </p:spPr>
-        <p:txBody>
-          <a:bodyPr wrap="square" anchor="t" lIns="0" rIns="0" tIns="0" bIns="0">
-            <a:spAutoFit/>
-          </a:bodyPr>
-          <a:lstStyle/>
-          <a:p>
-            <a:pPr algn="l">
-              <a:spcAft>
-                <a:spcPts val="600"/>
-              </a:spcAft>
-            </a:pPr>
-            <a:r>
-              <a:rPr sz="1300" b="1" i="0">
-                <a:solidFill>
-                  <a:srgbClr val="5C677D"/>
-                </a:solidFill>
-                <a:latin typeface="Calibri"/>
-              </a:rPr>
-              <a:t>RQ6</a:t>
-            </a:r>
-          </a:p>
-        </p:txBody>
-      </p:sp>
-      <p:sp>
-        <p:nvSpPr>
-          <p:cNvPr id="22" name="TextBox 21"/>
-          <p:cNvSpPr txBox="1"/>
-          <p:nvPr/>
-        </p:nvSpPr>
-        <p:spPr>
-          <a:xfrm>
-            <a:off x="7178040" y="3739896"/>
-            <a:ext cx="4251960" cy="640080"/>
-          </a:xfrm>
-          <a:prstGeom prst="rect">
-            <a:avLst/>
-          </a:prstGeom>
-          <a:noFill/>
-        </p:spPr>
-        <p:txBody>
-          <a:bodyPr wrap="square" anchor="t" lIns="0" rIns="0" tIns="0" bIns="0">
-            <a:spAutoFit/>
-          </a:bodyPr>
-          <a:lstStyle/>
-          <a:p>
-            <a:pPr algn="l">
-              <a:spcAft>
-                <a:spcPts val="600"/>
-              </a:spcAft>
-            </a:pPr>
-            <a:r>
-              <a:rPr sz="1300" b="0" i="0">
-                <a:solidFill>
-                  <a:srgbClr val="1B1F27"/>
-                </a:solidFill>
-                <a:latin typeface="Calibri"/>
-              </a:rPr>
-              <a:t>Are FX and crypto carry correlated; does combining them diversify?</a:t>
-            </a:r>
-          </a:p>
-        </p:txBody>
-      </p:sp>
-      <p:sp>
-        <p:nvSpPr>
           <p:cNvPr id="23" name="TextBox 22"/>
-          <p:cNvSpPr txBox="1"/>
-          <p:nvPr/>
-        </p:nvSpPr>
-        <p:spPr>
-          <a:xfrm>
-            <a:off x="6537959" y="4443983"/>
-            <a:ext cx="4937760" cy="320040"/>
-          </a:xfrm>
-          <a:prstGeom prst="rect">
-            <a:avLst/>
-          </a:prstGeom>
-          <a:noFill/>
-        </p:spPr>
-        <p:txBody>
-          <a:bodyPr wrap="square" anchor="t" lIns="0" rIns="0" tIns="0" bIns="0">
-            <a:spAutoFit/>
-          </a:bodyPr>
-          <a:lstStyle/>
-          <a:p>
-            <a:pPr algn="l">
-              <a:spcAft>
-                <a:spcPts val="600"/>
-              </a:spcAft>
-            </a:pPr>
-            <a:r>
-              <a:rPr sz="1300" b="1" i="0">
-                <a:solidFill>
-                  <a:srgbClr val="5C677D"/>
-                </a:solidFill>
-                <a:latin typeface="Calibri"/>
-              </a:rPr>
-              <a:t>Hypotheses</a:t>
-            </a:r>
-          </a:p>
-        </p:txBody>
-      </p:sp>
-      <p:sp>
-        <p:nvSpPr>
-          <p:cNvPr id="24" name="TextBox 23"/>
           <p:cNvSpPr txBox="1"/>
           <p:nvPr/>
         </p:nvSpPr>
@@ -13580,7 +12798,7 @@
         <p:spPr>
           <a:xfrm>
             <a:off x="548640" y="411480"/>
-            <a:ext cx="9692640" cy="731520"/>
+            <a:ext cx="11064240" cy="731520"/>
           </a:xfrm>
           <a:prstGeom prst="rect">
             <a:avLst/>
@@ -13649,64 +12867,9 @@
           </a:p>
         </p:txBody>
       </p:sp>
-      <p:sp>
-        <p:nvSpPr>
-          <p:cNvPr id="4" name="Rounded Rectangle 3"/>
-          <p:cNvSpPr/>
-          <p:nvPr/>
-        </p:nvSpPr>
-        <p:spPr>
-          <a:xfrm>
-            <a:off x="10271455" y="457200"/>
-            <a:ext cx="1371600" cy="384048"/>
-          </a:xfrm>
-          <a:prstGeom prst="roundRect">
-            <a:avLst>
-              <a:gd name="adj" fmla="val 8000"/>
-            </a:avLst>
-          </a:prstGeom>
-          <a:solidFill>
-            <a:srgbClr val="E39B17"/>
-          </a:solidFill>
-          <a:ln>
-            <a:noFill/>
-          </a:ln>
-          <a:effectLst/>
-        </p:spPr>
-        <p:style>
-          <a:lnRef idx="1">
-            <a:schemeClr val="accent1"/>
-          </a:lnRef>
-          <a:fillRef idx="3">
-            <a:schemeClr val="accent1"/>
-          </a:fillRef>
-          <a:effectRef idx="2">
-            <a:schemeClr val="accent1"/>
-          </a:effectRef>
-          <a:fontRef idx="minor">
-            <a:schemeClr val="lt1"/>
-          </a:fontRef>
-        </p:style>
-        <p:txBody>
-          <a:bodyPr rtlCol="0" anchor="ctr" lIns="0" rIns="0"/>
-          <a:lstStyle/>
-          <a:p>
-            <a:pPr algn="ctr"/>
-            <a:r>
-              <a:rPr sz="1200" b="1">
-                <a:solidFill>
-                  <a:srgbClr val="14213D"/>
-                </a:solidFill>
-                <a:latin typeface="Calibri"/>
-              </a:rPr>
-              <a:t>Paraj</a:t>
-            </a:r>
-          </a:p>
-        </p:txBody>
-      </p:sp>
       <p:graphicFrame>
         <p:nvGraphicFramePr>
-          <p:cNvPr id="5" name="Table 4"/>
+          <p:cNvPr id="4" name="Table 3"/>
           <p:cNvGraphicFramePr>
             <a:graphicFrameLocks noGrp="1"/>
           </p:cNvGraphicFramePr>
@@ -14298,7 +13461,7 @@
       </p:graphicFrame>
       <p:sp>
         <p:nvSpPr>
-          <p:cNvPr id="6" name="Rounded Rectangle 5"/>
+          <p:cNvPr id="5" name="Rounded Rectangle 4"/>
           <p:cNvSpPr/>
           <p:nvPr/>
         </p:nvSpPr>
@@ -14344,7 +13507,7 @@
       </p:sp>
       <p:sp>
         <p:nvSpPr>
-          <p:cNvPr id="7" name="TextBox 6"/>
+          <p:cNvPr id="6" name="TextBox 5"/>
           <p:cNvSpPr txBox="1"/>
           <p:nvPr/>
         </p:nvSpPr>
@@ -14383,7 +13546,7 @@
       </p:sp>
       <p:sp>
         <p:nvSpPr>
-          <p:cNvPr id="8" name="TextBox 7"/>
+          <p:cNvPr id="7" name="TextBox 6"/>
           <p:cNvSpPr txBox="1"/>
           <p:nvPr/>
         </p:nvSpPr>
@@ -14422,7 +13585,7 @@
       </p:sp>
       <p:sp>
         <p:nvSpPr>
-          <p:cNvPr id="9" name="Rounded Rectangle 8"/>
+          <p:cNvPr id="8" name="Rounded Rectangle 7"/>
           <p:cNvSpPr/>
           <p:nvPr/>
         </p:nvSpPr>
@@ -14468,7 +13631,7 @@
       </p:sp>
       <p:sp>
         <p:nvSpPr>
-          <p:cNvPr id="10" name="TextBox 9"/>
+          <p:cNvPr id="9" name="TextBox 8"/>
           <p:cNvSpPr txBox="1"/>
           <p:nvPr/>
         </p:nvSpPr>
@@ -14507,7 +13670,7 @@
       </p:sp>
       <p:sp>
         <p:nvSpPr>
-          <p:cNvPr id="11" name="TextBox 10"/>
+          <p:cNvPr id="10" name="TextBox 9"/>
           <p:cNvSpPr txBox="1"/>
           <p:nvPr/>
         </p:nvSpPr>
@@ -14546,7 +13709,7 @@
       </p:sp>
       <p:sp>
         <p:nvSpPr>
-          <p:cNvPr id="12" name="Rounded Rectangle 11"/>
+          <p:cNvPr id="11" name="Rounded Rectangle 10"/>
           <p:cNvSpPr/>
           <p:nvPr/>
         </p:nvSpPr>
@@ -14592,7 +13755,7 @@
       </p:sp>
       <p:sp>
         <p:nvSpPr>
-          <p:cNvPr id="13" name="TextBox 12"/>
+          <p:cNvPr id="12" name="TextBox 11"/>
           <p:cNvSpPr txBox="1"/>
           <p:nvPr/>
         </p:nvSpPr>
@@ -14631,7 +13794,7 @@
       </p:sp>
       <p:sp>
         <p:nvSpPr>
-          <p:cNvPr id="14" name="TextBox 13"/>
+          <p:cNvPr id="13" name="TextBox 12"/>
           <p:cNvSpPr txBox="1"/>
           <p:nvPr/>
         </p:nvSpPr>
@@ -14703,7 +13866,7 @@
         <p:spPr>
           <a:xfrm>
             <a:off x="548640" y="411480"/>
-            <a:ext cx="9692640" cy="731520"/>
+            <a:ext cx="11064240" cy="731520"/>
           </a:xfrm>
           <a:prstGeom prst="rect">
             <a:avLst/>
@@ -14780,8 +13943,8 @@
         </p:nvSpPr>
         <p:spPr>
           <a:xfrm>
-            <a:off x="10271455" y="457200"/>
-            <a:ext cx="1371600" cy="384048"/>
+            <a:off x="548640" y="1783080"/>
+            <a:ext cx="3520440" cy="1874519"/>
           </a:xfrm>
           <a:prstGeom prst="roundRect">
             <a:avLst>
@@ -14789,7 +13952,7 @@
             </a:avLst>
           </a:prstGeom>
           <a:solidFill>
-            <a:srgbClr val="E39B17"/>
+            <a:srgbClr val="EEF1F6"/>
           </a:solidFill>
           <a:ln>
             <a:noFill/>
@@ -14811,31 +13974,100 @@
           </a:fontRef>
         </p:style>
         <p:txBody>
-          <a:bodyPr rtlCol="0" anchor="ctr" lIns="0" rIns="0"/>
+          <a:bodyPr rtlCol="0" anchor="ctr"/>
           <a:lstStyle/>
           <a:p>
             <a:pPr algn="ctr"/>
-            <a:r>
-              <a:rPr sz="1200" b="1">
+          </a:p>
+        </p:txBody>
+      </p:sp>
+      <p:sp>
+        <p:nvSpPr>
+          <p:cNvPr id="5" name="TextBox 4"/>
+          <p:cNvSpPr txBox="1"/>
+          <p:nvPr/>
+        </p:nvSpPr>
+        <p:spPr>
+          <a:xfrm>
+            <a:off x="777240" y="1965960"/>
+            <a:ext cx="3108960" cy="411480"/>
+          </a:xfrm>
+          <a:prstGeom prst="rect">
+            <a:avLst/>
+          </a:prstGeom>
+          <a:noFill/>
+        </p:spPr>
+        <p:txBody>
+          <a:bodyPr wrap="square" anchor="t" lIns="0" rIns="0" tIns="0" bIns="0">
+            <a:spAutoFit/>
+          </a:bodyPr>
+          <a:lstStyle/>
+          <a:p>
+            <a:pPr algn="l">
+              <a:spcAft>
+                <a:spcPts val="600"/>
+              </a:spcAft>
+            </a:pPr>
+            <a:r>
+              <a:rPr sz="1700" b="1" i="0">
                 <a:solidFill>
                   <a:srgbClr val="14213D"/>
                 </a:solidFill>
                 <a:latin typeface="Calibri"/>
               </a:rPr>
-              <a:t>Paraj</a:t>
-            </a:r>
-          </a:p>
-        </p:txBody>
-      </p:sp>
-      <p:sp>
-        <p:nvSpPr>
-          <p:cNvPr id="5" name="Rounded Rectangle 4"/>
+              <a:t>Pre-specified</a:t>
+            </a:r>
+          </a:p>
+        </p:txBody>
+      </p:sp>
+      <p:sp>
+        <p:nvSpPr>
+          <p:cNvPr id="6" name="TextBox 5"/>
+          <p:cNvSpPr txBox="1"/>
+          <p:nvPr/>
+        </p:nvSpPr>
+        <p:spPr>
+          <a:xfrm>
+            <a:off x="777240" y="2468880"/>
+            <a:ext cx="3108960" cy="1097280"/>
+          </a:xfrm>
+          <a:prstGeom prst="rect">
+            <a:avLst/>
+          </a:prstGeom>
+          <a:noFill/>
+        </p:spPr>
+        <p:txBody>
+          <a:bodyPr wrap="square" anchor="t" lIns="0" rIns="0" tIns="0" bIns="0">
+            <a:spAutoFit/>
+          </a:bodyPr>
+          <a:lstStyle/>
+          <a:p>
+            <a:pPr algn="l">
+              <a:spcAft>
+                <a:spcPts val="600"/>
+              </a:spcAft>
+            </a:pPr>
+            <a:r>
+              <a:rPr sz="1300" b="0" i="0">
+                <a:solidFill>
+                  <a:srgbClr val="1B1F27"/>
+                </a:solidFill>
+                <a:latin typeface="Calibri"/>
+              </a:rPr>
+              <a:t>All legs, windows, thresholds, lookbacks and costs fixed before the first backtest</a:t>
+            </a:r>
+          </a:p>
+        </p:txBody>
+      </p:sp>
+      <p:sp>
+        <p:nvSpPr>
+          <p:cNvPr id="7" name="Rounded Rectangle 6"/>
           <p:cNvSpPr/>
           <p:nvPr/>
         </p:nvSpPr>
         <p:spPr>
           <a:xfrm>
-            <a:off x="548640" y="1783080"/>
+            <a:off x="4297679" y="1783080"/>
             <a:ext cx="3520440" cy="1874519"/>
           </a:xfrm>
           <a:prstGeom prst="roundRect">
@@ -14875,13 +14107,13 @@
       </p:sp>
       <p:sp>
         <p:nvSpPr>
-          <p:cNvPr id="6" name="TextBox 5"/>
+          <p:cNvPr id="8" name="TextBox 7"/>
           <p:cNvSpPr txBox="1"/>
           <p:nvPr/>
         </p:nvSpPr>
         <p:spPr>
           <a:xfrm>
-            <a:off x="777240" y="1965960"/>
+            <a:off x="4526279" y="1965960"/>
             <a:ext cx="3108960" cy="411480"/>
           </a:xfrm>
           <a:prstGeom prst="rect">
@@ -14907,20 +14139,20 @@
                 </a:solidFill>
                 <a:latin typeface="Calibri"/>
               </a:rPr>
-              <a:t>Pre-specified</a:t>
-            </a:r>
-          </a:p>
-        </p:txBody>
-      </p:sp>
-      <p:sp>
-        <p:nvSpPr>
-          <p:cNvPr id="7" name="TextBox 6"/>
+              <a:t>In- vs out-of-sample</a:t>
+            </a:r>
+          </a:p>
+        </p:txBody>
+      </p:sp>
+      <p:sp>
+        <p:nvSpPr>
+          <p:cNvPr id="9" name="TextBox 8"/>
           <p:cNvSpPr txBox="1"/>
           <p:nvPr/>
         </p:nvSpPr>
         <p:spPr>
           <a:xfrm>
-            <a:off x="777240" y="2468880"/>
+            <a:off x="4526279" y="2468880"/>
             <a:ext cx="3108960" cy="1097280"/>
           </a:xfrm>
           <a:prstGeom prst="rect">
@@ -14946,20 +14178,20 @@
                 </a:solidFill>
                 <a:latin typeface="Calibri"/>
               </a:rPr>
-              <a:t>All legs, windows, thresholds, lookbacks and costs fixed before the first backtest</a:t>
-            </a:r>
-          </a:p>
-        </p:txBody>
-      </p:sp>
-      <p:sp>
-        <p:nvSpPr>
-          <p:cNvPr id="8" name="Rounded Rectangle 7"/>
+              <a:t>A: 1999–2010 / 2011–2026.  C: 2020–2023 / 2024–2026</a:t>
+            </a:r>
+          </a:p>
+        </p:txBody>
+      </p:sp>
+      <p:sp>
+        <p:nvSpPr>
+          <p:cNvPr id="10" name="Rounded Rectangle 9"/>
           <p:cNvSpPr/>
           <p:nvPr/>
         </p:nvSpPr>
         <p:spPr>
           <a:xfrm>
-            <a:off x="4297679" y="1783080"/>
+            <a:off x="8046719" y="1783080"/>
             <a:ext cx="3520440" cy="1874519"/>
           </a:xfrm>
           <a:prstGeom prst="roundRect">
@@ -14999,13 +14231,13 @@
       </p:sp>
       <p:sp>
         <p:nvSpPr>
-          <p:cNvPr id="9" name="TextBox 8"/>
+          <p:cNvPr id="11" name="TextBox 10"/>
           <p:cNvSpPr txBox="1"/>
           <p:nvPr/>
         </p:nvSpPr>
         <p:spPr>
           <a:xfrm>
-            <a:off x="4526279" y="1965960"/>
+            <a:off x="8275319" y="1965960"/>
             <a:ext cx="3108960" cy="411480"/>
           </a:xfrm>
           <a:prstGeom prst="rect">
@@ -15031,20 +14263,20 @@
                 </a:solidFill>
                 <a:latin typeface="Calibri"/>
               </a:rPr>
-              <a:t>In- vs out-of-sample</a:t>
-            </a:r>
-          </a:p>
-        </p:txBody>
-      </p:sp>
-      <p:sp>
-        <p:nvSpPr>
-          <p:cNvPr id="10" name="TextBox 9"/>
+              <a:t>Transaction costs</a:t>
+            </a:r>
+          </a:p>
+        </p:txBody>
+      </p:sp>
+      <p:sp>
+        <p:nvSpPr>
+          <p:cNvPr id="12" name="TextBox 11"/>
           <p:cNvSpPr txBox="1"/>
           <p:nvPr/>
         </p:nvSpPr>
         <p:spPr>
           <a:xfrm>
-            <a:off x="4526279" y="2468880"/>
+            <a:off x="8275319" y="2468880"/>
             <a:ext cx="3108960" cy="1097280"/>
           </a:xfrm>
           <a:prstGeom prst="rect">
@@ -15070,20 +14302,20 @@
                 </a:solidFill>
                 <a:latin typeface="Calibri"/>
               </a:rPr>
-              <a:t>A: 1999–2010 / 2011–2026.  C: 2020–2023 / 2024–2026</a:t>
-            </a:r>
-          </a:p>
-        </p:txBody>
-      </p:sp>
-      <p:sp>
-        <p:nvSpPr>
-          <p:cNvPr id="11" name="Rounded Rectangle 10"/>
+              <a:t>3 bp per unit traded in FX, 5 bp in crypto; gross and net reported</a:t>
+            </a:r>
+          </a:p>
+        </p:txBody>
+      </p:sp>
+      <p:sp>
+        <p:nvSpPr>
+          <p:cNvPr id="13" name="Rounded Rectangle 12"/>
           <p:cNvSpPr/>
           <p:nvPr/>
         </p:nvSpPr>
         <p:spPr>
           <a:xfrm>
-            <a:off x="8046719" y="1783080"/>
+            <a:off x="548640" y="3886200"/>
             <a:ext cx="3520440" cy="1874519"/>
           </a:xfrm>
           <a:prstGeom prst="roundRect">
@@ -15123,13 +14355,13 @@
       </p:sp>
       <p:sp>
         <p:nvSpPr>
-          <p:cNvPr id="12" name="TextBox 11"/>
+          <p:cNvPr id="14" name="TextBox 13"/>
           <p:cNvSpPr txBox="1"/>
           <p:nvPr/>
         </p:nvSpPr>
         <p:spPr>
           <a:xfrm>
-            <a:off x="8275319" y="1965960"/>
+            <a:off x="777240" y="4069080"/>
             <a:ext cx="3108960" cy="411480"/>
           </a:xfrm>
           <a:prstGeom prst="rect">
@@ -15155,20 +14387,20 @@
                 </a:solidFill>
                 <a:latin typeface="Calibri"/>
               </a:rPr>
-              <a:t>Transaction costs</a:t>
-            </a:r>
-          </a:p>
-        </p:txBody>
-      </p:sp>
-      <p:sp>
-        <p:nvSpPr>
-          <p:cNvPr id="13" name="TextBox 12"/>
+              <a:t>No look-ahead</a:t>
+            </a:r>
+          </a:p>
+        </p:txBody>
+      </p:sp>
+      <p:sp>
+        <p:nvSpPr>
+          <p:cNvPr id="15" name="TextBox 14"/>
           <p:cNvSpPr txBox="1"/>
           <p:nvPr/>
         </p:nvSpPr>
         <p:spPr>
           <a:xfrm>
-            <a:off x="8275319" y="2468880"/>
+            <a:off x="777240" y="4572000"/>
             <a:ext cx="3108960" cy="1097280"/>
           </a:xfrm>
           <a:prstGeom prst="rect">
@@ -15194,20 +14426,20 @@
                 </a:solidFill>
                 <a:latin typeface="Calibri"/>
               </a:rPr>
-              <a:t>3 bp per unit traded in FX, 5 bp in crypto; gross and net reported</a:t>
-            </a:r>
-          </a:p>
-        </p:txBody>
-      </p:sp>
-      <p:sp>
-        <p:nvSpPr>
-          <p:cNvPr id="14" name="Rounded Rectangle 13"/>
+              <a:t>Weights at t earn t+1; CFTC used after its Friday release; funding up to t−1</a:t>
+            </a:r>
+          </a:p>
+        </p:txBody>
+      </p:sp>
+      <p:sp>
+        <p:nvSpPr>
+          <p:cNvPr id="16" name="Rounded Rectangle 15"/>
           <p:cNvSpPr/>
           <p:nvPr/>
         </p:nvSpPr>
         <p:spPr>
           <a:xfrm>
-            <a:off x="548640" y="3886200"/>
+            <a:off x="4297679" y="3886200"/>
             <a:ext cx="3520440" cy="1874519"/>
           </a:xfrm>
           <a:prstGeom prst="roundRect">
@@ -15247,13 +14479,13 @@
       </p:sp>
       <p:sp>
         <p:nvSpPr>
-          <p:cNvPr id="15" name="TextBox 14"/>
+          <p:cNvPr id="17" name="TextBox 16"/>
           <p:cNvSpPr txBox="1"/>
           <p:nvPr/>
         </p:nvSpPr>
         <p:spPr>
           <a:xfrm>
-            <a:off x="777240" y="4069080"/>
+            <a:off x="4526279" y="4069080"/>
             <a:ext cx="3108960" cy="411480"/>
           </a:xfrm>
           <a:prstGeom prst="rect">
@@ -15279,20 +14511,20 @@
                 </a:solidFill>
                 <a:latin typeface="Calibri"/>
               </a:rPr>
-              <a:t>No look-ahead</a:t>
-            </a:r>
-          </a:p>
-        </p:txBody>
-      </p:sp>
-      <p:sp>
-        <p:nvSpPr>
-          <p:cNvPr id="16" name="TextBox 15"/>
+              <a:t>Survivorship</a:t>
+            </a:r>
+          </a:p>
+        </p:txBody>
+      </p:sp>
+      <p:sp>
+        <p:nvSpPr>
+          <p:cNvPr id="18" name="TextBox 17"/>
           <p:cNvSpPr txBox="1"/>
           <p:nvPr/>
         </p:nvSpPr>
         <p:spPr>
           <a:xfrm>
-            <a:off x="777240" y="4572000"/>
+            <a:off x="4526279" y="4572000"/>
             <a:ext cx="3108960" cy="1097280"/>
           </a:xfrm>
           <a:prstGeom prst="rect">
@@ -15318,20 +14550,20 @@
                 </a:solidFill>
                 <a:latin typeface="Calibri"/>
               </a:rPr>
-              <a:t>Weights at t earn t+1; CFTC used after its Friday release; funding up to t−1</a:t>
-            </a:r>
-          </a:p>
-        </p:txBody>
-      </p:sp>
-      <p:sp>
-        <p:nvSpPr>
-          <p:cNvPr id="17" name="Rounded Rectangle 16"/>
+              <a:t>LUNA and FTT kept; a coin trades only with a price and positive volume</a:t>
+            </a:r>
+          </a:p>
+        </p:txBody>
+      </p:sp>
+      <p:sp>
+        <p:nvSpPr>
+          <p:cNvPr id="19" name="Rounded Rectangle 18"/>
           <p:cNvSpPr/>
           <p:nvPr/>
         </p:nvSpPr>
         <p:spPr>
           <a:xfrm>
-            <a:off x="4297679" y="3886200"/>
+            <a:off x="8046719" y="3886200"/>
             <a:ext cx="3520440" cy="1874519"/>
           </a:xfrm>
           <a:prstGeom prst="roundRect">
@@ -15371,13 +14603,13 @@
       </p:sp>
       <p:sp>
         <p:nvSpPr>
-          <p:cNvPr id="18" name="TextBox 17"/>
+          <p:cNvPr id="20" name="TextBox 19"/>
           <p:cNvSpPr txBox="1"/>
           <p:nvPr/>
         </p:nvSpPr>
         <p:spPr>
           <a:xfrm>
-            <a:off x="4526279" y="4069080"/>
+            <a:off x="8275319" y="4069080"/>
             <a:ext cx="3108960" cy="411480"/>
           </a:xfrm>
           <a:prstGeom prst="rect">
@@ -15403,138 +14635,14 @@
                 </a:solidFill>
                 <a:latin typeface="Calibri"/>
               </a:rPr>
-              <a:t>Survivorship</a:t>
-            </a:r>
-          </a:p>
-        </p:txBody>
-      </p:sp>
-      <p:sp>
-        <p:nvSpPr>
-          <p:cNvPr id="19" name="TextBox 18"/>
-          <p:cNvSpPr txBox="1"/>
-          <p:nvPr/>
-        </p:nvSpPr>
-        <p:spPr>
-          <a:xfrm>
-            <a:off x="4526279" y="4572000"/>
-            <a:ext cx="3108960" cy="1097280"/>
-          </a:xfrm>
-          <a:prstGeom prst="rect">
-            <a:avLst/>
-          </a:prstGeom>
-          <a:noFill/>
-        </p:spPr>
-        <p:txBody>
-          <a:bodyPr wrap="square" anchor="t" lIns="0" rIns="0" tIns="0" bIns="0">
-            <a:spAutoFit/>
-          </a:bodyPr>
-          <a:lstStyle/>
-          <a:p>
-            <a:pPr algn="l">
-              <a:spcAft>
-                <a:spcPts val="600"/>
-              </a:spcAft>
-            </a:pPr>
-            <a:r>
-              <a:rPr sz="1300" b="0" i="0">
-                <a:solidFill>
-                  <a:srgbClr val="1B1F27"/>
-                </a:solidFill>
-                <a:latin typeface="Calibri"/>
-              </a:rPr>
-              <a:t>LUNA and FTT kept; a coin trades only with a price and positive volume</a:t>
-            </a:r>
-          </a:p>
-        </p:txBody>
-      </p:sp>
-      <p:sp>
-        <p:nvSpPr>
-          <p:cNvPr id="20" name="Rounded Rectangle 19"/>
-          <p:cNvSpPr/>
-          <p:nvPr/>
-        </p:nvSpPr>
-        <p:spPr>
-          <a:xfrm>
-            <a:off x="8046719" y="3886200"/>
-            <a:ext cx="3520440" cy="1874519"/>
-          </a:xfrm>
-          <a:prstGeom prst="roundRect">
-            <a:avLst>
-              <a:gd name="adj" fmla="val 8000"/>
-            </a:avLst>
-          </a:prstGeom>
-          <a:solidFill>
-            <a:srgbClr val="EEF1F6"/>
-          </a:solidFill>
-          <a:ln>
-            <a:noFill/>
-          </a:ln>
-          <a:effectLst/>
-        </p:spPr>
-        <p:style>
-          <a:lnRef idx="1">
-            <a:schemeClr val="accent1"/>
-          </a:lnRef>
-          <a:fillRef idx="3">
-            <a:schemeClr val="accent1"/>
-          </a:fillRef>
-          <a:effectRef idx="2">
-            <a:schemeClr val="accent1"/>
-          </a:effectRef>
-          <a:fontRef idx="minor">
-            <a:schemeClr val="lt1"/>
-          </a:fontRef>
-        </p:style>
-        <p:txBody>
-          <a:bodyPr rtlCol="0" anchor="ctr"/>
-          <a:lstStyle/>
-          <a:p>
-            <a:pPr algn="ctr"/>
+              <a:t>Robustness and validation</a:t>
+            </a:r>
           </a:p>
         </p:txBody>
       </p:sp>
       <p:sp>
         <p:nvSpPr>
           <p:cNvPr id="21" name="TextBox 20"/>
-          <p:cNvSpPr txBox="1"/>
-          <p:nvPr/>
-        </p:nvSpPr>
-        <p:spPr>
-          <a:xfrm>
-            <a:off x="8275319" y="4069080"/>
-            <a:ext cx="3108960" cy="411480"/>
-          </a:xfrm>
-          <a:prstGeom prst="rect">
-            <a:avLst/>
-          </a:prstGeom>
-          <a:noFill/>
-        </p:spPr>
-        <p:txBody>
-          <a:bodyPr wrap="square" anchor="t" lIns="0" rIns="0" tIns="0" bIns="0">
-            <a:spAutoFit/>
-          </a:bodyPr>
-          <a:lstStyle/>
-          <a:p>
-            <a:pPr algn="l">
-              <a:spcAft>
-                <a:spcPts val="600"/>
-              </a:spcAft>
-            </a:pPr>
-            <a:r>
-              <a:rPr sz="1700" b="1" i="0">
-                <a:solidFill>
-                  <a:srgbClr val="14213D"/>
-                </a:solidFill>
-                <a:latin typeface="Calibri"/>
-              </a:rPr>
-              <a:t>Robustness and validation</a:t>
-            </a:r>
-          </a:p>
-        </p:txBody>
-      </p:sp>
-      <p:sp>
-        <p:nvSpPr>
-          <p:cNvPr id="22" name="TextBox 21"/>
           <p:cNvSpPr txBox="1"/>
           <p:nvPr/>
         </p:nvSpPr>
@@ -15606,7 +14714,7 @@
         <p:spPr>
           <a:xfrm>
             <a:off x="548640" y="411480"/>
-            <a:ext cx="9692640" cy="731520"/>
+            <a:ext cx="11064240" cy="731520"/>
           </a:xfrm>
           <a:prstGeom prst="rect">
             <a:avLst/>
@@ -15677,27 +14785,24 @@
       </p:sp>
       <p:sp>
         <p:nvSpPr>
-          <p:cNvPr id="4" name="Rounded Rectangle 3"/>
+          <p:cNvPr id="4" name="Oval 3"/>
           <p:cNvSpPr/>
           <p:nvPr/>
         </p:nvSpPr>
         <p:spPr>
           <a:xfrm>
-            <a:off x="10271455" y="457200"/>
-            <a:ext cx="1371600" cy="384048"/>
-          </a:xfrm>
-          <a:prstGeom prst="roundRect">
-            <a:avLst>
-              <a:gd name="adj" fmla="val 8000"/>
-            </a:avLst>
+            <a:off x="548640" y="1874519"/>
+            <a:ext cx="502920" cy="502920"/>
+          </a:xfrm>
+          <a:prstGeom prst="ellipse">
+            <a:avLst/>
           </a:prstGeom>
           <a:solidFill>
-            <a:srgbClr val="E39B17"/>
+            <a:srgbClr val="14213D"/>
           </a:solidFill>
           <a:ln>
             <a:noFill/>
           </a:ln>
-          <a:effectLst/>
         </p:spPr>
         <p:style>
           <a:lnRef idx="1">
@@ -15714,31 +14819,109 @@
           </a:fontRef>
         </p:style>
         <p:txBody>
-          <a:bodyPr rtlCol="0" anchor="ctr" lIns="0" rIns="0"/>
+          <a:bodyPr rtlCol="0" anchor="ctr"/>
           <a:lstStyle/>
           <a:p>
             <a:pPr algn="ctr"/>
             <a:r>
-              <a:rPr sz="1200" b="1">
+              <a:rPr sz="1600" b="1">
+                <a:solidFill>
+                  <a:srgbClr val="FFFFFF"/>
+                </a:solidFill>
+                <a:latin typeface="Calibri"/>
+              </a:rPr>
+              <a:t>1</a:t>
+            </a:r>
+          </a:p>
+        </p:txBody>
+      </p:sp>
+      <p:sp>
+        <p:nvSpPr>
+          <p:cNvPr id="5" name="TextBox 4"/>
+          <p:cNvSpPr txBox="1"/>
+          <p:nvPr/>
+        </p:nvSpPr>
+        <p:spPr>
+          <a:xfrm>
+            <a:off x="1280160" y="1856231"/>
+            <a:ext cx="5852160" cy="365760"/>
+          </a:xfrm>
+          <a:prstGeom prst="rect">
+            <a:avLst/>
+          </a:prstGeom>
+          <a:noFill/>
+        </p:spPr>
+        <p:txBody>
+          <a:bodyPr wrap="square" anchor="t" lIns="0" rIns="0" tIns="0" bIns="0">
+            <a:spAutoFit/>
+          </a:bodyPr>
+          <a:lstStyle/>
+          <a:p>
+            <a:pPr algn="l">
+              <a:spcAft>
+                <a:spcPts val="600"/>
+              </a:spcAft>
+            </a:pPr>
+            <a:r>
+              <a:rPr sz="1700" b="1" i="0">
                 <a:solidFill>
                   <a:srgbClr val="14213D"/>
                 </a:solidFill>
                 <a:latin typeface="Calibri"/>
               </a:rPr>
-              <a:t>Reza</a:t>
-            </a:r>
-          </a:p>
-        </p:txBody>
-      </p:sp>
-      <p:sp>
-        <p:nvSpPr>
-          <p:cNvPr id="5" name="Oval 4"/>
+              <a:t>Carry portfolio</a:t>
+            </a:r>
+          </a:p>
+        </p:txBody>
+      </p:sp>
+      <p:sp>
+        <p:nvSpPr>
+          <p:cNvPr id="6" name="TextBox 5"/>
+          <p:cNvSpPr txBox="1"/>
+          <p:nvPr/>
+        </p:nvSpPr>
+        <p:spPr>
+          <a:xfrm>
+            <a:off x="1280160" y="2221991"/>
+            <a:ext cx="5852160" cy="731519"/>
+          </a:xfrm>
+          <a:prstGeom prst="rect">
+            <a:avLst/>
+          </a:prstGeom>
+          <a:noFill/>
+        </p:spPr>
+        <p:txBody>
+          <a:bodyPr wrap="square" anchor="t" lIns="0" rIns="0" tIns="0" bIns="0">
+            <a:spAutoFit/>
+          </a:bodyPr>
+          <a:lstStyle/>
+          <a:p>
+            <a:pPr algn="l">
+              <a:spcAft>
+                <a:spcPts val="600"/>
+              </a:spcAft>
+            </a:pPr>
+            <a:r>
+              <a:rPr sz="1400" b="0" i="0">
+                <a:solidFill>
+                  <a:srgbClr val="1B1F27"/>
+                </a:solidFill>
+                <a:latin typeface="Calibri"/>
+              </a:rPr>
+              <a:t>Each month-end: long the 2 highest-rate currencies, short the 2 lowest. Equal weights, dollar-neutral, 3 bp costs.</a:t>
+            </a:r>
+          </a:p>
+        </p:txBody>
+      </p:sp>
+      <p:sp>
+        <p:nvSpPr>
+          <p:cNvPr id="7" name="Oval 6"/>
           <p:cNvSpPr/>
           <p:nvPr/>
         </p:nvSpPr>
         <p:spPr>
           <a:xfrm>
-            <a:off x="548640" y="1874519"/>
+            <a:off x="548640" y="2971800"/>
             <a:ext cx="502920" cy="502920"/>
           </a:xfrm>
           <a:prstGeom prst="ellipse">
@@ -15777,20 +14960,20 @@
                 </a:solidFill>
                 <a:latin typeface="Calibri"/>
               </a:rPr>
-              <a:t>1</a:t>
-            </a:r>
-          </a:p>
-        </p:txBody>
-      </p:sp>
-      <p:sp>
-        <p:nvSpPr>
-          <p:cNvPr id="6" name="TextBox 5"/>
+              <a:t>2</a:t>
+            </a:r>
+          </a:p>
+        </p:txBody>
+      </p:sp>
+      <p:sp>
+        <p:nvSpPr>
+          <p:cNvPr id="8" name="TextBox 7"/>
           <p:cNvSpPr txBox="1"/>
           <p:nvPr/>
         </p:nvSpPr>
         <p:spPr>
           <a:xfrm>
-            <a:off x="1280160" y="1856231"/>
+            <a:off x="1280160" y="2953512"/>
             <a:ext cx="5852160" cy="365760"/>
           </a:xfrm>
           <a:prstGeom prst="rect">
@@ -15816,20 +14999,20 @@
                 </a:solidFill>
                 <a:latin typeface="Calibri"/>
               </a:rPr>
-              <a:t>Carry portfolio</a:t>
-            </a:r>
-          </a:p>
-        </p:txBody>
-      </p:sp>
-      <p:sp>
-        <p:nvSpPr>
-          <p:cNvPr id="7" name="TextBox 6"/>
+              <a:t>Crowding signal (alternative data)</a:t>
+            </a:r>
+          </a:p>
+        </p:txBody>
+      </p:sp>
+      <p:sp>
+        <p:nvSpPr>
+          <p:cNvPr id="9" name="TextBox 8"/>
           <p:cNvSpPr txBox="1"/>
           <p:nvPr/>
         </p:nvSpPr>
         <p:spPr>
           <a:xfrm>
-            <a:off x="1280160" y="2221991"/>
+            <a:off x="1280160" y="3319272"/>
             <a:ext cx="5852160" cy="731519"/>
           </a:xfrm>
           <a:prstGeom prst="rect">
@@ -15855,20 +15038,20 @@
                 </a:solidFill>
                 <a:latin typeface="Calibri"/>
               </a:rPr>
-              <a:t>Each month-end: long the 2 highest-rate currencies, short the 2 lowest. Equal weights, dollar-neutral, 3 bp costs.</a:t>
-            </a:r>
-          </a:p>
-        </p:txBody>
-      </p:sp>
-      <p:sp>
-        <p:nvSpPr>
-          <p:cNvPr id="8" name="Oval 7"/>
+              <a:t>CFTC net speculative position / open interest, 36-month z-score, used only after the Friday release.</a:t>
+            </a:r>
+          </a:p>
+        </p:txBody>
+      </p:sp>
+      <p:sp>
+        <p:nvSpPr>
+          <p:cNvPr id="10" name="Oval 9"/>
           <p:cNvSpPr/>
           <p:nvPr/>
         </p:nvSpPr>
         <p:spPr>
           <a:xfrm>
-            <a:off x="548640" y="2971800"/>
+            <a:off x="548640" y="4069079"/>
             <a:ext cx="502920" cy="502920"/>
           </a:xfrm>
           <a:prstGeom prst="ellipse">
@@ -15907,20 +15090,20 @@
                 </a:solidFill>
                 <a:latin typeface="Calibri"/>
               </a:rPr>
-              <a:t>2</a:t>
-            </a:r>
-          </a:p>
-        </p:txBody>
-      </p:sp>
-      <p:sp>
-        <p:nvSpPr>
-          <p:cNvPr id="9" name="TextBox 8"/>
+              <a:t>3</a:t>
+            </a:r>
+          </a:p>
+        </p:txBody>
+      </p:sp>
+      <p:sp>
+        <p:nvSpPr>
+          <p:cNvPr id="11" name="TextBox 10"/>
           <p:cNvSpPr txBox="1"/>
           <p:nvPr/>
         </p:nvSpPr>
         <p:spPr>
           <a:xfrm>
-            <a:off x="1280160" y="2953512"/>
+            <a:off x="1280160" y="4050791"/>
             <a:ext cx="5852160" cy="365760"/>
           </a:xfrm>
           <a:prstGeom prst="rect">
@@ -15946,20 +15129,20 @@
                 </a:solidFill>
                 <a:latin typeface="Calibri"/>
               </a:rPr>
-              <a:t>Crowding signal (alternative data)</a:t>
-            </a:r>
-          </a:p>
-        </p:txBody>
-      </p:sp>
-      <p:sp>
-        <p:nvSpPr>
-          <p:cNvPr id="10" name="TextBox 9"/>
+              <a:t>Portfolio crowding</a:t>
+            </a:r>
+          </a:p>
+        </p:txBody>
+      </p:sp>
+      <p:sp>
+        <p:nvSpPr>
+          <p:cNvPr id="12" name="TextBox 11"/>
           <p:cNvSpPr txBox="1"/>
           <p:nvPr/>
         </p:nvSpPr>
         <p:spPr>
           <a:xfrm>
-            <a:off x="1280160" y="3319272"/>
+            <a:off x="1280160" y="4416551"/>
             <a:ext cx="5852160" cy="731519"/>
           </a:xfrm>
           <a:prstGeom prst="rect">
@@ -15985,20 +15168,20 @@
                 </a:solidFill>
                 <a:latin typeface="Calibri"/>
               </a:rPr>
-              <a:t>CFTC net speculative position / open interest, 36-month z-score, used only after the Friday release.</a:t>
-            </a:r>
-          </a:p>
-        </p:txBody>
-      </p:sp>
-      <p:sp>
-        <p:nvSpPr>
-          <p:cNvPr id="11" name="Oval 10"/>
+              <a:t>Average z of the long leg minus average z of the short leg.</a:t>
+            </a:r>
+          </a:p>
+        </p:txBody>
+      </p:sp>
+      <p:sp>
+        <p:nvSpPr>
+          <p:cNvPr id="13" name="Oval 12"/>
           <p:cNvSpPr/>
           <p:nvPr/>
         </p:nvSpPr>
         <p:spPr>
           <a:xfrm>
-            <a:off x="548640" y="4069079"/>
+            <a:off x="548640" y="5166359"/>
             <a:ext cx="502920" cy="502920"/>
           </a:xfrm>
           <a:prstGeom prst="ellipse">
@@ -16037,20 +15220,20 @@
                 </a:solidFill>
                 <a:latin typeface="Calibri"/>
               </a:rPr>
-              <a:t>3</a:t>
-            </a:r>
-          </a:p>
-        </p:txBody>
-      </p:sp>
-      <p:sp>
-        <p:nvSpPr>
-          <p:cNvPr id="12" name="TextBox 11"/>
+              <a:t>4</a:t>
+            </a:r>
+          </a:p>
+        </p:txBody>
+      </p:sp>
+      <p:sp>
+        <p:nvSpPr>
+          <p:cNvPr id="14" name="TextBox 13"/>
           <p:cNvSpPr txBox="1"/>
           <p:nvPr/>
         </p:nvSpPr>
         <p:spPr>
           <a:xfrm>
-            <a:off x="1280160" y="4050791"/>
+            <a:off x="1280160" y="5148072"/>
             <a:ext cx="5852160" cy="365760"/>
           </a:xfrm>
           <a:prstGeom prst="rect">
@@ -16076,20 +15259,20 @@
                 </a:solidFill>
                 <a:latin typeface="Calibri"/>
               </a:rPr>
-              <a:t>Portfolio crowding</a:t>
-            </a:r>
-          </a:p>
-        </p:txBody>
-      </p:sp>
-      <p:sp>
-        <p:nvSpPr>
-          <p:cNvPr id="13" name="TextBox 12"/>
+              <a:t>Filter</a:t>
+            </a:r>
+          </a:p>
+        </p:txBody>
+      </p:sp>
+      <p:sp>
+        <p:nvSpPr>
+          <p:cNvPr id="15" name="TextBox 14"/>
           <p:cNvSpPr txBox="1"/>
           <p:nvPr/>
         </p:nvSpPr>
         <p:spPr>
           <a:xfrm>
-            <a:off x="1280160" y="4416551"/>
+            <a:off x="1280160" y="5513831"/>
             <a:ext cx="5852160" cy="731519"/>
           </a:xfrm>
           <a:prstGeom prst="rect">
@@ -16115,31 +15298,34 @@
                 </a:solidFill>
                 <a:latin typeface="Calibri"/>
               </a:rPr>
-              <a:t>Average z of the long leg minus average z of the short leg.</a:t>
-            </a:r>
-          </a:p>
-        </p:txBody>
-      </p:sp>
-      <p:sp>
-        <p:nvSpPr>
-          <p:cNvPr id="14" name="Oval 13"/>
+              <a:t>Crowding &gt; 1: cut positions to half. All parameters fixed before testing; out-of-sample from 2011.</a:t>
+            </a:r>
+          </a:p>
+        </p:txBody>
+      </p:sp>
+      <p:sp>
+        <p:nvSpPr>
+          <p:cNvPr id="16" name="Rounded Rectangle 15"/>
           <p:cNvSpPr/>
           <p:nvPr/>
         </p:nvSpPr>
         <p:spPr>
           <a:xfrm>
-            <a:off x="548640" y="5166359"/>
-            <a:ext cx="502920" cy="502920"/>
-          </a:xfrm>
-          <a:prstGeom prst="ellipse">
-            <a:avLst/>
+            <a:off x="7863840" y="1874519"/>
+            <a:ext cx="3749039" cy="1417320"/>
+          </a:xfrm>
+          <a:prstGeom prst="roundRect">
+            <a:avLst>
+              <a:gd name="adj" fmla="val 8000"/>
+            </a:avLst>
           </a:prstGeom>
           <a:solidFill>
-            <a:srgbClr val="14213D"/>
+            <a:srgbClr val="EEF1F6"/>
           </a:solidFill>
           <a:ln>
             <a:noFill/>
           </a:ln>
+          <a:effectLst/>
         </p:spPr>
         <p:style>
           <a:lnRef idx="1">
@@ -16160,28 +15346,19 @@
           <a:lstStyle/>
           <a:p>
             <a:pPr algn="ctr"/>
-            <a:r>
-              <a:rPr sz="1600" b="1">
-                <a:solidFill>
-                  <a:srgbClr val="FFFFFF"/>
-                </a:solidFill>
-                <a:latin typeface="Calibri"/>
-              </a:rPr>
-              <a:t>4</a:t>
-            </a:r>
-          </a:p>
-        </p:txBody>
-      </p:sp>
-      <p:sp>
-        <p:nvSpPr>
-          <p:cNvPr id="15" name="TextBox 14"/>
+          </a:p>
+        </p:txBody>
+      </p:sp>
+      <p:sp>
+        <p:nvSpPr>
+          <p:cNvPr id="17" name="TextBox 16"/>
           <p:cNvSpPr txBox="1"/>
           <p:nvPr/>
         </p:nvSpPr>
         <p:spPr>
           <a:xfrm>
-            <a:off x="1280160" y="5148072"/>
-            <a:ext cx="5852160" cy="365760"/>
+            <a:off x="8092440" y="2039112"/>
+            <a:ext cx="3291839" cy="685800"/>
           </a:xfrm>
           <a:prstGeom prst="rect">
             <a:avLst/>
@@ -16200,27 +15377,27 @@
               </a:spcAft>
             </a:pPr>
             <a:r>
-              <a:rPr sz="1700" b="1" i="0">
+              <a:rPr sz="3400" b="1" i="0">
                 <a:solidFill>
                   <a:srgbClr val="14213D"/>
                 </a:solidFill>
-                <a:latin typeface="Calibri"/>
-              </a:rPr>
-              <a:t>Filter</a:t>
-            </a:r>
-          </a:p>
-        </p:txBody>
-      </p:sp>
-      <p:sp>
-        <p:nvSpPr>
-          <p:cNvPr id="16" name="TextBox 15"/>
+                <a:latin typeface="Cambria"/>
+              </a:rPr>
+              <a:t>1986</a:t>
+            </a:r>
+          </a:p>
+        </p:txBody>
+      </p:sp>
+      <p:sp>
+        <p:nvSpPr>
+          <p:cNvPr id="18" name="TextBox 17"/>
           <p:cNvSpPr txBox="1"/>
           <p:nvPr/>
         </p:nvSpPr>
         <p:spPr>
           <a:xfrm>
-            <a:off x="1280160" y="5513831"/>
-            <a:ext cx="5852160" cy="731519"/>
+            <a:off x="8092440" y="2715768"/>
+            <a:ext cx="3291839" cy="502920"/>
           </a:xfrm>
           <a:prstGeom prst="rect">
             <a:avLst/>
@@ -16239,26 +15416,26 @@
               </a:spcAft>
             </a:pPr>
             <a:r>
-              <a:rPr sz="1400" b="0" i="0">
-                <a:solidFill>
-                  <a:srgbClr val="1B1F27"/>
+              <a:rPr sz="1200" b="0" i="0">
+                <a:solidFill>
+                  <a:srgbClr val="5C677D"/>
                 </a:solidFill>
                 <a:latin typeface="Calibri"/>
               </a:rPr>
-              <a:t>Crowding &gt; 1: cut positions to half. All parameters fixed before testing; out-of-sample from 2011.</a:t>
-            </a:r>
-          </a:p>
-        </p:txBody>
-      </p:sp>
-      <p:sp>
-        <p:nvSpPr>
-          <p:cNvPr id="17" name="Rounded Rectangle 16"/>
+              <a:t>CFTC positioning history (after fixing the pre-2000 CME exchange name)</a:t>
+            </a:r>
+          </a:p>
+        </p:txBody>
+      </p:sp>
+      <p:sp>
+        <p:nvSpPr>
+          <p:cNvPr id="19" name="Rounded Rectangle 18"/>
           <p:cNvSpPr/>
           <p:nvPr/>
         </p:nvSpPr>
         <p:spPr>
           <a:xfrm>
-            <a:off x="7863840" y="1874519"/>
+            <a:off x="7863840" y="3520440"/>
             <a:ext cx="3749039" cy="1417320"/>
           </a:xfrm>
           <a:prstGeom prst="roundRect">
@@ -16298,13 +15475,13 @@
       </p:sp>
       <p:sp>
         <p:nvSpPr>
-          <p:cNvPr id="18" name="TextBox 17"/>
+          <p:cNvPr id="20" name="TextBox 19"/>
           <p:cNvSpPr txBox="1"/>
           <p:nvPr/>
         </p:nvSpPr>
         <p:spPr>
           <a:xfrm>
-            <a:off x="8092440" y="2039112"/>
+            <a:off x="8092440" y="3685032"/>
             <a:ext cx="3291839" cy="685800"/>
           </a:xfrm>
           <a:prstGeom prst="rect">
@@ -16330,138 +15507,14 @@
                 </a:solidFill>
                 <a:latin typeface="Cambria"/>
               </a:rPr>
-              <a:t>1986</a:t>
-            </a:r>
-          </a:p>
-        </p:txBody>
-      </p:sp>
-      <p:sp>
-        <p:nvSpPr>
-          <p:cNvPr id="19" name="TextBox 18"/>
-          <p:cNvSpPr txBox="1"/>
-          <p:nvPr/>
-        </p:nvSpPr>
-        <p:spPr>
-          <a:xfrm>
-            <a:off x="8092440" y="2715768"/>
-            <a:ext cx="3291839" cy="502920"/>
-          </a:xfrm>
-          <a:prstGeom prst="rect">
-            <a:avLst/>
-          </a:prstGeom>
-          <a:noFill/>
-        </p:spPr>
-        <p:txBody>
-          <a:bodyPr wrap="square" anchor="t" lIns="0" rIns="0" tIns="0" bIns="0">
-            <a:spAutoFit/>
-          </a:bodyPr>
-          <a:lstStyle/>
-          <a:p>
-            <a:pPr algn="l">
-              <a:spcAft>
-                <a:spcPts val="600"/>
-              </a:spcAft>
-            </a:pPr>
-            <a:r>
-              <a:rPr sz="1200" b="0" i="0">
-                <a:solidFill>
-                  <a:srgbClr val="5C677D"/>
-                </a:solidFill>
-                <a:latin typeface="Calibri"/>
-              </a:rPr>
-              <a:t>CFTC positioning history (after fixing the pre-2000 CME exchange name)</a:t>
-            </a:r>
-          </a:p>
-        </p:txBody>
-      </p:sp>
-      <p:sp>
-        <p:nvSpPr>
-          <p:cNvPr id="20" name="Rounded Rectangle 19"/>
-          <p:cNvSpPr/>
-          <p:nvPr/>
-        </p:nvSpPr>
-        <p:spPr>
-          <a:xfrm>
-            <a:off x="7863840" y="3520440"/>
-            <a:ext cx="3749039" cy="1417320"/>
-          </a:xfrm>
-          <a:prstGeom prst="roundRect">
-            <a:avLst>
-              <a:gd name="adj" fmla="val 8000"/>
-            </a:avLst>
-          </a:prstGeom>
-          <a:solidFill>
-            <a:srgbClr val="EEF1F6"/>
-          </a:solidFill>
-          <a:ln>
-            <a:noFill/>
-          </a:ln>
-          <a:effectLst/>
-        </p:spPr>
-        <p:style>
-          <a:lnRef idx="1">
-            <a:schemeClr val="accent1"/>
-          </a:lnRef>
-          <a:fillRef idx="3">
-            <a:schemeClr val="accent1"/>
-          </a:fillRef>
-          <a:effectRef idx="2">
-            <a:schemeClr val="accent1"/>
-          </a:effectRef>
-          <a:fontRef idx="minor">
-            <a:schemeClr val="lt1"/>
-          </a:fontRef>
-        </p:style>
-        <p:txBody>
-          <a:bodyPr rtlCol="0" anchor="ctr"/>
-          <a:lstStyle/>
-          <a:p>
-            <a:pPr algn="ctr"/>
+              <a:t>33</a:t>
+            </a:r>
           </a:p>
         </p:txBody>
       </p:sp>
       <p:sp>
         <p:nvSpPr>
           <p:cNvPr id="21" name="TextBox 20"/>
-          <p:cNvSpPr txBox="1"/>
-          <p:nvPr/>
-        </p:nvSpPr>
-        <p:spPr>
-          <a:xfrm>
-            <a:off x="8092440" y="3685032"/>
-            <a:ext cx="3291839" cy="685800"/>
-          </a:xfrm>
-          <a:prstGeom prst="rect">
-            <a:avLst/>
-          </a:prstGeom>
-          <a:noFill/>
-        </p:spPr>
-        <p:txBody>
-          <a:bodyPr wrap="square" anchor="t" lIns="0" rIns="0" tIns="0" bIns="0">
-            <a:spAutoFit/>
-          </a:bodyPr>
-          <a:lstStyle/>
-          <a:p>
-            <a:pPr algn="l">
-              <a:spcAft>
-                <a:spcPts val="600"/>
-              </a:spcAft>
-            </a:pPr>
-            <a:r>
-              <a:rPr sz="3400" b="1" i="0">
-                <a:solidFill>
-                  <a:srgbClr val="14213D"/>
-                </a:solidFill>
-                <a:latin typeface="Cambria"/>
-              </a:rPr>
-              <a:t>33</a:t>
-            </a:r>
-          </a:p>
-        </p:txBody>
-      </p:sp>
-      <p:sp>
-        <p:nvSpPr>
-          <p:cNvPr id="22" name="TextBox 21"/>
           <p:cNvSpPr txBox="1"/>
           <p:nvPr/>
         </p:nvSpPr>
@@ -16533,7 +15586,7 @@
         <p:spPr>
           <a:xfrm>
             <a:off x="548640" y="411480"/>
-            <a:ext cx="9692640" cy="731520"/>
+            <a:ext cx="11064240" cy="731520"/>
           </a:xfrm>
           <a:prstGeom prst="rect">
             <a:avLst/>
@@ -16563,16 +15616,40 @@
           </a:p>
         </p:txBody>
       </p:sp>
-      <p:sp>
-        <p:nvSpPr>
-          <p:cNvPr id="3" name="Rounded Rectangle 2"/>
+      <p:pic>
+        <p:nvPicPr>
+          <p:cNvPr id="3" name="Picture 2" descr="a_cum.png"/>
+          <p:cNvPicPr>
+            <a:picLocks noChangeAspect="1"/>
+          </p:cNvPicPr>
+          <p:nvPr/>
+        </p:nvPicPr>
+        <p:blipFill>
+          <a:blip r:embed="rId2"/>
+          <a:stretch>
+            <a:fillRect/>
+          </a:stretch>
+        </p:blipFill>
+        <p:spPr>
+          <a:xfrm>
+            <a:off x="457200" y="1325880"/>
+            <a:ext cx="7223760" cy="3876164"/>
+          </a:xfrm>
+          <a:prstGeom prst="rect">
+            <a:avLst/>
+          </a:prstGeom>
+        </p:spPr>
+      </p:pic>
+      <p:sp>
+        <p:nvSpPr>
+          <p:cNvPr id="4" name="Rounded Rectangle 3"/>
           <p:cNvSpPr/>
           <p:nvPr/>
         </p:nvSpPr>
         <p:spPr>
           <a:xfrm>
-            <a:off x="10271455" y="457200"/>
-            <a:ext cx="1371600" cy="384048"/>
+            <a:off x="8001000" y="1417320"/>
+            <a:ext cx="3657600" cy="1417320"/>
           </a:xfrm>
           <a:prstGeom prst="roundRect">
             <a:avLst>
@@ -16580,7 +15657,7 @@
             </a:avLst>
           </a:prstGeom>
           <a:solidFill>
-            <a:srgbClr val="E39B17"/>
+            <a:srgbClr val="EEF1F6"/>
           </a:solidFill>
           <a:ln>
             <a:noFill/>
@@ -16602,55 +15679,100 @@
           </a:fontRef>
         </p:style>
         <p:txBody>
-          <a:bodyPr rtlCol="0" anchor="ctr" lIns="0" rIns="0"/>
+          <a:bodyPr rtlCol="0" anchor="ctr"/>
           <a:lstStyle/>
           <a:p>
             <a:pPr algn="ctr"/>
-            <a:r>
-              <a:rPr sz="1200" b="1">
+          </a:p>
+        </p:txBody>
+      </p:sp>
+      <p:sp>
+        <p:nvSpPr>
+          <p:cNvPr id="5" name="TextBox 4"/>
+          <p:cNvSpPr txBox="1"/>
+          <p:nvPr/>
+        </p:nvSpPr>
+        <p:spPr>
+          <a:xfrm>
+            <a:off x="8229600" y="1581912"/>
+            <a:ext cx="3200400" cy="685800"/>
+          </a:xfrm>
+          <a:prstGeom prst="rect">
+            <a:avLst/>
+          </a:prstGeom>
+          <a:noFill/>
+        </p:spPr>
+        <p:txBody>
+          <a:bodyPr wrap="square" anchor="t" lIns="0" rIns="0" tIns="0" bIns="0">
+            <a:spAutoFit/>
+          </a:bodyPr>
+          <a:lstStyle/>
+          <a:p>
+            <a:pPr algn="l">
+              <a:spcAft>
+                <a:spcPts val="600"/>
+              </a:spcAft>
+            </a:pPr>
+            <a:r>
+              <a:rPr sz="3400" b="1" i="0">
                 <a:solidFill>
                   <a:srgbClr val="14213D"/>
                 </a:solidFill>
+                <a:latin typeface="Cambria"/>
+              </a:rPr>
+              <a:t>0.27 → 0.32</a:t>
+            </a:r>
+          </a:p>
+        </p:txBody>
+      </p:sp>
+      <p:sp>
+        <p:nvSpPr>
+          <p:cNvPr id="6" name="TextBox 5"/>
+          <p:cNvSpPr txBox="1"/>
+          <p:nvPr/>
+        </p:nvSpPr>
+        <p:spPr>
+          <a:xfrm>
+            <a:off x="8229600" y="2258568"/>
+            <a:ext cx="3200400" cy="502920"/>
+          </a:xfrm>
+          <a:prstGeom prst="rect">
+            <a:avLst/>
+          </a:prstGeom>
+          <a:noFill/>
+        </p:spPr>
+        <p:txBody>
+          <a:bodyPr wrap="square" anchor="t" lIns="0" rIns="0" tIns="0" bIns="0">
+            <a:spAutoFit/>
+          </a:bodyPr>
+          <a:lstStyle/>
+          <a:p>
+            <a:pPr algn="l">
+              <a:spcAft>
+                <a:spcPts val="600"/>
+              </a:spcAft>
+            </a:pPr>
+            <a:r>
+              <a:rPr sz="1200" b="0" i="0">
+                <a:solidFill>
+                  <a:srgbClr val="5C677D"/>
+                </a:solidFill>
                 <a:latin typeface="Calibri"/>
               </a:rPr>
-              <a:t>Reza</a:t>
-            </a:r>
-          </a:p>
-        </p:txBody>
-      </p:sp>
-      <p:pic>
-        <p:nvPicPr>
-          <p:cNvPr id="4" name="Picture 3" descr="a_cum.png"/>
-          <p:cNvPicPr>
-            <a:picLocks noChangeAspect="1"/>
-          </p:cNvPicPr>
-          <p:nvPr/>
-        </p:nvPicPr>
-        <p:blipFill>
-          <a:blip r:embed="rId2"/>
-          <a:stretch>
-            <a:fillRect/>
-          </a:stretch>
-        </p:blipFill>
-        <p:spPr>
-          <a:xfrm>
-            <a:off x="457200" y="1325880"/>
-            <a:ext cx="7223760" cy="3876164"/>
-          </a:xfrm>
-          <a:prstGeom prst="rect">
-            <a:avLst/>
-          </a:prstGeom>
-        </p:spPr>
-      </p:pic>
-      <p:sp>
-        <p:nvSpPr>
-          <p:cNvPr id="5" name="Rounded Rectangle 4"/>
+              <a:t>Out-of-sample Sharpe, net: carry vs crowd-filtered (2011–2026)</a:t>
+            </a:r>
+          </a:p>
+        </p:txBody>
+      </p:sp>
+      <p:sp>
+        <p:nvSpPr>
+          <p:cNvPr id="7" name="Rounded Rectangle 6"/>
           <p:cNvSpPr/>
           <p:nvPr/>
         </p:nvSpPr>
         <p:spPr>
           <a:xfrm>
-            <a:off x="8001000" y="1417320"/>
+            <a:off x="8001000" y="3017520"/>
             <a:ext cx="3657600" cy="1417320"/>
           </a:xfrm>
           <a:prstGeom prst="roundRect">
@@ -16690,13 +15812,13 @@
       </p:sp>
       <p:sp>
         <p:nvSpPr>
-          <p:cNvPr id="6" name="TextBox 5"/>
+          <p:cNvPr id="8" name="TextBox 7"/>
           <p:cNvSpPr txBox="1"/>
           <p:nvPr/>
         </p:nvSpPr>
         <p:spPr>
           <a:xfrm>
-            <a:off x="8229600" y="1581912"/>
+            <a:off x="8229600" y="3182112"/>
             <a:ext cx="3200400" cy="685800"/>
           </a:xfrm>
           <a:prstGeom prst="rect">
@@ -16722,20 +15844,20 @@
                 </a:solidFill>
                 <a:latin typeface="Cambria"/>
               </a:rPr>
-              <a:t>0.27 → 0.32</a:t>
-            </a:r>
-          </a:p>
-        </p:txBody>
-      </p:sp>
-      <p:sp>
-        <p:nvSpPr>
-          <p:cNvPr id="7" name="TextBox 6"/>
+              <a:t>0.30% vs 0.02%</a:t>
+            </a:r>
+          </a:p>
+        </p:txBody>
+      </p:sp>
+      <p:sp>
+        <p:nvSpPr>
+          <p:cNvPr id="9" name="TextBox 8"/>
           <p:cNvSpPr txBox="1"/>
           <p:nvPr/>
         </p:nvSpPr>
         <p:spPr>
           <a:xfrm>
-            <a:off x="8229600" y="2258568"/>
+            <a:off x="8229600" y="3858768"/>
             <a:ext cx="3200400" cy="502920"/>
           </a:xfrm>
           <a:prstGeom prst="rect">
@@ -16761,20 +15883,20 @@
                 </a:solidFill>
                 <a:latin typeface="Calibri"/>
               </a:rPr>
-              <a:t>Out-of-sample Sharpe, net: carry vs crowd-filtered (2011–2026)</a:t>
-            </a:r>
-          </a:p>
-        </p:txBody>
-      </p:sp>
-      <p:sp>
-        <p:nvSpPr>
-          <p:cNvPr id="8" name="Rounded Rectangle 7"/>
+              <a:t>Next-month carry after non-crowded vs crowded months</a:t>
+            </a:r>
+          </a:p>
+        </p:txBody>
+      </p:sp>
+      <p:sp>
+        <p:nvSpPr>
+          <p:cNvPr id="10" name="Rounded Rectangle 9"/>
           <p:cNvSpPr/>
           <p:nvPr/>
         </p:nvSpPr>
         <p:spPr>
           <a:xfrm>
-            <a:off x="8001000" y="3017520"/>
+            <a:off x="8001000" y="4617720"/>
             <a:ext cx="3657600" cy="1417320"/>
           </a:xfrm>
           <a:prstGeom prst="roundRect">
@@ -16814,13 +15936,13 @@
       </p:sp>
       <p:sp>
         <p:nvSpPr>
-          <p:cNvPr id="9" name="TextBox 8"/>
+          <p:cNvPr id="11" name="TextBox 10"/>
           <p:cNvSpPr txBox="1"/>
           <p:nvPr/>
         </p:nvSpPr>
         <p:spPr>
           <a:xfrm>
-            <a:off x="8229600" y="3182112"/>
+            <a:off x="8229600" y="4782312"/>
             <a:ext cx="3200400" cy="685800"/>
           </a:xfrm>
           <a:prstGeom prst="rect">
@@ -16842,142 +15964,18 @@
             <a:r>
               <a:rPr sz="3400" b="1" i="0">
                 <a:solidFill>
-                  <a:srgbClr val="14213D"/>
+                  <a:srgbClr val="B83227"/>
                 </a:solidFill>
                 <a:latin typeface="Cambria"/>
               </a:rPr>
-              <a:t>0.30% vs 0.02%</a:t>
-            </a:r>
-          </a:p>
-        </p:txBody>
-      </p:sp>
-      <p:sp>
-        <p:nvSpPr>
-          <p:cNvPr id="10" name="TextBox 9"/>
-          <p:cNvSpPr txBox="1"/>
-          <p:nvPr/>
-        </p:nvSpPr>
-        <p:spPr>
-          <a:xfrm>
-            <a:off x="8229600" y="3858768"/>
-            <a:ext cx="3200400" cy="502920"/>
-          </a:xfrm>
-          <a:prstGeom prst="rect">
-            <a:avLst/>
-          </a:prstGeom>
-          <a:noFill/>
-        </p:spPr>
-        <p:txBody>
-          <a:bodyPr wrap="square" anchor="t" lIns="0" rIns="0" tIns="0" bIns="0">
-            <a:spAutoFit/>
-          </a:bodyPr>
-          <a:lstStyle/>
-          <a:p>
-            <a:pPr algn="l">
-              <a:spcAft>
-                <a:spcPts val="600"/>
-              </a:spcAft>
-            </a:pPr>
-            <a:r>
-              <a:rPr sz="1200" b="0" i="0">
-                <a:solidFill>
-                  <a:srgbClr val="5C677D"/>
-                </a:solidFill>
-                <a:latin typeface="Calibri"/>
-              </a:rPr>
-              <a:t>Next-month carry after non-crowded vs crowded months</a:t>
-            </a:r>
-          </a:p>
-        </p:txBody>
-      </p:sp>
-      <p:sp>
-        <p:nvSpPr>
-          <p:cNvPr id="11" name="Rounded Rectangle 10"/>
-          <p:cNvSpPr/>
-          <p:nvPr/>
-        </p:nvSpPr>
-        <p:spPr>
-          <a:xfrm>
-            <a:off x="8001000" y="4617720"/>
-            <a:ext cx="3657600" cy="1417320"/>
-          </a:xfrm>
-          <a:prstGeom prst="roundRect">
-            <a:avLst>
-              <a:gd name="adj" fmla="val 8000"/>
-            </a:avLst>
-          </a:prstGeom>
-          <a:solidFill>
-            <a:srgbClr val="EEF1F6"/>
-          </a:solidFill>
-          <a:ln>
-            <a:noFill/>
-          </a:ln>
-          <a:effectLst/>
-        </p:spPr>
-        <p:style>
-          <a:lnRef idx="1">
-            <a:schemeClr val="accent1"/>
-          </a:lnRef>
-          <a:fillRef idx="3">
-            <a:schemeClr val="accent1"/>
-          </a:fillRef>
-          <a:effectRef idx="2">
-            <a:schemeClr val="accent1"/>
-          </a:effectRef>
-          <a:fontRef idx="minor">
-            <a:schemeClr val="lt1"/>
-          </a:fontRef>
-        </p:style>
-        <p:txBody>
-          <a:bodyPr rtlCol="0" anchor="ctr"/>
-          <a:lstStyle/>
-          <a:p>
-            <a:pPr algn="ctr"/>
+              <a:t>-37%</a:t>
+            </a:r>
           </a:p>
         </p:txBody>
       </p:sp>
       <p:sp>
         <p:nvSpPr>
           <p:cNvPr id="12" name="TextBox 11"/>
-          <p:cNvSpPr txBox="1"/>
-          <p:nvPr/>
-        </p:nvSpPr>
-        <p:spPr>
-          <a:xfrm>
-            <a:off x="8229600" y="4782312"/>
-            <a:ext cx="3200400" cy="685800"/>
-          </a:xfrm>
-          <a:prstGeom prst="rect">
-            <a:avLst/>
-          </a:prstGeom>
-          <a:noFill/>
-        </p:spPr>
-        <p:txBody>
-          <a:bodyPr wrap="square" anchor="t" lIns="0" rIns="0" tIns="0" bIns="0">
-            <a:spAutoFit/>
-          </a:bodyPr>
-          <a:lstStyle/>
-          <a:p>
-            <a:pPr algn="l">
-              <a:spcAft>
-                <a:spcPts val="600"/>
-              </a:spcAft>
-            </a:pPr>
-            <a:r>
-              <a:rPr sz="3400" b="1" i="0">
-                <a:solidFill>
-                  <a:srgbClr val="B83227"/>
-                </a:solidFill>
-                <a:latin typeface="Cambria"/>
-              </a:rPr>
-              <a:t>-37%</a:t>
-            </a:r>
-          </a:p>
-        </p:txBody>
-      </p:sp>
-      <p:sp>
-        <p:nvSpPr>
-          <p:cNvPr id="13" name="TextBox 12"/>
           <p:cNvSpPr txBox="1"/>
           <p:nvPr/>
         </p:nvSpPr>
@@ -17049,7 +16047,7 @@
         <p:spPr>
           <a:xfrm>
             <a:off x="548640" y="411480"/>
-            <a:ext cx="9692640" cy="731520"/>
+            <a:ext cx="11064240" cy="731520"/>
           </a:xfrm>
           <a:prstGeom prst="rect">
             <a:avLst/>
@@ -17118,16 +16116,40 @@
           </a:p>
         </p:txBody>
       </p:sp>
-      <p:sp>
-        <p:nvSpPr>
-          <p:cNvPr id="4" name="Rounded Rectangle 3"/>
+      <p:pic>
+        <p:nvPicPr>
+          <p:cNvPr id="4" name="Picture 3" descr="a_lrv.png"/>
+          <p:cNvPicPr>
+            <a:picLocks noChangeAspect="1"/>
+          </p:cNvPicPr>
+          <p:nvPr/>
+        </p:nvPicPr>
+        <p:blipFill>
+          <a:blip r:embed="rId2"/>
+          <a:stretch>
+            <a:fillRect/>
+          </a:stretch>
+        </p:blipFill>
+        <p:spPr>
+          <a:xfrm>
+            <a:off x="457200" y="1737360"/>
+            <a:ext cx="6766560" cy="4023360"/>
+          </a:xfrm>
+          <a:prstGeom prst="rect">
+            <a:avLst/>
+          </a:prstGeom>
+        </p:spPr>
+      </p:pic>
+      <p:sp>
+        <p:nvSpPr>
+          <p:cNvPr id="5" name="Rounded Rectangle 4"/>
           <p:cNvSpPr/>
           <p:nvPr/>
         </p:nvSpPr>
         <p:spPr>
           <a:xfrm>
-            <a:off x="10271455" y="457200"/>
-            <a:ext cx="1371600" cy="384048"/>
+            <a:off x="7772400" y="1783080"/>
+            <a:ext cx="3840480" cy="1417320"/>
           </a:xfrm>
           <a:prstGeom prst="roundRect">
             <a:avLst>
@@ -17135,7 +16157,7 @@
             </a:avLst>
           </a:prstGeom>
           <a:solidFill>
-            <a:srgbClr val="E39B17"/>
+            <a:srgbClr val="EEF1F6"/>
           </a:solidFill>
           <a:ln>
             <a:noFill/>
@@ -17157,95 +16179,16 @@
           </a:fontRef>
         </p:style>
         <p:txBody>
-          <a:bodyPr rtlCol="0" anchor="ctr" lIns="0" rIns="0"/>
+          <a:bodyPr rtlCol="0" anchor="ctr"/>
           <a:lstStyle/>
           <a:p>
             <a:pPr algn="ctr"/>
-            <a:r>
-              <a:rPr sz="1200" b="1">
-                <a:solidFill>
-                  <a:srgbClr val="14213D"/>
-                </a:solidFill>
-                <a:latin typeface="Calibri"/>
-              </a:rPr>
-              <a:t>Reza</a:t>
-            </a:r>
-          </a:p>
-        </p:txBody>
-      </p:sp>
-      <p:pic>
-        <p:nvPicPr>
-          <p:cNvPr id="5" name="Picture 4" descr="a_lrv.png"/>
-          <p:cNvPicPr>
-            <a:picLocks noChangeAspect="1"/>
-          </p:cNvPicPr>
-          <p:nvPr/>
-        </p:nvPicPr>
-        <p:blipFill>
-          <a:blip r:embed="rId2"/>
-          <a:stretch>
-            <a:fillRect/>
-          </a:stretch>
-        </p:blipFill>
-        <p:spPr>
-          <a:xfrm>
-            <a:off x="457200" y="1737360"/>
-            <a:ext cx="6766560" cy="4023360"/>
-          </a:xfrm>
-          <a:prstGeom prst="rect">
-            <a:avLst/>
-          </a:prstGeom>
-        </p:spPr>
-      </p:pic>
-      <p:sp>
-        <p:nvSpPr>
-          <p:cNvPr id="6" name="Rounded Rectangle 5"/>
-          <p:cNvSpPr/>
-          <p:nvPr/>
-        </p:nvSpPr>
-        <p:spPr>
-          <a:xfrm>
-            <a:off x="7772400" y="1783080"/>
-            <a:ext cx="3840480" cy="1417320"/>
-          </a:xfrm>
-          <a:prstGeom prst="roundRect">
-            <a:avLst>
-              <a:gd name="adj" fmla="val 8000"/>
-            </a:avLst>
-          </a:prstGeom>
-          <a:solidFill>
-            <a:srgbClr val="EEF1F6"/>
-          </a:solidFill>
-          <a:ln>
-            <a:noFill/>
-          </a:ln>
-          <a:effectLst/>
-        </p:spPr>
-        <p:style>
-          <a:lnRef idx="1">
-            <a:schemeClr val="accent1"/>
-          </a:lnRef>
-          <a:fillRef idx="3">
-            <a:schemeClr val="accent1"/>
-          </a:fillRef>
-          <a:effectRef idx="2">
-            <a:schemeClr val="accent1"/>
-          </a:effectRef>
-          <a:fontRef idx="minor">
-            <a:schemeClr val="lt1"/>
-          </a:fontRef>
-        </p:style>
-        <p:txBody>
-          <a:bodyPr rtlCol="0" anchor="ctr"/>
-          <a:lstStyle/>
-          <a:p>
-            <a:pPr algn="ctr"/>
-          </a:p>
-        </p:txBody>
-      </p:sp>
-      <p:sp>
-        <p:nvSpPr>
-          <p:cNvPr id="7" name="TextBox 6"/>
+          </a:p>
+        </p:txBody>
+      </p:sp>
+      <p:sp>
+        <p:nvSpPr>
+          <p:cNvPr id="6" name="TextBox 5"/>
           <p:cNvSpPr txBox="1"/>
           <p:nvPr/>
         </p:nvSpPr>
@@ -17284,7 +16227,7 @@
       </p:sp>
       <p:sp>
         <p:nvSpPr>
-          <p:cNvPr id="8" name="TextBox 7"/>
+          <p:cNvPr id="7" name="TextBox 6"/>
           <p:cNvSpPr txBox="1"/>
           <p:nvPr/>
         </p:nvSpPr>
@@ -17323,7 +16266,7 @@
       </p:sp>
       <p:graphicFrame>
         <p:nvGraphicFramePr>
-          <p:cNvPr id="9" name="Table 8"/>
+          <p:cNvPr id="8" name="Table 7"/>
           <p:cNvGraphicFramePr>
             <a:graphicFrameLocks noGrp="1"/>
           </p:cNvGraphicFramePr>
